--- a/design/templates/integral-light/template.pptx
+++ b/design/templates/integral-light/template.pptx
@@ -8895,7 +8895,7 @@
             </a:lvl1pPr>
           </a:lstStyle>
           <a:p>
-            <a:fld id="{1146AB1F-C91F-4F0F-9868-5252CDCD6051}" type="datetimeFigureOut">
+            <a:fld id="{A9C3E1C2-504C-4CFF-A37A-AE4693906186}" type="datetimeFigureOut">
               <a:rPr lang="en-US" smtClean="0"/>
               <a:t>10/3/2026</a:t>
             </a:fld>
@@ -8937,7 +8937,7 @@
           <a:bodyPr/>
           <a:lstStyle/>
           <a:p>
-            <a:fld id="{FE1B144C-6E1C-47C6-9306-1DC2A92756EB}" type="slidenum">
+            <a:fld id="{0CAC26E6-90F8-49CB-BE00-E3E555820112}" type="slidenum">
               <a:rPr lang="en-US" smtClean="0"/>
               <a:t>‹#›</a:t>
             </a:fld>
@@ -8985,7 +8985,7 @@
     </p:spTree>
     <p:extLst>
       <p:ext uri="{BB962C8B-B14F-4D97-AF65-F5344CB8AC3E}">
-        <p14:creationId xmlns:p14="http://schemas.microsoft.com/office/powerpoint/2010/main" val="2479028853"/>
+        <p14:creationId xmlns:p14="http://schemas.microsoft.com/office/powerpoint/2010/main" val="410423864"/>
       </p:ext>
     </p:extLst>
   </p:cSld>
@@ -9054,7 +9054,7 @@
           <a:bodyPr/>
           <a:lstStyle/>
           <a:p>
-            <a:fld id="{1146AB1F-C91F-4F0F-9868-5252CDCD6051}" type="datetimeFigureOut">
+            <a:fld id="{A9C3E1C2-504C-4CFF-A37A-AE4693906186}" type="datetimeFigureOut">
               <a:rPr lang="en-US" smtClean="0"/>
               <a:t>10/3/2026</a:t>
             </a:fld>
@@ -9096,7 +9096,7 @@
           <a:bodyPr/>
           <a:lstStyle/>
           <a:p>
-            <a:fld id="{FE1B144C-6E1C-47C6-9306-1DC2A92756EB}" type="slidenum">
+            <a:fld id="{0CAC26E6-90F8-49CB-BE00-E3E555820112}" type="slidenum">
               <a:rPr lang="en-US" smtClean="0"/>
               <a:t>‹#›</a:t>
             </a:fld>
@@ -9109,7 +9109,7 @@
           <p:cNvPr id="6" name="body">
             <a:extLst>
               <a:ext uri="{FF2B5EF4-FFF2-40B4-BE49-F238E27FC236}">
-                <a16:creationId xmlns:a16="http://schemas.microsoft.com/office/drawing/2014/main" id="{1F8A9983-87C2-D781-3AE3-44F02690232D}"/>
+                <a16:creationId xmlns:a16="http://schemas.microsoft.com/office/drawing/2014/main" id="{5EA32C79-4405-0526-6259-53CFADD4D242}"/>
               </a:ext>
             </a:extLst>
           </p:cNvPr>
@@ -9149,7 +9149,7 @@
           <p:cNvPr id="7" name="source">
             <a:extLst>
               <a:ext uri="{FF2B5EF4-FFF2-40B4-BE49-F238E27FC236}">
-                <a16:creationId xmlns:a16="http://schemas.microsoft.com/office/drawing/2014/main" id="{C347C0C6-76F2-681D-77D4-624288EA1D83}"/>
+                <a16:creationId xmlns:a16="http://schemas.microsoft.com/office/drawing/2014/main" id="{52F712AD-AE3F-7BCD-3EEC-861A5844F981}"/>
               </a:ext>
             </a:extLst>
           </p:cNvPr>
@@ -9206,7 +9206,7 @@
     </p:spTree>
     <p:extLst>
       <p:ext uri="{BB962C8B-B14F-4D97-AF65-F5344CB8AC3E}">
-        <p14:creationId xmlns:p14="http://schemas.microsoft.com/office/powerpoint/2010/main" val="251549924"/>
+        <p14:creationId xmlns:p14="http://schemas.microsoft.com/office/powerpoint/2010/main" val="298288040"/>
       </p:ext>
     </p:extLst>
   </p:cSld>
@@ -9275,7 +9275,7 @@
           <a:bodyPr/>
           <a:lstStyle/>
           <a:p>
-            <a:fld id="{1146AB1F-C91F-4F0F-9868-5252CDCD6051}" type="datetimeFigureOut">
+            <a:fld id="{A9C3E1C2-504C-4CFF-A37A-AE4693906186}" type="datetimeFigureOut">
               <a:rPr lang="en-US" smtClean="0"/>
               <a:t>10/3/2026</a:t>
             </a:fld>
@@ -9317,7 +9317,7 @@
           <a:bodyPr/>
           <a:lstStyle/>
           <a:p>
-            <a:fld id="{FE1B144C-6E1C-47C6-9306-1DC2A92756EB}" type="slidenum">
+            <a:fld id="{0CAC26E6-90F8-49CB-BE00-E3E555820112}" type="slidenum">
               <a:rPr lang="en-US" smtClean="0"/>
               <a:t>‹#›</a:t>
             </a:fld>
@@ -9330,7 +9330,7 @@
           <p:cNvPr id="6" name="body">
             <a:extLst>
               <a:ext uri="{FF2B5EF4-FFF2-40B4-BE49-F238E27FC236}">
-                <a16:creationId xmlns:a16="http://schemas.microsoft.com/office/drawing/2014/main" id="{53302B76-1644-4D1A-8A32-34B72075EA06}"/>
+                <a16:creationId xmlns:a16="http://schemas.microsoft.com/office/drawing/2014/main" id="{C2B0E9AF-3023-2CBE-67FD-F538824750C2}"/>
               </a:ext>
             </a:extLst>
           </p:cNvPr>
@@ -9373,7 +9373,7 @@
     </p:spTree>
     <p:extLst>
       <p:ext uri="{BB962C8B-B14F-4D97-AF65-F5344CB8AC3E}">
-        <p14:creationId xmlns:p14="http://schemas.microsoft.com/office/powerpoint/2010/main" val="3661786372"/>
+        <p14:creationId xmlns:p14="http://schemas.microsoft.com/office/powerpoint/2010/main" val="2542600373"/>
       </p:ext>
     </p:extLst>
   </p:cSld>
@@ -9449,7 +9449,7 @@
           <p:cNvPr id="6" name="section_number">
             <a:extLst>
               <a:ext uri="{FF2B5EF4-FFF2-40B4-BE49-F238E27FC236}">
-                <a16:creationId xmlns:a16="http://schemas.microsoft.com/office/drawing/2014/main" id="{3D9A3091-79C3-B97B-CB51-9CB19498DD22}"/>
+                <a16:creationId xmlns:a16="http://schemas.microsoft.com/office/drawing/2014/main" id="{062ECF67-D22B-3B3D-A9F6-9F63F78C7D6B}"/>
               </a:ext>
             </a:extLst>
           </p:cNvPr>
@@ -9502,7 +9502,7 @@
           <p:cNvPr id="7" name="subtitle">
             <a:extLst>
               <a:ext uri="{FF2B5EF4-FFF2-40B4-BE49-F238E27FC236}">
-                <a16:creationId xmlns:a16="http://schemas.microsoft.com/office/drawing/2014/main" id="{4A4EA1FD-69A9-205D-E76A-C651670EC76B}"/>
+                <a16:creationId xmlns:a16="http://schemas.microsoft.com/office/drawing/2014/main" id="{BCBB27E6-C944-FCA9-24C6-92E2EDF94EF8}"/>
               </a:ext>
             </a:extLst>
           </p:cNvPr>
@@ -9554,7 +9554,7 @@
           <p:cNvPr id="8" name="pattern">
             <a:extLst>
               <a:ext uri="{FF2B5EF4-FFF2-40B4-BE49-F238E27FC236}">
-                <a16:creationId xmlns:a16="http://schemas.microsoft.com/office/drawing/2014/main" id="{E7EFA35E-E30F-D90F-6AB7-A9C9948EF076}"/>
+                <a16:creationId xmlns:a16="http://schemas.microsoft.com/office/drawing/2014/main" id="{EC051184-F9CA-1814-5B4D-1BFCAE1923C9}"/>
               </a:ext>
             </a:extLst>
           </p:cNvPr>
@@ -9610,7 +9610,7 @@
           <p:cNvPr id="9" name="pattern">
             <a:extLst>
               <a:ext uri="{FF2B5EF4-FFF2-40B4-BE49-F238E27FC236}">
-                <a16:creationId xmlns:a16="http://schemas.microsoft.com/office/drawing/2014/main" id="{1AB402B7-D22B-B924-CD7B-32D3D0EC4900}"/>
+                <a16:creationId xmlns:a16="http://schemas.microsoft.com/office/drawing/2014/main" id="{ACCFC6F6-975E-9056-528C-17BFF8F0ED71}"/>
               </a:ext>
             </a:extLst>
           </p:cNvPr>
@@ -9666,7 +9666,7 @@
           <p:cNvPr id="10" name="pattern">
             <a:extLst>
               <a:ext uri="{FF2B5EF4-FFF2-40B4-BE49-F238E27FC236}">
-                <a16:creationId xmlns:a16="http://schemas.microsoft.com/office/drawing/2014/main" id="{D2A1B093-0D60-8601-5840-A6ED7AE30086}"/>
+                <a16:creationId xmlns:a16="http://schemas.microsoft.com/office/drawing/2014/main" id="{E3A1646E-C8F6-4395-1D96-44D88CAD0A97}"/>
               </a:ext>
             </a:extLst>
           </p:cNvPr>
@@ -9722,7 +9722,7 @@
           <p:cNvPr id="11" name="pattern">
             <a:extLst>
               <a:ext uri="{FF2B5EF4-FFF2-40B4-BE49-F238E27FC236}">
-                <a16:creationId xmlns:a16="http://schemas.microsoft.com/office/drawing/2014/main" id="{2A0C1ECB-2913-E51E-9C1B-5864B54F48FB}"/>
+                <a16:creationId xmlns:a16="http://schemas.microsoft.com/office/drawing/2014/main" id="{378C228B-2DC3-0214-F36A-647A84E96E60}"/>
               </a:ext>
             </a:extLst>
           </p:cNvPr>
@@ -9778,7 +9778,7 @@
           <p:cNvPr id="12" name="pattern">
             <a:extLst>
               <a:ext uri="{FF2B5EF4-FFF2-40B4-BE49-F238E27FC236}">
-                <a16:creationId xmlns:a16="http://schemas.microsoft.com/office/drawing/2014/main" id="{07D1BB92-71F8-6EE3-7C13-3D72DDE08812}"/>
+                <a16:creationId xmlns:a16="http://schemas.microsoft.com/office/drawing/2014/main" id="{1E6E6FD5-34DC-B6C6-B405-D04982B993B4}"/>
               </a:ext>
             </a:extLst>
           </p:cNvPr>
@@ -9834,7 +9834,7 @@
           <p:cNvPr id="13" name="pattern">
             <a:extLst>
               <a:ext uri="{FF2B5EF4-FFF2-40B4-BE49-F238E27FC236}">
-                <a16:creationId xmlns:a16="http://schemas.microsoft.com/office/drawing/2014/main" id="{AD16B42F-D7CC-FF6C-91D8-A2E89F6DEB3B}"/>
+                <a16:creationId xmlns:a16="http://schemas.microsoft.com/office/drawing/2014/main" id="{6F53D084-4DEC-3262-9CCD-5C96950730C7}"/>
               </a:ext>
             </a:extLst>
           </p:cNvPr>
@@ -9890,7 +9890,7 @@
           <p:cNvPr id="14" name="pattern">
             <a:extLst>
               <a:ext uri="{FF2B5EF4-FFF2-40B4-BE49-F238E27FC236}">
-                <a16:creationId xmlns:a16="http://schemas.microsoft.com/office/drawing/2014/main" id="{5F9178B5-18F5-26A0-26FF-19E4467D00AF}"/>
+                <a16:creationId xmlns:a16="http://schemas.microsoft.com/office/drawing/2014/main" id="{BF0968CF-CA64-5842-B962-1DBA599B9C9B}"/>
               </a:ext>
             </a:extLst>
           </p:cNvPr>
@@ -9946,7 +9946,7 @@
           <p:cNvPr id="15" name="pattern">
             <a:extLst>
               <a:ext uri="{FF2B5EF4-FFF2-40B4-BE49-F238E27FC236}">
-                <a16:creationId xmlns:a16="http://schemas.microsoft.com/office/drawing/2014/main" id="{585EAB3F-2404-88CD-AF68-21A7F441EBC3}"/>
+                <a16:creationId xmlns:a16="http://schemas.microsoft.com/office/drawing/2014/main" id="{D40D002E-BFDF-1830-FE18-7F970F080B0C}"/>
               </a:ext>
             </a:extLst>
           </p:cNvPr>
@@ -10002,7 +10002,7 @@
           <p:cNvPr id="16" name="pattern">
             <a:extLst>
               <a:ext uri="{FF2B5EF4-FFF2-40B4-BE49-F238E27FC236}">
-                <a16:creationId xmlns:a16="http://schemas.microsoft.com/office/drawing/2014/main" id="{7A933544-C28E-4D1B-224E-76A8526C2472}"/>
+                <a16:creationId xmlns:a16="http://schemas.microsoft.com/office/drawing/2014/main" id="{F75EEBD5-5283-2582-868C-35B9872FCCE0}"/>
               </a:ext>
             </a:extLst>
           </p:cNvPr>
@@ -10058,7 +10058,7 @@
           <p:cNvPr id="17" name="pattern">
             <a:extLst>
               <a:ext uri="{FF2B5EF4-FFF2-40B4-BE49-F238E27FC236}">
-                <a16:creationId xmlns:a16="http://schemas.microsoft.com/office/drawing/2014/main" id="{70A5A9E3-52DD-FB79-BCFC-A904621D7A6F}"/>
+                <a16:creationId xmlns:a16="http://schemas.microsoft.com/office/drawing/2014/main" id="{1CF40373-8A92-B9B0-58FD-DBED218D1E8E}"/>
               </a:ext>
             </a:extLst>
           </p:cNvPr>
@@ -10114,7 +10114,7 @@
           <p:cNvPr id="18" name="pattern">
             <a:extLst>
               <a:ext uri="{FF2B5EF4-FFF2-40B4-BE49-F238E27FC236}">
-                <a16:creationId xmlns:a16="http://schemas.microsoft.com/office/drawing/2014/main" id="{28B1F127-368A-2E7D-F5DC-A10603A2804C}"/>
+                <a16:creationId xmlns:a16="http://schemas.microsoft.com/office/drawing/2014/main" id="{FBED9168-F4CC-0B66-92BF-82ACF2F6F4B6}"/>
               </a:ext>
             </a:extLst>
           </p:cNvPr>
@@ -10170,7 +10170,7 @@
           <p:cNvPr id="19" name="pattern">
             <a:extLst>
               <a:ext uri="{FF2B5EF4-FFF2-40B4-BE49-F238E27FC236}">
-                <a16:creationId xmlns:a16="http://schemas.microsoft.com/office/drawing/2014/main" id="{D3ADCACC-ABCB-CAE1-D285-08805D7B599A}"/>
+                <a16:creationId xmlns:a16="http://schemas.microsoft.com/office/drawing/2014/main" id="{DA27C68A-41D5-BE26-4AB5-567A98098172}"/>
               </a:ext>
             </a:extLst>
           </p:cNvPr>
@@ -10226,7 +10226,7 @@
           <p:cNvPr id="20" name="pattern">
             <a:extLst>
               <a:ext uri="{FF2B5EF4-FFF2-40B4-BE49-F238E27FC236}">
-                <a16:creationId xmlns:a16="http://schemas.microsoft.com/office/drawing/2014/main" id="{7F5DCF88-85AF-AB4B-D058-2BD9A183DCB8}"/>
+                <a16:creationId xmlns:a16="http://schemas.microsoft.com/office/drawing/2014/main" id="{3FAE946E-5FBF-4FC9-0B55-565008DFF8FC}"/>
               </a:ext>
             </a:extLst>
           </p:cNvPr>
@@ -10282,7 +10282,7 @@
           <p:cNvPr id="21" name="pattern">
             <a:extLst>
               <a:ext uri="{FF2B5EF4-FFF2-40B4-BE49-F238E27FC236}">
-                <a16:creationId xmlns:a16="http://schemas.microsoft.com/office/drawing/2014/main" id="{08A645EF-E821-E46C-F9CF-5A82245E3F41}"/>
+                <a16:creationId xmlns:a16="http://schemas.microsoft.com/office/drawing/2014/main" id="{DB8A46FB-4DE2-CD71-3AA0-DF1DD8D65DFE}"/>
               </a:ext>
             </a:extLst>
           </p:cNvPr>
@@ -10338,7 +10338,7 @@
           <p:cNvPr id="22" name="pattern">
             <a:extLst>
               <a:ext uri="{FF2B5EF4-FFF2-40B4-BE49-F238E27FC236}">
-                <a16:creationId xmlns:a16="http://schemas.microsoft.com/office/drawing/2014/main" id="{A1C8A4B9-DC47-7C1C-6B1E-A2DF42055002}"/>
+                <a16:creationId xmlns:a16="http://schemas.microsoft.com/office/drawing/2014/main" id="{544888B3-0C36-5B09-EFE3-C22BFEA3EF2E}"/>
               </a:ext>
             </a:extLst>
           </p:cNvPr>
@@ -10394,7 +10394,7 @@
           <p:cNvPr id="23" name="pattern">
             <a:extLst>
               <a:ext uri="{FF2B5EF4-FFF2-40B4-BE49-F238E27FC236}">
-                <a16:creationId xmlns:a16="http://schemas.microsoft.com/office/drawing/2014/main" id="{3FEFE626-180C-8518-9E7A-56BF9B13D3E9}"/>
+                <a16:creationId xmlns:a16="http://schemas.microsoft.com/office/drawing/2014/main" id="{55A8938A-13C5-09A3-260D-D02FEA2CF0F8}"/>
               </a:ext>
             </a:extLst>
           </p:cNvPr>
@@ -10450,7 +10450,7 @@
           <p:cNvPr id="24" name="pattern">
             <a:extLst>
               <a:ext uri="{FF2B5EF4-FFF2-40B4-BE49-F238E27FC236}">
-                <a16:creationId xmlns:a16="http://schemas.microsoft.com/office/drawing/2014/main" id="{BE272F42-CF92-E141-1F1F-400DD76C19F4}"/>
+                <a16:creationId xmlns:a16="http://schemas.microsoft.com/office/drawing/2014/main" id="{C281BB4A-3E90-6F7E-063E-6B7F20EDD132}"/>
               </a:ext>
             </a:extLst>
           </p:cNvPr>
@@ -10506,7 +10506,7 @@
           <p:cNvPr id="25" name="pattern">
             <a:extLst>
               <a:ext uri="{FF2B5EF4-FFF2-40B4-BE49-F238E27FC236}">
-                <a16:creationId xmlns:a16="http://schemas.microsoft.com/office/drawing/2014/main" id="{26DD5238-421B-AD08-9029-E564A382E30D}"/>
+                <a16:creationId xmlns:a16="http://schemas.microsoft.com/office/drawing/2014/main" id="{AEABB17D-2EAB-137B-EF19-60DB09AE54EC}"/>
               </a:ext>
             </a:extLst>
           </p:cNvPr>
@@ -10562,7 +10562,7 @@
           <p:cNvPr id="26" name="pattern">
             <a:extLst>
               <a:ext uri="{FF2B5EF4-FFF2-40B4-BE49-F238E27FC236}">
-                <a16:creationId xmlns:a16="http://schemas.microsoft.com/office/drawing/2014/main" id="{41180F9B-7429-F2AC-D6DF-ACA6C0913942}"/>
+                <a16:creationId xmlns:a16="http://schemas.microsoft.com/office/drawing/2014/main" id="{CA029077-CFDA-37F0-315F-57E2424FD152}"/>
               </a:ext>
             </a:extLst>
           </p:cNvPr>
@@ -10618,7 +10618,7 @@
           <p:cNvPr id="27" name="pattern">
             <a:extLst>
               <a:ext uri="{FF2B5EF4-FFF2-40B4-BE49-F238E27FC236}">
-                <a16:creationId xmlns:a16="http://schemas.microsoft.com/office/drawing/2014/main" id="{BA7EB20E-A1BB-7A4D-B23C-B6D82AA9BB3F}"/>
+                <a16:creationId xmlns:a16="http://schemas.microsoft.com/office/drawing/2014/main" id="{66101D39-7A27-4C90-C344-CA433C7F0437}"/>
               </a:ext>
             </a:extLst>
           </p:cNvPr>
@@ -10674,7 +10674,7 @@
           <p:cNvPr id="28" name="pattern">
             <a:extLst>
               <a:ext uri="{FF2B5EF4-FFF2-40B4-BE49-F238E27FC236}">
-                <a16:creationId xmlns:a16="http://schemas.microsoft.com/office/drawing/2014/main" id="{561E4480-17E8-AB45-AC69-9C0F686D2A5E}"/>
+                <a16:creationId xmlns:a16="http://schemas.microsoft.com/office/drawing/2014/main" id="{DFE266AB-EE02-E91E-702D-D241C23DDE19}"/>
               </a:ext>
             </a:extLst>
           </p:cNvPr>
@@ -10730,7 +10730,7 @@
           <p:cNvPr id="29" name="pattern">
             <a:extLst>
               <a:ext uri="{FF2B5EF4-FFF2-40B4-BE49-F238E27FC236}">
-                <a16:creationId xmlns:a16="http://schemas.microsoft.com/office/drawing/2014/main" id="{3BA30479-EF96-6BBC-EF1F-8B788533DBD1}"/>
+                <a16:creationId xmlns:a16="http://schemas.microsoft.com/office/drawing/2014/main" id="{77926427-7E0D-0399-C089-06783AA77552}"/>
               </a:ext>
             </a:extLst>
           </p:cNvPr>
@@ -10786,7 +10786,7 @@
           <p:cNvPr id="30" name="pattern">
             <a:extLst>
               <a:ext uri="{FF2B5EF4-FFF2-40B4-BE49-F238E27FC236}">
-                <a16:creationId xmlns:a16="http://schemas.microsoft.com/office/drawing/2014/main" id="{0C0B41A1-F83C-5B73-822D-719A55BEA4F6}"/>
+                <a16:creationId xmlns:a16="http://schemas.microsoft.com/office/drawing/2014/main" id="{A3225D53-FA6C-B232-7C12-889D5BD191E0}"/>
               </a:ext>
             </a:extLst>
           </p:cNvPr>
@@ -10842,7 +10842,7 @@
           <p:cNvPr id="31" name="pattern">
             <a:extLst>
               <a:ext uri="{FF2B5EF4-FFF2-40B4-BE49-F238E27FC236}">
-                <a16:creationId xmlns:a16="http://schemas.microsoft.com/office/drawing/2014/main" id="{A59B0290-B098-F21E-A23A-8C063DAD2B46}"/>
+                <a16:creationId xmlns:a16="http://schemas.microsoft.com/office/drawing/2014/main" id="{40CE4366-DA5C-3CF3-361D-F9AE79A69B4F}"/>
               </a:ext>
             </a:extLst>
           </p:cNvPr>
@@ -10898,7 +10898,7 @@
           <p:cNvPr id="32" name="pattern">
             <a:extLst>
               <a:ext uri="{FF2B5EF4-FFF2-40B4-BE49-F238E27FC236}">
-                <a16:creationId xmlns:a16="http://schemas.microsoft.com/office/drawing/2014/main" id="{67FE17D2-6500-8AAA-28EE-62C3C90AE7CF}"/>
+                <a16:creationId xmlns:a16="http://schemas.microsoft.com/office/drawing/2014/main" id="{078BB2F4-810F-5B53-FAFA-619C008D6A95}"/>
               </a:ext>
             </a:extLst>
           </p:cNvPr>
@@ -10954,7 +10954,7 @@
           <p:cNvPr id="33" name="pattern">
             <a:extLst>
               <a:ext uri="{FF2B5EF4-FFF2-40B4-BE49-F238E27FC236}">
-                <a16:creationId xmlns:a16="http://schemas.microsoft.com/office/drawing/2014/main" id="{10C722AA-D446-6288-5CD7-7FD0D1994727}"/>
+                <a16:creationId xmlns:a16="http://schemas.microsoft.com/office/drawing/2014/main" id="{45EFDC54-1296-DBA9-5516-696775AB6CB5}"/>
               </a:ext>
             </a:extLst>
           </p:cNvPr>
@@ -11010,7 +11010,7 @@
           <p:cNvPr id="34" name="pattern">
             <a:extLst>
               <a:ext uri="{FF2B5EF4-FFF2-40B4-BE49-F238E27FC236}">
-                <a16:creationId xmlns:a16="http://schemas.microsoft.com/office/drawing/2014/main" id="{D128281D-73A6-C4B1-6C3C-EAC2863A76E6}"/>
+                <a16:creationId xmlns:a16="http://schemas.microsoft.com/office/drawing/2014/main" id="{37AAB0E1-BC7B-4B7B-4CDD-8CF2718C0DF2}"/>
               </a:ext>
             </a:extLst>
           </p:cNvPr>
@@ -11066,7 +11066,7 @@
           <p:cNvPr id="35" name="pattern">
             <a:extLst>
               <a:ext uri="{FF2B5EF4-FFF2-40B4-BE49-F238E27FC236}">
-                <a16:creationId xmlns:a16="http://schemas.microsoft.com/office/drawing/2014/main" id="{9652DA5C-3846-C0B6-90C3-6CEDB108C611}"/>
+                <a16:creationId xmlns:a16="http://schemas.microsoft.com/office/drawing/2014/main" id="{A096978A-B812-DA37-A229-ACF4B3CE2DE1}"/>
               </a:ext>
             </a:extLst>
           </p:cNvPr>
@@ -11122,7 +11122,7 @@
           <p:cNvPr id="36" name="pattern">
             <a:extLst>
               <a:ext uri="{FF2B5EF4-FFF2-40B4-BE49-F238E27FC236}">
-                <a16:creationId xmlns:a16="http://schemas.microsoft.com/office/drawing/2014/main" id="{53ABAD03-1AEF-CE59-6A94-CCAB461F46D2}"/>
+                <a16:creationId xmlns:a16="http://schemas.microsoft.com/office/drawing/2014/main" id="{B123F8A5-24D3-C33E-8E8C-00069754BA94}"/>
               </a:ext>
             </a:extLst>
           </p:cNvPr>
@@ -11178,7 +11178,7 @@
           <p:cNvPr id="37" name="pattern">
             <a:extLst>
               <a:ext uri="{FF2B5EF4-FFF2-40B4-BE49-F238E27FC236}">
-                <a16:creationId xmlns:a16="http://schemas.microsoft.com/office/drawing/2014/main" id="{CA1692F7-9414-9DD3-8435-4BAD7798A9A3}"/>
+                <a16:creationId xmlns:a16="http://schemas.microsoft.com/office/drawing/2014/main" id="{C9A3B883-BCFE-0983-1BCA-D27F9DF952AA}"/>
               </a:ext>
             </a:extLst>
           </p:cNvPr>
@@ -11234,7 +11234,7 @@
           <p:cNvPr id="38" name="pattern">
             <a:extLst>
               <a:ext uri="{FF2B5EF4-FFF2-40B4-BE49-F238E27FC236}">
-                <a16:creationId xmlns:a16="http://schemas.microsoft.com/office/drawing/2014/main" id="{34430AB9-8157-DFD0-43ED-7999AA240CBB}"/>
+                <a16:creationId xmlns:a16="http://schemas.microsoft.com/office/drawing/2014/main" id="{A8C10FEA-1782-49E7-0D5F-771ED58345BC}"/>
               </a:ext>
             </a:extLst>
           </p:cNvPr>
@@ -11290,7 +11290,7 @@
           <p:cNvPr id="39" name="pattern">
             <a:extLst>
               <a:ext uri="{FF2B5EF4-FFF2-40B4-BE49-F238E27FC236}">
-                <a16:creationId xmlns:a16="http://schemas.microsoft.com/office/drawing/2014/main" id="{DAB10E73-85A0-EFF0-9926-D3D824965EA6}"/>
+                <a16:creationId xmlns:a16="http://schemas.microsoft.com/office/drawing/2014/main" id="{2C468055-AAD0-F461-3E66-023638B90326}"/>
               </a:ext>
             </a:extLst>
           </p:cNvPr>
@@ -11346,7 +11346,7 @@
           <p:cNvPr id="40" name="pattern">
             <a:extLst>
               <a:ext uri="{FF2B5EF4-FFF2-40B4-BE49-F238E27FC236}">
-                <a16:creationId xmlns:a16="http://schemas.microsoft.com/office/drawing/2014/main" id="{32A191D1-DA3A-1B4B-9296-C5957E28FED3}"/>
+                <a16:creationId xmlns:a16="http://schemas.microsoft.com/office/drawing/2014/main" id="{92B4AF59-4133-1FFB-74FD-9EE45C372134}"/>
               </a:ext>
             </a:extLst>
           </p:cNvPr>
@@ -11402,7 +11402,7 @@
           <p:cNvPr id="41" name="pattern">
             <a:extLst>
               <a:ext uri="{FF2B5EF4-FFF2-40B4-BE49-F238E27FC236}">
-                <a16:creationId xmlns:a16="http://schemas.microsoft.com/office/drawing/2014/main" id="{54769687-3153-B99B-0BCC-5A04333CC415}"/>
+                <a16:creationId xmlns:a16="http://schemas.microsoft.com/office/drawing/2014/main" id="{B1582BED-98C3-05C3-130E-9CF668139C88}"/>
               </a:ext>
             </a:extLst>
           </p:cNvPr>
@@ -11458,7 +11458,7 @@
           <p:cNvPr id="42" name="pattern">
             <a:extLst>
               <a:ext uri="{FF2B5EF4-FFF2-40B4-BE49-F238E27FC236}">
-                <a16:creationId xmlns:a16="http://schemas.microsoft.com/office/drawing/2014/main" id="{34E0047B-5C81-F08D-5F9B-53C0E03441EB}"/>
+                <a16:creationId xmlns:a16="http://schemas.microsoft.com/office/drawing/2014/main" id="{1CC2F6A2-F708-AA26-9DF9-99D2DD6388DA}"/>
               </a:ext>
             </a:extLst>
           </p:cNvPr>
@@ -11514,7 +11514,7 @@
           <p:cNvPr id="43" name="pattern">
             <a:extLst>
               <a:ext uri="{FF2B5EF4-FFF2-40B4-BE49-F238E27FC236}">
-                <a16:creationId xmlns:a16="http://schemas.microsoft.com/office/drawing/2014/main" id="{90FAAFFB-DC48-7C91-407A-C81CFF4C36FB}"/>
+                <a16:creationId xmlns:a16="http://schemas.microsoft.com/office/drawing/2014/main" id="{CF2D3C25-7039-3049-EC96-7CF2C1C25FB2}"/>
               </a:ext>
             </a:extLst>
           </p:cNvPr>
@@ -11570,7 +11570,7 @@
           <p:cNvPr id="44" name="pattern">
             <a:extLst>
               <a:ext uri="{FF2B5EF4-FFF2-40B4-BE49-F238E27FC236}">
-                <a16:creationId xmlns:a16="http://schemas.microsoft.com/office/drawing/2014/main" id="{5D01ED58-1604-3EDD-C32A-C01FC7FADDF0}"/>
+                <a16:creationId xmlns:a16="http://schemas.microsoft.com/office/drawing/2014/main" id="{82C9AD94-BAEF-4470-D201-43BB406B7E51}"/>
               </a:ext>
             </a:extLst>
           </p:cNvPr>
@@ -11626,7 +11626,7 @@
           <p:cNvPr id="45" name="pattern">
             <a:extLst>
               <a:ext uri="{FF2B5EF4-FFF2-40B4-BE49-F238E27FC236}">
-                <a16:creationId xmlns:a16="http://schemas.microsoft.com/office/drawing/2014/main" id="{B1B4C1AD-F5FC-4F46-F8EB-6A0A867385FC}"/>
+                <a16:creationId xmlns:a16="http://schemas.microsoft.com/office/drawing/2014/main" id="{38728B0D-C256-7B12-1BC1-119809C19083}"/>
               </a:ext>
             </a:extLst>
           </p:cNvPr>
@@ -11682,7 +11682,7 @@
           <p:cNvPr id="46" name="pattern">
             <a:extLst>
               <a:ext uri="{FF2B5EF4-FFF2-40B4-BE49-F238E27FC236}">
-                <a16:creationId xmlns:a16="http://schemas.microsoft.com/office/drawing/2014/main" id="{7CADCE04-F286-AD4B-A9F9-6DB739C55862}"/>
+                <a16:creationId xmlns:a16="http://schemas.microsoft.com/office/drawing/2014/main" id="{5A91C465-DFED-769C-E597-50CE43D587A9}"/>
               </a:ext>
             </a:extLst>
           </p:cNvPr>
@@ -11738,7 +11738,7 @@
           <p:cNvPr id="47" name="pattern">
             <a:extLst>
               <a:ext uri="{FF2B5EF4-FFF2-40B4-BE49-F238E27FC236}">
-                <a16:creationId xmlns:a16="http://schemas.microsoft.com/office/drawing/2014/main" id="{C9F01E85-E283-AD99-D77C-5A31E5143602}"/>
+                <a16:creationId xmlns:a16="http://schemas.microsoft.com/office/drawing/2014/main" id="{29F48394-BBD8-F198-AAB3-C4C45C785EF7}"/>
               </a:ext>
             </a:extLst>
           </p:cNvPr>
@@ -11794,7 +11794,7 @@
           <p:cNvPr id="48" name="pattern">
             <a:extLst>
               <a:ext uri="{FF2B5EF4-FFF2-40B4-BE49-F238E27FC236}">
-                <a16:creationId xmlns:a16="http://schemas.microsoft.com/office/drawing/2014/main" id="{17CB41F9-4DA7-765A-AED6-B5FE260AF253}"/>
+                <a16:creationId xmlns:a16="http://schemas.microsoft.com/office/drawing/2014/main" id="{776DBAFF-43ED-6F41-BDCD-2CEE1EF32031}"/>
               </a:ext>
             </a:extLst>
           </p:cNvPr>
@@ -11850,7 +11850,7 @@
           <p:cNvPr id="49" name="pattern">
             <a:extLst>
               <a:ext uri="{FF2B5EF4-FFF2-40B4-BE49-F238E27FC236}">
-                <a16:creationId xmlns:a16="http://schemas.microsoft.com/office/drawing/2014/main" id="{B3E024C9-37D9-0E97-C904-18C2774429D0}"/>
+                <a16:creationId xmlns:a16="http://schemas.microsoft.com/office/drawing/2014/main" id="{DC07234A-710B-085D-5192-D337B88EBD65}"/>
               </a:ext>
             </a:extLst>
           </p:cNvPr>
@@ -11906,7 +11906,7 @@
           <p:cNvPr id="50" name="pattern">
             <a:extLst>
               <a:ext uri="{FF2B5EF4-FFF2-40B4-BE49-F238E27FC236}">
-                <a16:creationId xmlns:a16="http://schemas.microsoft.com/office/drawing/2014/main" id="{991A1759-498B-D651-03E3-9B3A1C862934}"/>
+                <a16:creationId xmlns:a16="http://schemas.microsoft.com/office/drawing/2014/main" id="{0CDFAC3C-E164-6AA9-951B-C23021E919AC}"/>
               </a:ext>
             </a:extLst>
           </p:cNvPr>
@@ -11962,7 +11962,7 @@
           <p:cNvPr id="51" name="pattern">
             <a:extLst>
               <a:ext uri="{FF2B5EF4-FFF2-40B4-BE49-F238E27FC236}">
-                <a16:creationId xmlns:a16="http://schemas.microsoft.com/office/drawing/2014/main" id="{FCF6B19D-72E7-1F6C-3234-7557838F71AB}"/>
+                <a16:creationId xmlns:a16="http://schemas.microsoft.com/office/drawing/2014/main" id="{DBC6AFED-D260-61EC-B453-E30900829DCF}"/>
               </a:ext>
             </a:extLst>
           </p:cNvPr>
@@ -12018,7 +12018,7 @@
           <p:cNvPr id="52" name="pattern">
             <a:extLst>
               <a:ext uri="{FF2B5EF4-FFF2-40B4-BE49-F238E27FC236}">
-                <a16:creationId xmlns:a16="http://schemas.microsoft.com/office/drawing/2014/main" id="{36FC365F-98AE-F901-9C42-955EAAB8FE4D}"/>
+                <a16:creationId xmlns:a16="http://schemas.microsoft.com/office/drawing/2014/main" id="{4E7AD65A-4D1F-4865-A418-C57E205634D7}"/>
               </a:ext>
             </a:extLst>
           </p:cNvPr>
@@ -12074,7 +12074,7 @@
           <p:cNvPr id="53" name="pattern">
             <a:extLst>
               <a:ext uri="{FF2B5EF4-FFF2-40B4-BE49-F238E27FC236}">
-                <a16:creationId xmlns:a16="http://schemas.microsoft.com/office/drawing/2014/main" id="{70541CBB-FC76-6967-2D5C-5B30755853AD}"/>
+                <a16:creationId xmlns:a16="http://schemas.microsoft.com/office/drawing/2014/main" id="{47FEBEF0-B6DA-FC09-2F47-6B02A685FD7B}"/>
               </a:ext>
             </a:extLst>
           </p:cNvPr>
@@ -12130,7 +12130,7 @@
           <p:cNvPr id="54" name="pattern">
             <a:extLst>
               <a:ext uri="{FF2B5EF4-FFF2-40B4-BE49-F238E27FC236}">
-                <a16:creationId xmlns:a16="http://schemas.microsoft.com/office/drawing/2014/main" id="{005D30D5-DC0B-1B84-DF95-6445C3E7D810}"/>
+                <a16:creationId xmlns:a16="http://schemas.microsoft.com/office/drawing/2014/main" id="{228C999A-75C4-3DEE-9A81-E8595BC14DF5}"/>
               </a:ext>
             </a:extLst>
           </p:cNvPr>
@@ -12186,7 +12186,7 @@
           <p:cNvPr id="55" name="pattern">
             <a:extLst>
               <a:ext uri="{FF2B5EF4-FFF2-40B4-BE49-F238E27FC236}">
-                <a16:creationId xmlns:a16="http://schemas.microsoft.com/office/drawing/2014/main" id="{4B46123E-A192-9541-66E7-309E86C17CF3}"/>
+                <a16:creationId xmlns:a16="http://schemas.microsoft.com/office/drawing/2014/main" id="{289EC43D-EB90-B54D-345B-191D9326C016}"/>
               </a:ext>
             </a:extLst>
           </p:cNvPr>
@@ -12242,7 +12242,7 @@
           <p:cNvPr id="56" name="pattern">
             <a:extLst>
               <a:ext uri="{FF2B5EF4-FFF2-40B4-BE49-F238E27FC236}">
-                <a16:creationId xmlns:a16="http://schemas.microsoft.com/office/drawing/2014/main" id="{CC420755-3FAE-D848-DBB3-B587E6CD7C08}"/>
+                <a16:creationId xmlns:a16="http://schemas.microsoft.com/office/drawing/2014/main" id="{A48D1652-2AA3-1436-6C21-1A6F521CE310}"/>
               </a:ext>
             </a:extLst>
           </p:cNvPr>
@@ -12298,7 +12298,7 @@
           <p:cNvPr id="57" name="pattern">
             <a:extLst>
               <a:ext uri="{FF2B5EF4-FFF2-40B4-BE49-F238E27FC236}">
-                <a16:creationId xmlns:a16="http://schemas.microsoft.com/office/drawing/2014/main" id="{4042BF96-F788-92B3-8DDD-8A4ABFB4FCE0}"/>
+                <a16:creationId xmlns:a16="http://schemas.microsoft.com/office/drawing/2014/main" id="{623085A1-D096-47DC-E3CA-F54794EBCE78}"/>
               </a:ext>
             </a:extLst>
           </p:cNvPr>
@@ -12354,7 +12354,7 @@
           <p:cNvPr id="58" name="pattern">
             <a:extLst>
               <a:ext uri="{FF2B5EF4-FFF2-40B4-BE49-F238E27FC236}">
-                <a16:creationId xmlns:a16="http://schemas.microsoft.com/office/drawing/2014/main" id="{A7518AF2-5B52-BF5D-BAAD-7138421F2AE5}"/>
+                <a16:creationId xmlns:a16="http://schemas.microsoft.com/office/drawing/2014/main" id="{119053F2-553A-ACCC-968B-E8DDE9FBA97C}"/>
               </a:ext>
             </a:extLst>
           </p:cNvPr>
@@ -12410,7 +12410,7 @@
           <p:cNvPr id="59" name="pattern">
             <a:extLst>
               <a:ext uri="{FF2B5EF4-FFF2-40B4-BE49-F238E27FC236}">
-                <a16:creationId xmlns:a16="http://schemas.microsoft.com/office/drawing/2014/main" id="{6F66B5FF-BFD3-472C-4BAC-2FAA3713D3B8}"/>
+                <a16:creationId xmlns:a16="http://schemas.microsoft.com/office/drawing/2014/main" id="{11448A63-4923-F35A-F26C-707CD29710C2}"/>
               </a:ext>
             </a:extLst>
           </p:cNvPr>
@@ -12466,7 +12466,7 @@
           <p:cNvPr id="60" name="pattern">
             <a:extLst>
               <a:ext uri="{FF2B5EF4-FFF2-40B4-BE49-F238E27FC236}">
-                <a16:creationId xmlns:a16="http://schemas.microsoft.com/office/drawing/2014/main" id="{57F2C013-FE4A-B77D-19D9-6F2859D47341}"/>
+                <a16:creationId xmlns:a16="http://schemas.microsoft.com/office/drawing/2014/main" id="{4810651F-7023-7192-7EFD-838AD18B1B3E}"/>
               </a:ext>
             </a:extLst>
           </p:cNvPr>
@@ -12522,7 +12522,7 @@
           <p:cNvPr id="61" name="pattern">
             <a:extLst>
               <a:ext uri="{FF2B5EF4-FFF2-40B4-BE49-F238E27FC236}">
-                <a16:creationId xmlns:a16="http://schemas.microsoft.com/office/drawing/2014/main" id="{5ABA0B11-55C8-8DAD-1948-1F948CF83B26}"/>
+                <a16:creationId xmlns:a16="http://schemas.microsoft.com/office/drawing/2014/main" id="{CDFACD4B-8DD1-1096-215B-5343B31ED15E}"/>
               </a:ext>
             </a:extLst>
           </p:cNvPr>
@@ -12578,7 +12578,7 @@
           <p:cNvPr id="62" name="pattern">
             <a:extLst>
               <a:ext uri="{FF2B5EF4-FFF2-40B4-BE49-F238E27FC236}">
-                <a16:creationId xmlns:a16="http://schemas.microsoft.com/office/drawing/2014/main" id="{1642ACF8-8348-7FAC-1D5F-CFFFE7D47020}"/>
+                <a16:creationId xmlns:a16="http://schemas.microsoft.com/office/drawing/2014/main" id="{3DC36F19-9B58-2323-B1B8-811B5C8C5891}"/>
               </a:ext>
             </a:extLst>
           </p:cNvPr>
@@ -12634,7 +12634,7 @@
           <p:cNvPr id="63" name="pattern">
             <a:extLst>
               <a:ext uri="{FF2B5EF4-FFF2-40B4-BE49-F238E27FC236}">
-                <a16:creationId xmlns:a16="http://schemas.microsoft.com/office/drawing/2014/main" id="{A37301AA-2C4B-7661-D819-F54E9E7B56F9}"/>
+                <a16:creationId xmlns:a16="http://schemas.microsoft.com/office/drawing/2014/main" id="{ECDF30F8-C981-064A-7D3A-7C621EA95070}"/>
               </a:ext>
             </a:extLst>
           </p:cNvPr>
@@ -12690,7 +12690,7 @@
           <p:cNvPr id="64" name="pattern">
             <a:extLst>
               <a:ext uri="{FF2B5EF4-FFF2-40B4-BE49-F238E27FC236}">
-                <a16:creationId xmlns:a16="http://schemas.microsoft.com/office/drawing/2014/main" id="{3EBD2F8F-E06C-03A1-AF0A-BEAC0644E05E}"/>
+                <a16:creationId xmlns:a16="http://schemas.microsoft.com/office/drawing/2014/main" id="{A606D57B-794A-061A-77D9-D0889D895422}"/>
               </a:ext>
             </a:extLst>
           </p:cNvPr>
@@ -12746,7 +12746,7 @@
           <p:cNvPr id="65" name="pattern">
             <a:extLst>
               <a:ext uri="{FF2B5EF4-FFF2-40B4-BE49-F238E27FC236}">
-                <a16:creationId xmlns:a16="http://schemas.microsoft.com/office/drawing/2014/main" id="{6EE1D8CE-3C81-7FE7-B952-3FAAFC893BC7}"/>
+                <a16:creationId xmlns:a16="http://schemas.microsoft.com/office/drawing/2014/main" id="{A2260FFD-A70A-F124-6448-191097C2C2C1}"/>
               </a:ext>
             </a:extLst>
           </p:cNvPr>
@@ -12802,7 +12802,7 @@
           <p:cNvPr id="66" name="pattern">
             <a:extLst>
               <a:ext uri="{FF2B5EF4-FFF2-40B4-BE49-F238E27FC236}">
-                <a16:creationId xmlns:a16="http://schemas.microsoft.com/office/drawing/2014/main" id="{B0CE561A-7B1C-119C-BBF6-7FBDD6B794CE}"/>
+                <a16:creationId xmlns:a16="http://schemas.microsoft.com/office/drawing/2014/main" id="{146FFA20-E604-8F75-C1F2-9CC949D740D3}"/>
               </a:ext>
             </a:extLst>
           </p:cNvPr>
@@ -12858,7 +12858,7 @@
           <p:cNvPr id="67" name="pattern">
             <a:extLst>
               <a:ext uri="{FF2B5EF4-FFF2-40B4-BE49-F238E27FC236}">
-                <a16:creationId xmlns:a16="http://schemas.microsoft.com/office/drawing/2014/main" id="{739419B6-06FD-3A22-26D9-C0CF3907DFE7}"/>
+                <a16:creationId xmlns:a16="http://schemas.microsoft.com/office/drawing/2014/main" id="{459E7959-1C65-61C5-84EB-8FF6B60ADDC5}"/>
               </a:ext>
             </a:extLst>
           </p:cNvPr>
@@ -12914,7 +12914,7 @@
           <p:cNvPr id="68" name="pattern">
             <a:extLst>
               <a:ext uri="{FF2B5EF4-FFF2-40B4-BE49-F238E27FC236}">
-                <a16:creationId xmlns:a16="http://schemas.microsoft.com/office/drawing/2014/main" id="{625F11EB-1277-03D7-9230-38302CFBAF61}"/>
+                <a16:creationId xmlns:a16="http://schemas.microsoft.com/office/drawing/2014/main" id="{A98B0C38-0308-21F3-DAFF-C22249DB5553}"/>
               </a:ext>
             </a:extLst>
           </p:cNvPr>
@@ -12970,7 +12970,7 @@
           <p:cNvPr id="69" name="pattern">
             <a:extLst>
               <a:ext uri="{FF2B5EF4-FFF2-40B4-BE49-F238E27FC236}">
-                <a16:creationId xmlns:a16="http://schemas.microsoft.com/office/drawing/2014/main" id="{0CFD5497-94C0-77B0-2784-028B780DDBC7}"/>
+                <a16:creationId xmlns:a16="http://schemas.microsoft.com/office/drawing/2014/main" id="{B9F3064B-D933-39EB-073F-89D47EEC98D0}"/>
               </a:ext>
             </a:extLst>
           </p:cNvPr>
@@ -13026,7 +13026,7 @@
           <p:cNvPr id="70" name="pattern">
             <a:extLst>
               <a:ext uri="{FF2B5EF4-FFF2-40B4-BE49-F238E27FC236}">
-                <a16:creationId xmlns:a16="http://schemas.microsoft.com/office/drawing/2014/main" id="{1828AA8A-AB12-515E-606B-65BFD61D4181}"/>
+                <a16:creationId xmlns:a16="http://schemas.microsoft.com/office/drawing/2014/main" id="{9AD0B0A0-CA7D-6EC7-1BB3-947739F4BE7F}"/>
               </a:ext>
             </a:extLst>
           </p:cNvPr>
@@ -13082,7 +13082,7 @@
           <p:cNvPr id="71" name="pattern">
             <a:extLst>
               <a:ext uri="{FF2B5EF4-FFF2-40B4-BE49-F238E27FC236}">
-                <a16:creationId xmlns:a16="http://schemas.microsoft.com/office/drawing/2014/main" id="{E8258127-5457-DCCB-9631-B496B32D1D78}"/>
+                <a16:creationId xmlns:a16="http://schemas.microsoft.com/office/drawing/2014/main" id="{639D2BEE-758B-DB8B-7B0D-BB4E35DECEFB}"/>
               </a:ext>
             </a:extLst>
           </p:cNvPr>
@@ -13138,7 +13138,7 @@
           <p:cNvPr id="72" name="pattern">
             <a:extLst>
               <a:ext uri="{FF2B5EF4-FFF2-40B4-BE49-F238E27FC236}">
-                <a16:creationId xmlns:a16="http://schemas.microsoft.com/office/drawing/2014/main" id="{E7FDBADB-F722-988B-3C4E-3793A93D1E3D}"/>
+                <a16:creationId xmlns:a16="http://schemas.microsoft.com/office/drawing/2014/main" id="{222B086E-4078-1BCF-F1D4-5531BB2A9C7E}"/>
               </a:ext>
             </a:extLst>
           </p:cNvPr>
@@ -13194,7 +13194,7 @@
           <p:cNvPr id="73" name="pattern">
             <a:extLst>
               <a:ext uri="{FF2B5EF4-FFF2-40B4-BE49-F238E27FC236}">
-                <a16:creationId xmlns:a16="http://schemas.microsoft.com/office/drawing/2014/main" id="{734F297F-9949-6EF2-DCF3-9AE8B6CB13BD}"/>
+                <a16:creationId xmlns:a16="http://schemas.microsoft.com/office/drawing/2014/main" id="{A0898E39-D826-CF86-52B7-38CC1DDD6E4F}"/>
               </a:ext>
             </a:extLst>
           </p:cNvPr>
@@ -13250,7 +13250,7 @@
           <p:cNvPr id="74" name="pattern">
             <a:extLst>
               <a:ext uri="{FF2B5EF4-FFF2-40B4-BE49-F238E27FC236}">
-                <a16:creationId xmlns:a16="http://schemas.microsoft.com/office/drawing/2014/main" id="{CAEF2ED6-0AB8-36BD-842F-3AA0B8249549}"/>
+                <a16:creationId xmlns:a16="http://schemas.microsoft.com/office/drawing/2014/main" id="{D11EE5BA-A1A0-1603-6971-EDB267FFEF7A}"/>
               </a:ext>
             </a:extLst>
           </p:cNvPr>
@@ -13306,7 +13306,7 @@
           <p:cNvPr id="75" name="pattern">
             <a:extLst>
               <a:ext uri="{FF2B5EF4-FFF2-40B4-BE49-F238E27FC236}">
-                <a16:creationId xmlns:a16="http://schemas.microsoft.com/office/drawing/2014/main" id="{4FF8B750-519E-7AB7-E65A-2BD77947A02A}"/>
+                <a16:creationId xmlns:a16="http://schemas.microsoft.com/office/drawing/2014/main" id="{66455EF9-12BF-BF44-72F1-5CF511A8BF38}"/>
               </a:ext>
             </a:extLst>
           </p:cNvPr>
@@ -13362,7 +13362,7 @@
           <p:cNvPr id="76" name="pattern">
             <a:extLst>
               <a:ext uri="{FF2B5EF4-FFF2-40B4-BE49-F238E27FC236}">
-                <a16:creationId xmlns:a16="http://schemas.microsoft.com/office/drawing/2014/main" id="{CC48E9D2-8F8F-6848-06E9-28C4D959B879}"/>
+                <a16:creationId xmlns:a16="http://schemas.microsoft.com/office/drawing/2014/main" id="{3E4F9C48-69ED-310F-CD8D-9B00F948A7D7}"/>
               </a:ext>
             </a:extLst>
           </p:cNvPr>
@@ -13418,7 +13418,7 @@
           <p:cNvPr id="77" name="pattern">
             <a:extLst>
               <a:ext uri="{FF2B5EF4-FFF2-40B4-BE49-F238E27FC236}">
-                <a16:creationId xmlns:a16="http://schemas.microsoft.com/office/drawing/2014/main" id="{E326338E-0A5E-1DAE-8E8F-6F0012B23FE5}"/>
+                <a16:creationId xmlns:a16="http://schemas.microsoft.com/office/drawing/2014/main" id="{B2439B7A-DF3F-9C96-906B-3BBE108D821D}"/>
               </a:ext>
             </a:extLst>
           </p:cNvPr>
@@ -13474,7 +13474,7 @@
           <p:cNvPr id="78" name="pattern">
             <a:extLst>
               <a:ext uri="{FF2B5EF4-FFF2-40B4-BE49-F238E27FC236}">
-                <a16:creationId xmlns:a16="http://schemas.microsoft.com/office/drawing/2014/main" id="{A83FC00E-E297-55D9-3C90-2B3390FE1244}"/>
+                <a16:creationId xmlns:a16="http://schemas.microsoft.com/office/drawing/2014/main" id="{8835CC6B-2BFE-2F92-C1B8-6B70EE10E285}"/>
               </a:ext>
             </a:extLst>
           </p:cNvPr>
@@ -13530,7 +13530,7 @@
           <p:cNvPr id="79" name="pattern">
             <a:extLst>
               <a:ext uri="{FF2B5EF4-FFF2-40B4-BE49-F238E27FC236}">
-                <a16:creationId xmlns:a16="http://schemas.microsoft.com/office/drawing/2014/main" id="{CF313C22-8500-56A7-3974-54F592502ABE}"/>
+                <a16:creationId xmlns:a16="http://schemas.microsoft.com/office/drawing/2014/main" id="{75787042-82C1-B6F1-5D44-D6925E1EA726}"/>
               </a:ext>
             </a:extLst>
           </p:cNvPr>
@@ -13586,7 +13586,7 @@
           <p:cNvPr id="80" name="pattern">
             <a:extLst>
               <a:ext uri="{FF2B5EF4-FFF2-40B4-BE49-F238E27FC236}">
-                <a16:creationId xmlns:a16="http://schemas.microsoft.com/office/drawing/2014/main" id="{045FA458-F603-9F33-3B8F-FA705A527DC2}"/>
+                <a16:creationId xmlns:a16="http://schemas.microsoft.com/office/drawing/2014/main" id="{9E241F12-0817-A65B-8852-59DD31BD7285}"/>
               </a:ext>
             </a:extLst>
           </p:cNvPr>
@@ -13642,7 +13642,7 @@
           <p:cNvPr id="81" name="pattern">
             <a:extLst>
               <a:ext uri="{FF2B5EF4-FFF2-40B4-BE49-F238E27FC236}">
-                <a16:creationId xmlns:a16="http://schemas.microsoft.com/office/drawing/2014/main" id="{78011FD9-6001-A676-7CF1-E7B15B3B9FB1}"/>
+                <a16:creationId xmlns:a16="http://schemas.microsoft.com/office/drawing/2014/main" id="{1B48EDC3-F3A6-D008-422A-90876CDEBAB8}"/>
               </a:ext>
             </a:extLst>
           </p:cNvPr>
@@ -13698,7 +13698,7 @@
           <p:cNvPr id="82" name="pattern">
             <a:extLst>
               <a:ext uri="{FF2B5EF4-FFF2-40B4-BE49-F238E27FC236}">
-                <a16:creationId xmlns:a16="http://schemas.microsoft.com/office/drawing/2014/main" id="{66E149C8-EB6E-B9A7-F4DC-4FD0BD70ABD8}"/>
+                <a16:creationId xmlns:a16="http://schemas.microsoft.com/office/drawing/2014/main" id="{9C497863-BA9A-21DE-E66C-A8ED37974E0B}"/>
               </a:ext>
             </a:extLst>
           </p:cNvPr>
@@ -13754,7 +13754,7 @@
           <p:cNvPr id="83" name="pattern">
             <a:extLst>
               <a:ext uri="{FF2B5EF4-FFF2-40B4-BE49-F238E27FC236}">
-                <a16:creationId xmlns:a16="http://schemas.microsoft.com/office/drawing/2014/main" id="{DE1338A5-79A9-D29A-E2B2-EE95805371DF}"/>
+                <a16:creationId xmlns:a16="http://schemas.microsoft.com/office/drawing/2014/main" id="{1DB0AD6F-3AFF-2DC1-95A5-B38D6C6C8B0D}"/>
               </a:ext>
             </a:extLst>
           </p:cNvPr>
@@ -13810,7 +13810,7 @@
           <p:cNvPr id="84" name="pattern">
             <a:extLst>
               <a:ext uri="{FF2B5EF4-FFF2-40B4-BE49-F238E27FC236}">
-                <a16:creationId xmlns:a16="http://schemas.microsoft.com/office/drawing/2014/main" id="{82F65F13-0007-041A-6E6C-6EC439E5F31F}"/>
+                <a16:creationId xmlns:a16="http://schemas.microsoft.com/office/drawing/2014/main" id="{56FA3A1E-4DF8-F230-5490-E418999062D8}"/>
               </a:ext>
             </a:extLst>
           </p:cNvPr>
@@ -13866,7 +13866,7 @@
           <p:cNvPr id="85" name="pattern">
             <a:extLst>
               <a:ext uri="{FF2B5EF4-FFF2-40B4-BE49-F238E27FC236}">
-                <a16:creationId xmlns:a16="http://schemas.microsoft.com/office/drawing/2014/main" id="{E37723EE-BA42-CA6D-92A2-43312F7E3006}"/>
+                <a16:creationId xmlns:a16="http://schemas.microsoft.com/office/drawing/2014/main" id="{4C7DA3C7-3A50-6727-7310-F9FD4C05373F}"/>
               </a:ext>
             </a:extLst>
           </p:cNvPr>
@@ -13922,7 +13922,7 @@
           <p:cNvPr id="86" name="pattern">
             <a:extLst>
               <a:ext uri="{FF2B5EF4-FFF2-40B4-BE49-F238E27FC236}">
-                <a16:creationId xmlns:a16="http://schemas.microsoft.com/office/drawing/2014/main" id="{F74C1DBE-0CED-23D9-D1BA-C49BBAC21068}"/>
+                <a16:creationId xmlns:a16="http://schemas.microsoft.com/office/drawing/2014/main" id="{29570029-4C91-5B8E-75E8-32BAA02F63E4}"/>
               </a:ext>
             </a:extLst>
           </p:cNvPr>
@@ -13978,7 +13978,7 @@
           <p:cNvPr id="87" name="pattern">
             <a:extLst>
               <a:ext uri="{FF2B5EF4-FFF2-40B4-BE49-F238E27FC236}">
-                <a16:creationId xmlns:a16="http://schemas.microsoft.com/office/drawing/2014/main" id="{426B443A-4426-8B54-64D1-EA03CD72CB53}"/>
+                <a16:creationId xmlns:a16="http://schemas.microsoft.com/office/drawing/2014/main" id="{3BF8130D-E5D0-4E9A-FE27-5505E77F1B2E}"/>
               </a:ext>
             </a:extLst>
           </p:cNvPr>
@@ -14034,7 +14034,7 @@
           <p:cNvPr id="88" name="pattern">
             <a:extLst>
               <a:ext uri="{FF2B5EF4-FFF2-40B4-BE49-F238E27FC236}">
-                <a16:creationId xmlns:a16="http://schemas.microsoft.com/office/drawing/2014/main" id="{3335F5D7-119B-F216-772E-B35304395F38}"/>
+                <a16:creationId xmlns:a16="http://schemas.microsoft.com/office/drawing/2014/main" id="{12BF8415-6A80-BB35-CB2B-B252AAEADAAD}"/>
               </a:ext>
             </a:extLst>
           </p:cNvPr>
@@ -14090,7 +14090,7 @@
           <p:cNvPr id="89" name="pattern">
             <a:extLst>
               <a:ext uri="{FF2B5EF4-FFF2-40B4-BE49-F238E27FC236}">
-                <a16:creationId xmlns:a16="http://schemas.microsoft.com/office/drawing/2014/main" id="{41B62061-032D-9DC9-6C27-8454D9FFB39B}"/>
+                <a16:creationId xmlns:a16="http://schemas.microsoft.com/office/drawing/2014/main" id="{C018EEF6-3336-8B59-5BD4-0473234CF636}"/>
               </a:ext>
             </a:extLst>
           </p:cNvPr>
@@ -14146,7 +14146,7 @@
           <p:cNvPr id="90" name="pattern">
             <a:extLst>
               <a:ext uri="{FF2B5EF4-FFF2-40B4-BE49-F238E27FC236}">
-                <a16:creationId xmlns:a16="http://schemas.microsoft.com/office/drawing/2014/main" id="{9F333D47-06C7-57AE-90E2-5D02FC9231CE}"/>
+                <a16:creationId xmlns:a16="http://schemas.microsoft.com/office/drawing/2014/main" id="{7721B5E2-3209-A6C0-A73C-29A022DF5E7B}"/>
               </a:ext>
             </a:extLst>
           </p:cNvPr>
@@ -14202,7 +14202,7 @@
           <p:cNvPr id="91" name="pattern">
             <a:extLst>
               <a:ext uri="{FF2B5EF4-FFF2-40B4-BE49-F238E27FC236}">
-                <a16:creationId xmlns:a16="http://schemas.microsoft.com/office/drawing/2014/main" id="{D3F6B7D4-D246-8804-F269-5553A74F57D0}"/>
+                <a16:creationId xmlns:a16="http://schemas.microsoft.com/office/drawing/2014/main" id="{A89467AE-D6F8-60C0-153A-BCBB5132E4BF}"/>
               </a:ext>
             </a:extLst>
           </p:cNvPr>
@@ -14258,7 +14258,7 @@
           <p:cNvPr id="92" name="pattern">
             <a:extLst>
               <a:ext uri="{FF2B5EF4-FFF2-40B4-BE49-F238E27FC236}">
-                <a16:creationId xmlns:a16="http://schemas.microsoft.com/office/drawing/2014/main" id="{902C141C-5818-00B7-0A20-6D9BC0AEBB79}"/>
+                <a16:creationId xmlns:a16="http://schemas.microsoft.com/office/drawing/2014/main" id="{6BE095B0-98CD-5D7C-A957-9C4279037855}"/>
               </a:ext>
             </a:extLst>
           </p:cNvPr>
@@ -14314,7 +14314,7 @@
           <p:cNvPr id="93" name="pattern">
             <a:extLst>
               <a:ext uri="{FF2B5EF4-FFF2-40B4-BE49-F238E27FC236}">
-                <a16:creationId xmlns:a16="http://schemas.microsoft.com/office/drawing/2014/main" id="{F1F79742-1B7A-AC7C-C7A2-C0363D34D393}"/>
+                <a16:creationId xmlns:a16="http://schemas.microsoft.com/office/drawing/2014/main" id="{14FE4BFB-785C-FCD4-F8E0-CFA33AED6BCD}"/>
               </a:ext>
             </a:extLst>
           </p:cNvPr>
@@ -14370,7 +14370,7 @@
           <p:cNvPr id="94" name="pattern">
             <a:extLst>
               <a:ext uri="{FF2B5EF4-FFF2-40B4-BE49-F238E27FC236}">
-                <a16:creationId xmlns:a16="http://schemas.microsoft.com/office/drawing/2014/main" id="{D51670BD-CD89-8A97-3BEA-3E50165CFE18}"/>
+                <a16:creationId xmlns:a16="http://schemas.microsoft.com/office/drawing/2014/main" id="{EBAE33F2-4CC3-9D9E-4C7D-A2707CCC7BA2}"/>
               </a:ext>
             </a:extLst>
           </p:cNvPr>
@@ -14426,7 +14426,7 @@
           <p:cNvPr id="95" name="pattern">
             <a:extLst>
               <a:ext uri="{FF2B5EF4-FFF2-40B4-BE49-F238E27FC236}">
-                <a16:creationId xmlns:a16="http://schemas.microsoft.com/office/drawing/2014/main" id="{5659D4C9-3F25-48A9-D636-EE986B24121B}"/>
+                <a16:creationId xmlns:a16="http://schemas.microsoft.com/office/drawing/2014/main" id="{D1D25077-C877-356F-04D3-DFBB5FE85CFB}"/>
               </a:ext>
             </a:extLst>
           </p:cNvPr>
@@ -14482,7 +14482,7 @@
           <p:cNvPr id="96" name="pattern">
             <a:extLst>
               <a:ext uri="{FF2B5EF4-FFF2-40B4-BE49-F238E27FC236}">
-                <a16:creationId xmlns:a16="http://schemas.microsoft.com/office/drawing/2014/main" id="{43EBF383-4DA3-7178-CA0C-A6A79C58A415}"/>
+                <a16:creationId xmlns:a16="http://schemas.microsoft.com/office/drawing/2014/main" id="{703F5B19-502B-39D7-099A-D9CC814EF4BD}"/>
               </a:ext>
             </a:extLst>
           </p:cNvPr>
@@ -14538,7 +14538,7 @@
           <p:cNvPr id="97" name="pattern">
             <a:extLst>
               <a:ext uri="{FF2B5EF4-FFF2-40B4-BE49-F238E27FC236}">
-                <a16:creationId xmlns:a16="http://schemas.microsoft.com/office/drawing/2014/main" id="{7F6D38F9-71B4-BB5F-9F4D-C73D7507F29E}"/>
+                <a16:creationId xmlns:a16="http://schemas.microsoft.com/office/drawing/2014/main" id="{A5752E6D-E414-6CFB-EBF3-D79C717B8B03}"/>
               </a:ext>
             </a:extLst>
           </p:cNvPr>
@@ -14594,7 +14594,7 @@
           <p:cNvPr id="98" name="pattern">
             <a:extLst>
               <a:ext uri="{FF2B5EF4-FFF2-40B4-BE49-F238E27FC236}">
-                <a16:creationId xmlns:a16="http://schemas.microsoft.com/office/drawing/2014/main" id="{0D23C8A7-C953-433F-0A59-3565310F4214}"/>
+                <a16:creationId xmlns:a16="http://schemas.microsoft.com/office/drawing/2014/main" id="{01884D03-C6B7-67F0-29C8-8345C00EA7D7}"/>
               </a:ext>
             </a:extLst>
           </p:cNvPr>
@@ -14650,7 +14650,7 @@
           <p:cNvPr id="99" name="pattern">
             <a:extLst>
               <a:ext uri="{FF2B5EF4-FFF2-40B4-BE49-F238E27FC236}">
-                <a16:creationId xmlns:a16="http://schemas.microsoft.com/office/drawing/2014/main" id="{7DA3C785-9FA2-A86E-ED00-93164586BE94}"/>
+                <a16:creationId xmlns:a16="http://schemas.microsoft.com/office/drawing/2014/main" id="{07DDA33B-BB13-5007-7F8C-6465E6084565}"/>
               </a:ext>
             </a:extLst>
           </p:cNvPr>
@@ -14706,7 +14706,7 @@
           <p:cNvPr id="100" name="pattern">
             <a:extLst>
               <a:ext uri="{FF2B5EF4-FFF2-40B4-BE49-F238E27FC236}">
-                <a16:creationId xmlns:a16="http://schemas.microsoft.com/office/drawing/2014/main" id="{3E5E4A36-AD9D-1D64-448B-2D1E1850015F}"/>
+                <a16:creationId xmlns:a16="http://schemas.microsoft.com/office/drawing/2014/main" id="{7E8F8AC6-CAE0-C2DB-9B25-EDAA6BA8CCDC}"/>
               </a:ext>
             </a:extLst>
           </p:cNvPr>
@@ -14762,7 +14762,7 @@
           <p:cNvPr id="101" name="pattern">
             <a:extLst>
               <a:ext uri="{FF2B5EF4-FFF2-40B4-BE49-F238E27FC236}">
-                <a16:creationId xmlns:a16="http://schemas.microsoft.com/office/drawing/2014/main" id="{3EDD7878-6442-1453-9073-910890457E22}"/>
+                <a16:creationId xmlns:a16="http://schemas.microsoft.com/office/drawing/2014/main" id="{44143DC5-9856-17BF-36CE-A1C56FC03622}"/>
               </a:ext>
             </a:extLst>
           </p:cNvPr>
@@ -14818,7 +14818,7 @@
           <p:cNvPr id="102" name="pattern">
             <a:extLst>
               <a:ext uri="{FF2B5EF4-FFF2-40B4-BE49-F238E27FC236}">
-                <a16:creationId xmlns:a16="http://schemas.microsoft.com/office/drawing/2014/main" id="{EF7D3A4E-5E28-23C9-65D0-E6F577CCB528}"/>
+                <a16:creationId xmlns:a16="http://schemas.microsoft.com/office/drawing/2014/main" id="{CCB842C7-D41A-F983-376A-A8EC0B21D09C}"/>
               </a:ext>
             </a:extLst>
           </p:cNvPr>
@@ -14874,7 +14874,7 @@
           <p:cNvPr id="103" name="pattern">
             <a:extLst>
               <a:ext uri="{FF2B5EF4-FFF2-40B4-BE49-F238E27FC236}">
-                <a16:creationId xmlns:a16="http://schemas.microsoft.com/office/drawing/2014/main" id="{F7FFC40F-58B3-4741-8AE6-CDEC99564CAC}"/>
+                <a16:creationId xmlns:a16="http://schemas.microsoft.com/office/drawing/2014/main" id="{EFFDA70C-AF5E-350E-6A82-C63EBEDB5FE4}"/>
               </a:ext>
             </a:extLst>
           </p:cNvPr>
@@ -14930,7 +14930,7 @@
           <p:cNvPr id="104" name="pattern">
             <a:extLst>
               <a:ext uri="{FF2B5EF4-FFF2-40B4-BE49-F238E27FC236}">
-                <a16:creationId xmlns:a16="http://schemas.microsoft.com/office/drawing/2014/main" id="{899430F0-BC3C-8198-C1DF-E4889D98DED2}"/>
+                <a16:creationId xmlns:a16="http://schemas.microsoft.com/office/drawing/2014/main" id="{1A4977B2-AC68-8AEF-786C-4F4FF3845C5E}"/>
               </a:ext>
             </a:extLst>
           </p:cNvPr>
@@ -14986,7 +14986,7 @@
           <p:cNvPr id="105" name="pattern">
             <a:extLst>
               <a:ext uri="{FF2B5EF4-FFF2-40B4-BE49-F238E27FC236}">
-                <a16:creationId xmlns:a16="http://schemas.microsoft.com/office/drawing/2014/main" id="{B86636BB-553A-E18C-D394-C5873939146C}"/>
+                <a16:creationId xmlns:a16="http://schemas.microsoft.com/office/drawing/2014/main" id="{6674C1F2-1E49-418C-7231-68D4235246B3}"/>
               </a:ext>
             </a:extLst>
           </p:cNvPr>
@@ -15042,7 +15042,7 @@
           <p:cNvPr id="106" name="pattern">
             <a:extLst>
               <a:ext uri="{FF2B5EF4-FFF2-40B4-BE49-F238E27FC236}">
-                <a16:creationId xmlns:a16="http://schemas.microsoft.com/office/drawing/2014/main" id="{8820CBA1-729A-8F9B-5250-CF8E8C098526}"/>
+                <a16:creationId xmlns:a16="http://schemas.microsoft.com/office/drawing/2014/main" id="{745D75A2-2479-B004-BCBB-DFFBBEFB2149}"/>
               </a:ext>
             </a:extLst>
           </p:cNvPr>
@@ -15098,7 +15098,7 @@
           <p:cNvPr id="107" name="pattern">
             <a:extLst>
               <a:ext uri="{FF2B5EF4-FFF2-40B4-BE49-F238E27FC236}">
-                <a16:creationId xmlns:a16="http://schemas.microsoft.com/office/drawing/2014/main" id="{33170AEB-3959-3D6C-B75F-76CC338D20CB}"/>
+                <a16:creationId xmlns:a16="http://schemas.microsoft.com/office/drawing/2014/main" id="{E6AEF658-E996-3DEB-B75C-A9261C915DAE}"/>
               </a:ext>
             </a:extLst>
           </p:cNvPr>
@@ -15154,7 +15154,7 @@
           <p:cNvPr id="108" name="pattern">
             <a:extLst>
               <a:ext uri="{FF2B5EF4-FFF2-40B4-BE49-F238E27FC236}">
-                <a16:creationId xmlns:a16="http://schemas.microsoft.com/office/drawing/2014/main" id="{C545EE01-5A16-2A0F-2A34-5DF4472183B1}"/>
+                <a16:creationId xmlns:a16="http://schemas.microsoft.com/office/drawing/2014/main" id="{16BF1237-7A20-3B85-BF1A-4EF52B1C99E6}"/>
               </a:ext>
             </a:extLst>
           </p:cNvPr>
@@ -15210,7 +15210,7 @@
           <p:cNvPr id="109" name="pattern">
             <a:extLst>
               <a:ext uri="{FF2B5EF4-FFF2-40B4-BE49-F238E27FC236}">
-                <a16:creationId xmlns:a16="http://schemas.microsoft.com/office/drawing/2014/main" id="{6FB3FB13-23D4-F5DF-B9DA-9D67A5C097E5}"/>
+                <a16:creationId xmlns:a16="http://schemas.microsoft.com/office/drawing/2014/main" id="{0A36864C-995A-ADC9-4AF1-1D8A27B5E76D}"/>
               </a:ext>
             </a:extLst>
           </p:cNvPr>
@@ -15266,7 +15266,7 @@
           <p:cNvPr id="110" name="pattern">
             <a:extLst>
               <a:ext uri="{FF2B5EF4-FFF2-40B4-BE49-F238E27FC236}">
-                <a16:creationId xmlns:a16="http://schemas.microsoft.com/office/drawing/2014/main" id="{3DEEB078-50B7-76BC-6CEA-78B63896FBEE}"/>
+                <a16:creationId xmlns:a16="http://schemas.microsoft.com/office/drawing/2014/main" id="{4685F139-094E-0FD7-651B-8FCE614B8E93}"/>
               </a:ext>
             </a:extLst>
           </p:cNvPr>
@@ -15322,7 +15322,7 @@
           <p:cNvPr id="111" name="pattern">
             <a:extLst>
               <a:ext uri="{FF2B5EF4-FFF2-40B4-BE49-F238E27FC236}">
-                <a16:creationId xmlns:a16="http://schemas.microsoft.com/office/drawing/2014/main" id="{6499C81F-6970-B530-83AB-A98E9FBE9AA0}"/>
+                <a16:creationId xmlns:a16="http://schemas.microsoft.com/office/drawing/2014/main" id="{B30A7C6B-ECF3-0A40-8039-046F5A018B98}"/>
               </a:ext>
             </a:extLst>
           </p:cNvPr>
@@ -15378,7 +15378,7 @@
           <p:cNvPr id="112" name="pattern">
             <a:extLst>
               <a:ext uri="{FF2B5EF4-FFF2-40B4-BE49-F238E27FC236}">
-                <a16:creationId xmlns:a16="http://schemas.microsoft.com/office/drawing/2014/main" id="{79E1EBB5-AEE2-7D4A-89D7-21255C23D1A4}"/>
+                <a16:creationId xmlns:a16="http://schemas.microsoft.com/office/drawing/2014/main" id="{87847716-2FEB-1C85-9A52-D9776C226C2F}"/>
               </a:ext>
             </a:extLst>
           </p:cNvPr>
@@ -15434,7 +15434,7 @@
           <p:cNvPr id="113" name="pattern">
             <a:extLst>
               <a:ext uri="{FF2B5EF4-FFF2-40B4-BE49-F238E27FC236}">
-                <a16:creationId xmlns:a16="http://schemas.microsoft.com/office/drawing/2014/main" id="{2FC2A37E-C117-C717-C71D-F35E4E91D1E0}"/>
+                <a16:creationId xmlns:a16="http://schemas.microsoft.com/office/drawing/2014/main" id="{B875664E-EC89-1E65-2B6A-2CDDD9B4CEEF}"/>
               </a:ext>
             </a:extLst>
           </p:cNvPr>
@@ -15490,7 +15490,7 @@
           <p:cNvPr id="114" name="pattern">
             <a:extLst>
               <a:ext uri="{FF2B5EF4-FFF2-40B4-BE49-F238E27FC236}">
-                <a16:creationId xmlns:a16="http://schemas.microsoft.com/office/drawing/2014/main" id="{F8B1B826-505D-D0B1-13BC-33B2EBC055B3}"/>
+                <a16:creationId xmlns:a16="http://schemas.microsoft.com/office/drawing/2014/main" id="{12471D59-8D52-54B2-A180-2CD9BF2C2D8D}"/>
               </a:ext>
             </a:extLst>
           </p:cNvPr>
@@ -15546,7 +15546,7 @@
           <p:cNvPr id="115" name="pattern">
             <a:extLst>
               <a:ext uri="{FF2B5EF4-FFF2-40B4-BE49-F238E27FC236}">
-                <a16:creationId xmlns:a16="http://schemas.microsoft.com/office/drawing/2014/main" id="{5229AD98-E9F0-F6D2-2C74-9EAF6C3AE07A}"/>
+                <a16:creationId xmlns:a16="http://schemas.microsoft.com/office/drawing/2014/main" id="{DE577A69-D594-088F-CAEA-C7A18E59A841}"/>
               </a:ext>
             </a:extLst>
           </p:cNvPr>
@@ -15602,7 +15602,7 @@
           <p:cNvPr id="116" name="pattern">
             <a:extLst>
               <a:ext uri="{FF2B5EF4-FFF2-40B4-BE49-F238E27FC236}">
-                <a16:creationId xmlns:a16="http://schemas.microsoft.com/office/drawing/2014/main" id="{935E1956-CCA4-0A21-1D19-317EB3BFC548}"/>
+                <a16:creationId xmlns:a16="http://schemas.microsoft.com/office/drawing/2014/main" id="{8FE17809-7370-3CC8-7F7A-7A163927C745}"/>
               </a:ext>
             </a:extLst>
           </p:cNvPr>
@@ -15658,7 +15658,7 @@
           <p:cNvPr id="117" name="pattern">
             <a:extLst>
               <a:ext uri="{FF2B5EF4-FFF2-40B4-BE49-F238E27FC236}">
-                <a16:creationId xmlns:a16="http://schemas.microsoft.com/office/drawing/2014/main" id="{093CFDD4-687D-5C87-E33B-9E89509259E7}"/>
+                <a16:creationId xmlns:a16="http://schemas.microsoft.com/office/drawing/2014/main" id="{6530387F-4471-ECA7-0F64-935594739302}"/>
               </a:ext>
             </a:extLst>
           </p:cNvPr>
@@ -15714,7 +15714,7 @@
           <p:cNvPr id="118" name="pattern">
             <a:extLst>
               <a:ext uri="{FF2B5EF4-FFF2-40B4-BE49-F238E27FC236}">
-                <a16:creationId xmlns:a16="http://schemas.microsoft.com/office/drawing/2014/main" id="{98444586-462E-C66A-986E-500DC7364A00}"/>
+                <a16:creationId xmlns:a16="http://schemas.microsoft.com/office/drawing/2014/main" id="{E2E41C72-5C26-34F2-99F6-3C57BD4653BF}"/>
               </a:ext>
             </a:extLst>
           </p:cNvPr>
@@ -15770,7 +15770,7 @@
           <p:cNvPr id="119" name="pattern">
             <a:extLst>
               <a:ext uri="{FF2B5EF4-FFF2-40B4-BE49-F238E27FC236}">
-                <a16:creationId xmlns:a16="http://schemas.microsoft.com/office/drawing/2014/main" id="{FE256E97-7BFD-5992-4686-282976BCFC94}"/>
+                <a16:creationId xmlns:a16="http://schemas.microsoft.com/office/drawing/2014/main" id="{8890E668-8F4F-EA2A-6926-520C677C9A89}"/>
               </a:ext>
             </a:extLst>
           </p:cNvPr>
@@ -15826,7 +15826,7 @@
           <p:cNvPr id="120" name="pattern">
             <a:extLst>
               <a:ext uri="{FF2B5EF4-FFF2-40B4-BE49-F238E27FC236}">
-                <a16:creationId xmlns:a16="http://schemas.microsoft.com/office/drawing/2014/main" id="{21CC718A-5B05-0FBE-9F4F-18D1B38295C0}"/>
+                <a16:creationId xmlns:a16="http://schemas.microsoft.com/office/drawing/2014/main" id="{32C26063-C09A-C350-4B6D-52A17380AF22}"/>
               </a:ext>
             </a:extLst>
           </p:cNvPr>
@@ -15882,7 +15882,7 @@
           <p:cNvPr id="121" name="pattern">
             <a:extLst>
               <a:ext uri="{FF2B5EF4-FFF2-40B4-BE49-F238E27FC236}">
-                <a16:creationId xmlns:a16="http://schemas.microsoft.com/office/drawing/2014/main" id="{0B4D9537-6436-A95D-875C-887D17063C51}"/>
+                <a16:creationId xmlns:a16="http://schemas.microsoft.com/office/drawing/2014/main" id="{CC3C1CDD-EE2A-F2DA-3BF2-234537150F42}"/>
               </a:ext>
             </a:extLst>
           </p:cNvPr>
@@ -15938,7 +15938,7 @@
           <p:cNvPr id="122" name="pattern">
             <a:extLst>
               <a:ext uri="{FF2B5EF4-FFF2-40B4-BE49-F238E27FC236}">
-                <a16:creationId xmlns:a16="http://schemas.microsoft.com/office/drawing/2014/main" id="{71614BCD-81C4-2A99-6971-5BFA6151E406}"/>
+                <a16:creationId xmlns:a16="http://schemas.microsoft.com/office/drawing/2014/main" id="{5F1EBF5A-6A78-C632-04FC-AE6F34DBFAD4}"/>
               </a:ext>
             </a:extLst>
           </p:cNvPr>
@@ -15994,7 +15994,7 @@
           <p:cNvPr id="123" name="pattern">
             <a:extLst>
               <a:ext uri="{FF2B5EF4-FFF2-40B4-BE49-F238E27FC236}">
-                <a16:creationId xmlns:a16="http://schemas.microsoft.com/office/drawing/2014/main" id="{0355C717-0C38-E0F6-ABF5-126642EC7FCB}"/>
+                <a16:creationId xmlns:a16="http://schemas.microsoft.com/office/drawing/2014/main" id="{D2339381-2FC4-A906-69BF-2D7BDD522C32}"/>
               </a:ext>
             </a:extLst>
           </p:cNvPr>
@@ -16050,7 +16050,7 @@
           <p:cNvPr id="124" name="pattern">
             <a:extLst>
               <a:ext uri="{FF2B5EF4-FFF2-40B4-BE49-F238E27FC236}">
-                <a16:creationId xmlns:a16="http://schemas.microsoft.com/office/drawing/2014/main" id="{A9E283C1-119A-0C69-C72C-42D6D79F5B00}"/>
+                <a16:creationId xmlns:a16="http://schemas.microsoft.com/office/drawing/2014/main" id="{31633AFF-CFB8-490D-534E-94B895C88CB0}"/>
               </a:ext>
             </a:extLst>
           </p:cNvPr>
@@ -16106,7 +16106,7 @@
           <p:cNvPr id="125" name="pattern">
             <a:extLst>
               <a:ext uri="{FF2B5EF4-FFF2-40B4-BE49-F238E27FC236}">
-                <a16:creationId xmlns:a16="http://schemas.microsoft.com/office/drawing/2014/main" id="{2632877F-9F79-03BF-D810-38D67466EB4C}"/>
+                <a16:creationId xmlns:a16="http://schemas.microsoft.com/office/drawing/2014/main" id="{BE03ED09-5029-0E99-07B5-20601503DB38}"/>
               </a:ext>
             </a:extLst>
           </p:cNvPr>
@@ -16162,7 +16162,7 @@
           <p:cNvPr id="126" name="pattern">
             <a:extLst>
               <a:ext uri="{FF2B5EF4-FFF2-40B4-BE49-F238E27FC236}">
-                <a16:creationId xmlns:a16="http://schemas.microsoft.com/office/drawing/2014/main" id="{43ADF455-76A2-B2B9-B4D3-0415EEDDFAEB}"/>
+                <a16:creationId xmlns:a16="http://schemas.microsoft.com/office/drawing/2014/main" id="{2CED7907-39EF-AFA5-9E8B-8025032BBD96}"/>
               </a:ext>
             </a:extLst>
           </p:cNvPr>
@@ -16218,7 +16218,7 @@
           <p:cNvPr id="127" name="pattern">
             <a:extLst>
               <a:ext uri="{FF2B5EF4-FFF2-40B4-BE49-F238E27FC236}">
-                <a16:creationId xmlns:a16="http://schemas.microsoft.com/office/drawing/2014/main" id="{E921CAAD-7F30-506C-ACAB-6C7A296338C4}"/>
+                <a16:creationId xmlns:a16="http://schemas.microsoft.com/office/drawing/2014/main" id="{E5228A46-7D66-40C6-EE02-7E0B6CA1153B}"/>
               </a:ext>
             </a:extLst>
           </p:cNvPr>
@@ -16274,7 +16274,7 @@
           <p:cNvPr id="128" name="pattern">
             <a:extLst>
               <a:ext uri="{FF2B5EF4-FFF2-40B4-BE49-F238E27FC236}">
-                <a16:creationId xmlns:a16="http://schemas.microsoft.com/office/drawing/2014/main" id="{A7CC831C-1627-9D3F-4E3D-7ABC0ED8B7C9}"/>
+                <a16:creationId xmlns:a16="http://schemas.microsoft.com/office/drawing/2014/main" id="{8565D74C-7BFA-20C6-A948-D4585E37340B}"/>
               </a:ext>
             </a:extLst>
           </p:cNvPr>
@@ -16330,7 +16330,7 @@
           <p:cNvPr id="129" name="pattern">
             <a:extLst>
               <a:ext uri="{FF2B5EF4-FFF2-40B4-BE49-F238E27FC236}">
-                <a16:creationId xmlns:a16="http://schemas.microsoft.com/office/drawing/2014/main" id="{C9A90AC0-1149-A929-625A-F64B2EB7305D}"/>
+                <a16:creationId xmlns:a16="http://schemas.microsoft.com/office/drawing/2014/main" id="{DCC07306-36AA-C012-9BC9-431DBD37B5EB}"/>
               </a:ext>
             </a:extLst>
           </p:cNvPr>
@@ -16386,7 +16386,7 @@
           <p:cNvPr id="130" name="pattern">
             <a:extLst>
               <a:ext uri="{FF2B5EF4-FFF2-40B4-BE49-F238E27FC236}">
-                <a16:creationId xmlns:a16="http://schemas.microsoft.com/office/drawing/2014/main" id="{B789A0DF-3C52-80AA-B4BE-69C3EF8F8D53}"/>
+                <a16:creationId xmlns:a16="http://schemas.microsoft.com/office/drawing/2014/main" id="{AA9A6FA4-1174-431B-C800-F34956953983}"/>
               </a:ext>
             </a:extLst>
           </p:cNvPr>
@@ -16442,7 +16442,7 @@
           <p:cNvPr id="131" name="pattern">
             <a:extLst>
               <a:ext uri="{FF2B5EF4-FFF2-40B4-BE49-F238E27FC236}">
-                <a16:creationId xmlns:a16="http://schemas.microsoft.com/office/drawing/2014/main" id="{6FB899AA-7585-7C7D-5052-C5EA744A6CB1}"/>
+                <a16:creationId xmlns:a16="http://schemas.microsoft.com/office/drawing/2014/main" id="{80A7377F-C2A0-07F7-0A1E-D4D59C773D81}"/>
               </a:ext>
             </a:extLst>
           </p:cNvPr>
@@ -16498,7 +16498,7 @@
           <p:cNvPr id="132" name="pattern">
             <a:extLst>
               <a:ext uri="{FF2B5EF4-FFF2-40B4-BE49-F238E27FC236}">
-                <a16:creationId xmlns:a16="http://schemas.microsoft.com/office/drawing/2014/main" id="{F3AB354E-E964-8A0D-F00D-EECE2D50D2E0}"/>
+                <a16:creationId xmlns:a16="http://schemas.microsoft.com/office/drawing/2014/main" id="{3246E977-A1B7-7FDD-7EC0-4F78D029EB88}"/>
               </a:ext>
             </a:extLst>
           </p:cNvPr>
@@ -16554,7 +16554,7 @@
           <p:cNvPr id="133" name="pattern">
             <a:extLst>
               <a:ext uri="{FF2B5EF4-FFF2-40B4-BE49-F238E27FC236}">
-                <a16:creationId xmlns:a16="http://schemas.microsoft.com/office/drawing/2014/main" id="{005E9C5E-139E-3C6A-7AA1-B725222C4045}"/>
+                <a16:creationId xmlns:a16="http://schemas.microsoft.com/office/drawing/2014/main" id="{BECC1247-1A0A-BA28-C694-ED5ECADEE46F}"/>
               </a:ext>
             </a:extLst>
           </p:cNvPr>
@@ -16610,7 +16610,7 @@
           <p:cNvPr id="134" name="pattern">
             <a:extLst>
               <a:ext uri="{FF2B5EF4-FFF2-40B4-BE49-F238E27FC236}">
-                <a16:creationId xmlns:a16="http://schemas.microsoft.com/office/drawing/2014/main" id="{7E72A697-1645-2DD4-C93F-C2F9E958EC9C}"/>
+                <a16:creationId xmlns:a16="http://schemas.microsoft.com/office/drawing/2014/main" id="{73A3AA74-A995-265D-1588-37BD27EBE09A}"/>
               </a:ext>
             </a:extLst>
           </p:cNvPr>
@@ -16666,7 +16666,7 @@
           <p:cNvPr id="135" name="pattern">
             <a:extLst>
               <a:ext uri="{FF2B5EF4-FFF2-40B4-BE49-F238E27FC236}">
-                <a16:creationId xmlns:a16="http://schemas.microsoft.com/office/drawing/2014/main" id="{6797E5FA-C268-9E10-F132-98AC21FFC787}"/>
+                <a16:creationId xmlns:a16="http://schemas.microsoft.com/office/drawing/2014/main" id="{D12F8543-6C1D-96E3-80A1-63FB2F05F5CE}"/>
               </a:ext>
             </a:extLst>
           </p:cNvPr>
@@ -16720,7 +16720,7 @@
     </p:spTree>
     <p:extLst>
       <p:ext uri="{BB962C8B-B14F-4D97-AF65-F5344CB8AC3E}">
-        <p14:creationId xmlns:p14="http://schemas.microsoft.com/office/powerpoint/2010/main" val="3713303017"/>
+        <p14:creationId xmlns:p14="http://schemas.microsoft.com/office/powerpoint/2010/main" val="855988349"/>
       </p:ext>
     </p:extLst>
   </p:cSld>
@@ -16789,7 +16789,7 @@
           <a:bodyPr/>
           <a:lstStyle/>
           <a:p>
-            <a:fld id="{1146AB1F-C91F-4F0F-9868-5252CDCD6051}" type="datetimeFigureOut">
+            <a:fld id="{A9C3E1C2-504C-4CFF-A37A-AE4693906186}" type="datetimeFigureOut">
               <a:rPr lang="en-US" smtClean="0"/>
               <a:t>10/3/2026</a:t>
             </a:fld>
@@ -16831,7 +16831,7 @@
           <a:bodyPr/>
           <a:lstStyle/>
           <a:p>
-            <a:fld id="{FE1B144C-6E1C-47C6-9306-1DC2A92756EB}" type="slidenum">
+            <a:fld id="{0CAC26E6-90F8-49CB-BE00-E3E555820112}" type="slidenum">
               <a:rPr lang="en-US" smtClean="0"/>
               <a:t>‹#›</a:t>
             </a:fld>
@@ -16844,7 +16844,7 @@
           <p:cNvPr id="6" name="item_1_title">
             <a:extLst>
               <a:ext uri="{FF2B5EF4-FFF2-40B4-BE49-F238E27FC236}">
-                <a16:creationId xmlns:a16="http://schemas.microsoft.com/office/drawing/2014/main" id="{FB38D2CD-08A6-DFE5-C569-08DE5203E592}"/>
+                <a16:creationId xmlns:a16="http://schemas.microsoft.com/office/drawing/2014/main" id="{FD0F1E63-AFF5-9DA7-C23C-AE69E21AF3F8}"/>
               </a:ext>
             </a:extLst>
           </p:cNvPr>
@@ -16872,7 +16872,7 @@
               </a:spcBef>
               <a:buFontTx/>
               <a:buNone/>
-              <a:defRPr sz="2200" b="1">
+              <a:defRPr sz="2000" b="1">
                 <a:solidFill>
                   <a:schemeClr val="accent1">
                     <a:lumMod val="70000"/>
@@ -16896,7 +16896,7 @@
           <p:cNvPr id="7" name="item_1">
             <a:extLst>
               <a:ext uri="{FF2B5EF4-FFF2-40B4-BE49-F238E27FC236}">
-                <a16:creationId xmlns:a16="http://schemas.microsoft.com/office/drawing/2014/main" id="{CC38A88D-D04C-8C71-6C1D-2748A8328F78}"/>
+                <a16:creationId xmlns:a16="http://schemas.microsoft.com/office/drawing/2014/main" id="{AAFD4FD8-B046-EDF9-8085-3DF988BE3957}"/>
               </a:ext>
             </a:extLst>
           </p:cNvPr>
@@ -16944,7 +16944,7 @@
           <p:cNvPr id="8" name="item_2_title">
             <a:extLst>
               <a:ext uri="{FF2B5EF4-FFF2-40B4-BE49-F238E27FC236}">
-                <a16:creationId xmlns:a16="http://schemas.microsoft.com/office/drawing/2014/main" id="{A474C970-C4DB-AC85-B5B0-802FF35372DF}"/>
+                <a16:creationId xmlns:a16="http://schemas.microsoft.com/office/drawing/2014/main" id="{9DE8CD2D-C449-2D26-EA40-88B8C2E7086A}"/>
               </a:ext>
             </a:extLst>
           </p:cNvPr>
@@ -16975,7 +16975,7 @@
               </a:spcBef>
               <a:buFontTx/>
               <a:buNone/>
-              <a:defRPr sz="2200" b="1">
+              <a:defRPr sz="2000" b="1">
                 <a:solidFill>
                   <a:schemeClr val="accent1">
                     <a:lumMod val="70000"/>
@@ -16999,7 +16999,7 @@
           <p:cNvPr id="9" name="item_2">
             <a:extLst>
               <a:ext uri="{FF2B5EF4-FFF2-40B4-BE49-F238E27FC236}">
-                <a16:creationId xmlns:a16="http://schemas.microsoft.com/office/drawing/2014/main" id="{F31206A9-52A4-1772-52B2-C49461BA7DEC}"/>
+                <a16:creationId xmlns:a16="http://schemas.microsoft.com/office/drawing/2014/main" id="{66583F88-0C9E-C906-7485-9D2FD8E47E0F}"/>
               </a:ext>
             </a:extLst>
           </p:cNvPr>
@@ -17047,7 +17047,7 @@
           <p:cNvPr id="10" name="item_3_title">
             <a:extLst>
               <a:ext uri="{FF2B5EF4-FFF2-40B4-BE49-F238E27FC236}">
-                <a16:creationId xmlns:a16="http://schemas.microsoft.com/office/drawing/2014/main" id="{68C9384E-34CD-A31A-B7E4-B899CAFC9921}"/>
+                <a16:creationId xmlns:a16="http://schemas.microsoft.com/office/drawing/2014/main" id="{9BAF7B0C-8A0B-5A8B-9264-EAC6E892E6E2}"/>
               </a:ext>
             </a:extLst>
           </p:cNvPr>
@@ -17078,7 +17078,7 @@
               </a:spcBef>
               <a:buFontTx/>
               <a:buNone/>
-              <a:defRPr sz="2200" b="1">
+              <a:defRPr sz="2000" b="1">
                 <a:solidFill>
                   <a:schemeClr val="accent1">
                     <a:lumMod val="70000"/>
@@ -17102,7 +17102,7 @@
           <p:cNvPr id="11" name="item_3">
             <a:extLst>
               <a:ext uri="{FF2B5EF4-FFF2-40B4-BE49-F238E27FC236}">
-                <a16:creationId xmlns:a16="http://schemas.microsoft.com/office/drawing/2014/main" id="{200CE7C8-5AC1-C3E8-2860-BA15EA70C246}"/>
+                <a16:creationId xmlns:a16="http://schemas.microsoft.com/office/drawing/2014/main" id="{550F4430-22D3-B819-95D4-6549C078525C}"/>
               </a:ext>
             </a:extLst>
           </p:cNvPr>
@@ -17150,7 +17150,7 @@
           <p:cNvPr id="12" name="item_4_title">
             <a:extLst>
               <a:ext uri="{FF2B5EF4-FFF2-40B4-BE49-F238E27FC236}">
-                <a16:creationId xmlns:a16="http://schemas.microsoft.com/office/drawing/2014/main" id="{6097D1D9-98A2-B6D9-4C76-E260AB6E5840}"/>
+                <a16:creationId xmlns:a16="http://schemas.microsoft.com/office/drawing/2014/main" id="{8D8983C7-36FE-9006-E1B2-92E296E7C63E}"/>
               </a:ext>
             </a:extLst>
           </p:cNvPr>
@@ -17181,7 +17181,7 @@
               </a:spcBef>
               <a:buFontTx/>
               <a:buNone/>
-              <a:defRPr sz="2200" b="1">
+              <a:defRPr sz="2000" b="1">
                 <a:solidFill>
                   <a:schemeClr val="accent1">
                     <a:lumMod val="70000"/>
@@ -17205,7 +17205,7 @@
           <p:cNvPr id="13" name="item_4">
             <a:extLst>
               <a:ext uri="{FF2B5EF4-FFF2-40B4-BE49-F238E27FC236}">
-                <a16:creationId xmlns:a16="http://schemas.microsoft.com/office/drawing/2014/main" id="{E3AB1196-3860-05D8-5ECE-E934FA2B1664}"/>
+                <a16:creationId xmlns:a16="http://schemas.microsoft.com/office/drawing/2014/main" id="{E50D9FB5-9988-D203-691D-BB7C89A4EEEB}"/>
               </a:ext>
             </a:extLst>
           </p:cNvPr>
@@ -17253,7 +17253,7 @@
           <p:cNvPr id="14" name="source">
             <a:extLst>
               <a:ext uri="{FF2B5EF4-FFF2-40B4-BE49-F238E27FC236}">
-                <a16:creationId xmlns:a16="http://schemas.microsoft.com/office/drawing/2014/main" id="{8117264C-B019-1C5C-A2DD-032276C25EB7}"/>
+                <a16:creationId xmlns:a16="http://schemas.microsoft.com/office/drawing/2014/main" id="{049604A3-ED16-B810-0CCB-833DA0A99AF9}"/>
               </a:ext>
             </a:extLst>
           </p:cNvPr>
@@ -17310,7 +17310,7 @@
     </p:spTree>
     <p:extLst>
       <p:ext uri="{BB962C8B-B14F-4D97-AF65-F5344CB8AC3E}">
-        <p14:creationId xmlns:p14="http://schemas.microsoft.com/office/powerpoint/2010/main" val="1805276963"/>
+        <p14:creationId xmlns:p14="http://schemas.microsoft.com/office/powerpoint/2010/main" val="2950250737"/>
       </p:ext>
     </p:extLst>
   </p:cSld>
@@ -17379,7 +17379,7 @@
           <a:bodyPr/>
           <a:lstStyle/>
           <a:p>
-            <a:fld id="{1146AB1F-C91F-4F0F-9868-5252CDCD6051}" type="datetimeFigureOut">
+            <a:fld id="{A9C3E1C2-504C-4CFF-A37A-AE4693906186}" type="datetimeFigureOut">
               <a:rPr lang="en-US" smtClean="0"/>
               <a:t>10/3/2026</a:t>
             </a:fld>
@@ -17421,7 +17421,7 @@
           <a:bodyPr/>
           <a:lstStyle/>
           <a:p>
-            <a:fld id="{FE1B144C-6E1C-47C6-9306-1DC2A92756EB}" type="slidenum">
+            <a:fld id="{0CAC26E6-90F8-49CB-BE00-E3E555820112}" type="slidenum">
               <a:rPr lang="en-US" smtClean="0"/>
               <a:t>‹#›</a:t>
             </a:fld>
@@ -17434,7 +17434,7 @@
           <p:cNvPr id="6" name="body">
             <a:extLst>
               <a:ext uri="{FF2B5EF4-FFF2-40B4-BE49-F238E27FC236}">
-                <a16:creationId xmlns:a16="http://schemas.microsoft.com/office/drawing/2014/main" id="{7FAADD48-197F-AA58-3567-D6B261A3C56E}"/>
+                <a16:creationId xmlns:a16="http://schemas.microsoft.com/office/drawing/2014/main" id="{D49E488F-499E-2F9B-F0D2-8B471C77B0FE}"/>
               </a:ext>
             </a:extLst>
           </p:cNvPr>
@@ -17479,7 +17479,7 @@
           <p:cNvPr id="7" name="source">
             <a:extLst>
               <a:ext uri="{FF2B5EF4-FFF2-40B4-BE49-F238E27FC236}">
-                <a16:creationId xmlns:a16="http://schemas.microsoft.com/office/drawing/2014/main" id="{C0BB849D-6456-F20C-CCC6-8D17CBA5DA12}"/>
+                <a16:creationId xmlns:a16="http://schemas.microsoft.com/office/drawing/2014/main" id="{B7C89F58-262C-8CCC-D1C0-FFCA85A9497B}"/>
               </a:ext>
             </a:extLst>
           </p:cNvPr>
@@ -17536,7 +17536,7 @@
     </p:spTree>
     <p:extLst>
       <p:ext uri="{BB962C8B-B14F-4D97-AF65-F5344CB8AC3E}">
-        <p14:creationId xmlns:p14="http://schemas.microsoft.com/office/powerpoint/2010/main" val="1957795882"/>
+        <p14:creationId xmlns:p14="http://schemas.microsoft.com/office/powerpoint/2010/main" val="3928062839"/>
       </p:ext>
     </p:extLst>
   </p:cSld>
@@ -17605,7 +17605,7 @@
           <a:bodyPr/>
           <a:lstStyle/>
           <a:p>
-            <a:fld id="{1146AB1F-C91F-4F0F-9868-5252CDCD6051}" type="datetimeFigureOut">
+            <a:fld id="{A9C3E1C2-504C-4CFF-A37A-AE4693906186}" type="datetimeFigureOut">
               <a:rPr lang="en-US" smtClean="0"/>
               <a:t>10/3/2026</a:t>
             </a:fld>
@@ -17647,7 +17647,7 @@
           <a:bodyPr/>
           <a:lstStyle/>
           <a:p>
-            <a:fld id="{FE1B144C-6E1C-47C6-9306-1DC2A92756EB}" type="slidenum">
+            <a:fld id="{0CAC26E6-90F8-49CB-BE00-E3E555820112}" type="slidenum">
               <a:rPr lang="en-US" smtClean="0"/>
               <a:t>‹#›</a:t>
             </a:fld>
@@ -17660,7 +17660,7 @@
           <p:cNvPr id="6" name="item_1_title">
             <a:extLst>
               <a:ext uri="{FF2B5EF4-FFF2-40B4-BE49-F238E27FC236}">
-                <a16:creationId xmlns:a16="http://schemas.microsoft.com/office/drawing/2014/main" id="{9891BB08-CD6E-1A4A-55A2-EB8E4A1C18E9}"/>
+                <a16:creationId xmlns:a16="http://schemas.microsoft.com/office/drawing/2014/main" id="{FF5877A3-9B76-F3DA-CED2-C06477D106CA}"/>
               </a:ext>
             </a:extLst>
           </p:cNvPr>
@@ -17673,8 +17673,8 @@
         </p:nvSpPr>
         <p:spPr>
           <a:xfrm>
-            <a:off x="1223514" y="2498833"/>
-            <a:ext cx="4361571" cy="371676"/>
+            <a:off x="1198591" y="2472230"/>
+            <a:ext cx="4411418" cy="387325"/>
           </a:xfrm>
         </p:spPr>
         <p:txBody>
@@ -17688,7 +17688,7 @@
               </a:spcBef>
               <a:buFontTx/>
               <a:buNone/>
-              <a:defRPr sz="2200" b="1">
+              <a:defRPr sz="2000" b="1">
                 <a:solidFill>
                   <a:schemeClr val="accent1">
                     <a:lumMod val="70000"/>
@@ -17712,7 +17712,7 @@
           <p:cNvPr id="7" name="item_1">
             <a:extLst>
               <a:ext uri="{FF2B5EF4-FFF2-40B4-BE49-F238E27FC236}">
-                <a16:creationId xmlns:a16="http://schemas.microsoft.com/office/drawing/2014/main" id="{C8256DA2-9BC6-BCD6-4812-2B597FD1C0B0}"/>
+                <a16:creationId xmlns:a16="http://schemas.microsoft.com/office/drawing/2014/main" id="{D3B2D0EB-4EFF-44F9-B681-7E140CC2C7BC}"/>
               </a:ext>
             </a:extLst>
           </p:cNvPr>
@@ -17725,8 +17725,8 @@
         </p:nvSpPr>
         <p:spPr>
           <a:xfrm>
-            <a:off x="1223515" y="2870510"/>
-            <a:ext cx="4361571" cy="892021"/>
+            <a:off x="1198591" y="2859554"/>
+            <a:ext cx="4411418" cy="929580"/>
           </a:xfrm>
           <a:prstGeom prst="rect">
             <a:avLst/>
@@ -17760,7 +17760,7 @@
           <p:cNvPr id="8" name="item_2_title">
             <a:extLst>
               <a:ext uri="{FF2B5EF4-FFF2-40B4-BE49-F238E27FC236}">
-                <a16:creationId xmlns:a16="http://schemas.microsoft.com/office/drawing/2014/main" id="{B0A7CDD0-D806-4FAB-4120-383C4BBE462C}"/>
+                <a16:creationId xmlns:a16="http://schemas.microsoft.com/office/drawing/2014/main" id="{9040EC3B-0B3D-B356-D43F-63ED6A040BEE}"/>
               </a:ext>
             </a:extLst>
           </p:cNvPr>
@@ -17773,8 +17773,8 @@
         </p:nvSpPr>
         <p:spPr>
           <a:xfrm>
-            <a:off x="6183245" y="2498833"/>
-            <a:ext cx="4361571" cy="371676"/>
+            <a:off x="6158321" y="2472230"/>
+            <a:ext cx="4411418" cy="387325"/>
           </a:xfrm>
           <a:prstGeom prst="rect">
             <a:avLst/>
@@ -17791,7 +17791,7 @@
               </a:spcBef>
               <a:buFontTx/>
               <a:buNone/>
-              <a:defRPr sz="2200" b="1">
+              <a:defRPr sz="2000" b="1">
                 <a:solidFill>
                   <a:schemeClr val="accent1">
                     <a:lumMod val="70000"/>
@@ -17815,7 +17815,7 @@
           <p:cNvPr id="9" name="item_2">
             <a:extLst>
               <a:ext uri="{FF2B5EF4-FFF2-40B4-BE49-F238E27FC236}">
-                <a16:creationId xmlns:a16="http://schemas.microsoft.com/office/drawing/2014/main" id="{B5FCD8C2-DF51-2E89-EDBF-A36474D70027}"/>
+                <a16:creationId xmlns:a16="http://schemas.microsoft.com/office/drawing/2014/main" id="{A13459C7-184E-1720-A671-A2860218A1FA}"/>
               </a:ext>
             </a:extLst>
           </p:cNvPr>
@@ -17828,8 +17828,8 @@
         </p:nvSpPr>
         <p:spPr>
           <a:xfrm>
-            <a:off x="6183245" y="2870510"/>
-            <a:ext cx="4361571" cy="892021"/>
+            <a:off x="6158321" y="2859554"/>
+            <a:ext cx="4411418" cy="929580"/>
           </a:xfrm>
           <a:prstGeom prst="rect">
             <a:avLst/>
@@ -17863,7 +17863,7 @@
           <p:cNvPr id="10" name="item_3_title">
             <a:extLst>
               <a:ext uri="{FF2B5EF4-FFF2-40B4-BE49-F238E27FC236}">
-                <a16:creationId xmlns:a16="http://schemas.microsoft.com/office/drawing/2014/main" id="{7605A172-ACC4-BB20-AE02-D6EF4277FDB2}"/>
+                <a16:creationId xmlns:a16="http://schemas.microsoft.com/office/drawing/2014/main" id="{4A9FAB33-DDEC-BDA1-9C0C-4FB362D3AF4A}"/>
               </a:ext>
             </a:extLst>
           </p:cNvPr>
@@ -17876,8 +17876,8 @@
         </p:nvSpPr>
         <p:spPr>
           <a:xfrm>
-            <a:off x="1223515" y="4401030"/>
-            <a:ext cx="4361571" cy="371676"/>
+            <a:off x="1198591" y="4374427"/>
+            <a:ext cx="4411418" cy="387325"/>
           </a:xfrm>
           <a:prstGeom prst="rect">
             <a:avLst/>
@@ -17894,7 +17894,7 @@
               </a:spcBef>
               <a:buFontTx/>
               <a:buNone/>
-              <a:defRPr sz="2200" b="1">
+              <a:defRPr sz="2000" b="1">
                 <a:solidFill>
                   <a:schemeClr val="accent1">
                     <a:lumMod val="70000"/>
@@ -17918,7 +17918,7 @@
           <p:cNvPr id="11" name="item_3">
             <a:extLst>
               <a:ext uri="{FF2B5EF4-FFF2-40B4-BE49-F238E27FC236}">
-                <a16:creationId xmlns:a16="http://schemas.microsoft.com/office/drawing/2014/main" id="{75FB6554-AF71-D236-C1F3-54839461271A}"/>
+                <a16:creationId xmlns:a16="http://schemas.microsoft.com/office/drawing/2014/main" id="{DB2923FA-C0BF-66CE-10F7-66C436F27F9F}"/>
               </a:ext>
             </a:extLst>
           </p:cNvPr>
@@ -17931,8 +17931,8 @@
         </p:nvSpPr>
         <p:spPr>
           <a:xfrm>
-            <a:off x="1223515" y="4772706"/>
-            <a:ext cx="4361571" cy="892021"/>
+            <a:off x="1198591" y="4761750"/>
+            <a:ext cx="4411418" cy="929580"/>
           </a:xfrm>
           <a:prstGeom prst="rect">
             <a:avLst/>
@@ -17966,7 +17966,7 @@
           <p:cNvPr id="12" name="item_4_title">
             <a:extLst>
               <a:ext uri="{FF2B5EF4-FFF2-40B4-BE49-F238E27FC236}">
-                <a16:creationId xmlns:a16="http://schemas.microsoft.com/office/drawing/2014/main" id="{C1A786A4-264E-5BCF-62DF-769659118B72}"/>
+                <a16:creationId xmlns:a16="http://schemas.microsoft.com/office/drawing/2014/main" id="{1D7C7301-9F60-6F57-FE01-ECE0C9227ED4}"/>
               </a:ext>
             </a:extLst>
           </p:cNvPr>
@@ -17979,8 +17979,8 @@
         </p:nvSpPr>
         <p:spPr>
           <a:xfrm>
-            <a:off x="6183245" y="4401030"/>
-            <a:ext cx="4361571" cy="371676"/>
+            <a:off x="6158321" y="4374427"/>
+            <a:ext cx="4411418" cy="387325"/>
           </a:xfrm>
           <a:prstGeom prst="rect">
             <a:avLst/>
@@ -17997,7 +17997,7 @@
               </a:spcBef>
               <a:buFontTx/>
               <a:buNone/>
-              <a:defRPr sz="2200" b="1">
+              <a:defRPr sz="2000" b="1">
                 <a:solidFill>
                   <a:schemeClr val="accent1">
                     <a:lumMod val="70000"/>
@@ -18021,7 +18021,7 @@
           <p:cNvPr id="13" name="item_4">
             <a:extLst>
               <a:ext uri="{FF2B5EF4-FFF2-40B4-BE49-F238E27FC236}">
-                <a16:creationId xmlns:a16="http://schemas.microsoft.com/office/drawing/2014/main" id="{7E817866-7D3B-DF5C-4257-FB20B0595719}"/>
+                <a16:creationId xmlns:a16="http://schemas.microsoft.com/office/drawing/2014/main" id="{E3184C2B-0540-C71A-A488-DCD5400DAEA1}"/>
               </a:ext>
             </a:extLst>
           </p:cNvPr>
@@ -18034,8 +18034,8 @@
         </p:nvSpPr>
         <p:spPr>
           <a:xfrm>
-            <a:off x="6183245" y="4772706"/>
-            <a:ext cx="4361571" cy="892021"/>
+            <a:off x="6158321" y="4761750"/>
+            <a:ext cx="4411418" cy="929580"/>
           </a:xfrm>
           <a:prstGeom prst="rect">
             <a:avLst/>
@@ -18069,7 +18069,7 @@
           <p:cNvPr id="14" name="source">
             <a:extLst>
               <a:ext uri="{FF2B5EF4-FFF2-40B4-BE49-F238E27FC236}">
-                <a16:creationId xmlns:a16="http://schemas.microsoft.com/office/drawing/2014/main" id="{10294CE4-A079-7D9C-5BAE-9A96526F755B}"/>
+                <a16:creationId xmlns:a16="http://schemas.microsoft.com/office/drawing/2014/main" id="{573CB72B-F7FB-A5EF-7BE3-B54D86D1E7F4}"/>
               </a:ext>
             </a:extLst>
           </p:cNvPr>
@@ -18126,7 +18126,7 @@
     </p:spTree>
     <p:extLst>
       <p:ext uri="{BB962C8B-B14F-4D97-AF65-F5344CB8AC3E}">
-        <p14:creationId xmlns:p14="http://schemas.microsoft.com/office/powerpoint/2010/main" val="624901431"/>
+        <p14:creationId xmlns:p14="http://schemas.microsoft.com/office/powerpoint/2010/main" val="1083163377"/>
       </p:ext>
     </p:extLst>
   </p:cSld>
@@ -18195,7 +18195,7 @@
           <a:bodyPr/>
           <a:lstStyle/>
           <a:p>
-            <a:fld id="{1146AB1F-C91F-4F0F-9868-5252CDCD6051}" type="datetimeFigureOut">
+            <a:fld id="{A9C3E1C2-504C-4CFF-A37A-AE4693906186}" type="datetimeFigureOut">
               <a:rPr lang="en-US" smtClean="0"/>
               <a:t>10/3/2026</a:t>
             </a:fld>
@@ -18237,7 +18237,7 @@
           <a:bodyPr/>
           <a:lstStyle/>
           <a:p>
-            <a:fld id="{FE1B144C-6E1C-47C6-9306-1DC2A92756EB}" type="slidenum">
+            <a:fld id="{0CAC26E6-90F8-49CB-BE00-E3E555820112}" type="slidenum">
               <a:rPr lang="en-US" smtClean="0"/>
               <a:t>‹#›</a:t>
             </a:fld>
@@ -18250,7 +18250,7 @@
           <p:cNvPr id="6" name="body">
             <a:extLst>
               <a:ext uri="{FF2B5EF4-FFF2-40B4-BE49-F238E27FC236}">
-                <a16:creationId xmlns:a16="http://schemas.microsoft.com/office/drawing/2014/main" id="{59756CC6-3487-A86A-E7F4-4BE5C79715F2}"/>
+                <a16:creationId xmlns:a16="http://schemas.microsoft.com/office/drawing/2014/main" id="{35FA83B0-1EF8-F27F-90F6-CAE8ED342DC1}"/>
               </a:ext>
             </a:extLst>
           </p:cNvPr>
@@ -18290,7 +18290,7 @@
           <p:cNvPr id="7" name="kpi_value_1">
             <a:extLst>
               <a:ext uri="{FF2B5EF4-FFF2-40B4-BE49-F238E27FC236}">
-                <a16:creationId xmlns:a16="http://schemas.microsoft.com/office/drawing/2014/main" id="{3DA0C634-57BB-C1C1-99C7-566300F4DB45}"/>
+                <a16:creationId xmlns:a16="http://schemas.microsoft.com/office/drawing/2014/main" id="{0C459F23-201E-855F-8D2E-7F50B28B1FE7}"/>
               </a:ext>
             </a:extLst>
           </p:cNvPr>
@@ -18345,7 +18345,7 @@
           <p:cNvPr id="8" name="kpi_label_1">
             <a:extLst>
               <a:ext uri="{FF2B5EF4-FFF2-40B4-BE49-F238E27FC236}">
-                <a16:creationId xmlns:a16="http://schemas.microsoft.com/office/drawing/2014/main" id="{DAD7C559-5A29-51B9-1472-F500C0706AB7}"/>
+                <a16:creationId xmlns:a16="http://schemas.microsoft.com/office/drawing/2014/main" id="{6D40F57B-D6D2-C229-45A5-E766818D270F}"/>
               </a:ext>
             </a:extLst>
           </p:cNvPr>
@@ -18376,7 +18376,7 @@
               </a:spcBef>
               <a:buFontTx/>
               <a:buNone/>
-              <a:defRPr sz="1800"/>
+              <a:defRPr sz="2000"/>
             </a:lvl1pPr>
           </a:lstStyle>
           <a:p>
@@ -18393,7 +18393,7 @@
           <p:cNvPr id="9" name="source">
             <a:extLst>
               <a:ext uri="{FF2B5EF4-FFF2-40B4-BE49-F238E27FC236}">
-                <a16:creationId xmlns:a16="http://schemas.microsoft.com/office/drawing/2014/main" id="{7C2A8D7F-851C-4B48-A62D-F92DE26573AB}"/>
+                <a16:creationId xmlns:a16="http://schemas.microsoft.com/office/drawing/2014/main" id="{063F852C-F4A2-2A43-74A1-E0114763D94F}"/>
               </a:ext>
             </a:extLst>
           </p:cNvPr>
@@ -18450,7 +18450,7 @@
     </p:spTree>
     <p:extLst>
       <p:ext uri="{BB962C8B-B14F-4D97-AF65-F5344CB8AC3E}">
-        <p14:creationId xmlns:p14="http://schemas.microsoft.com/office/powerpoint/2010/main" val="1112090263"/>
+        <p14:creationId xmlns:p14="http://schemas.microsoft.com/office/powerpoint/2010/main" val="2353427695"/>
       </p:ext>
     </p:extLst>
   </p:cSld>
@@ -18519,7 +18519,7 @@
           <a:bodyPr/>
           <a:lstStyle/>
           <a:p>
-            <a:fld id="{1146AB1F-C91F-4F0F-9868-5252CDCD6051}" type="datetimeFigureOut">
+            <a:fld id="{A9C3E1C2-504C-4CFF-A37A-AE4693906186}" type="datetimeFigureOut">
               <a:rPr lang="en-US" smtClean="0"/>
               <a:t>10/3/2026</a:t>
             </a:fld>
@@ -18561,7 +18561,7 @@
           <a:bodyPr/>
           <a:lstStyle/>
           <a:p>
-            <a:fld id="{FE1B144C-6E1C-47C6-9306-1DC2A92756EB}" type="slidenum">
+            <a:fld id="{0CAC26E6-90F8-49CB-BE00-E3E555820112}" type="slidenum">
               <a:rPr lang="en-US" smtClean="0"/>
               <a:t>‹#›</a:t>
             </a:fld>
@@ -18574,7 +18574,7 @@
           <p:cNvPr id="6" name="body">
             <a:extLst>
               <a:ext uri="{FF2B5EF4-FFF2-40B4-BE49-F238E27FC236}">
-                <a16:creationId xmlns:a16="http://schemas.microsoft.com/office/drawing/2014/main" id="{9214A754-FB5A-32DC-A66D-24AF8751EEBB}"/>
+                <a16:creationId xmlns:a16="http://schemas.microsoft.com/office/drawing/2014/main" id="{05B44FBA-85AE-E635-B33B-68AB0B12C277}"/>
               </a:ext>
             </a:extLst>
           </p:cNvPr>
@@ -18614,7 +18614,7 @@
           <p:cNvPr id="7" name="kpi_value_1">
             <a:extLst>
               <a:ext uri="{FF2B5EF4-FFF2-40B4-BE49-F238E27FC236}">
-                <a16:creationId xmlns:a16="http://schemas.microsoft.com/office/drawing/2014/main" id="{4F90202C-8BAB-8AFB-B0CD-2D0583E18067}"/>
+                <a16:creationId xmlns:a16="http://schemas.microsoft.com/office/drawing/2014/main" id="{22CC2190-D882-5792-B334-0FC1AA86D361}"/>
               </a:ext>
             </a:extLst>
           </p:cNvPr>
@@ -18627,111 +18627,8 @@
         </p:nvSpPr>
         <p:spPr>
           <a:xfrm>
-            <a:off x="1223515" y="2498833"/>
-            <a:ext cx="4461265" cy="1527268"/>
-          </a:xfrm>
-          <a:prstGeom prst="rect">
-            <a:avLst/>
-          </a:prstGeom>
-        </p:spPr>
-        <p:txBody>
-          <a:bodyPr wrap="square" anchor="t">
-            <a:noAutofit/>
-          </a:bodyPr>
-          <a:lstStyle>
-            <a:lvl1pPr marL="0" indent="0">
-              <a:spcBef>
-                <a:spcPts val="0"/>
-              </a:spcBef>
-              <a:buFontTx/>
-              <a:buNone/>
-              <a:defRPr sz="8400" b="1">
-                <a:solidFill>
-                  <a:schemeClr val="accent1">
-                    <a:lumMod val="70000"/>
-                  </a:schemeClr>
-                </a:solidFill>
-                <a:latin typeface="+mj-lt"/>
-              </a:defRPr>
-            </a:lvl1pPr>
-          </a:lstStyle>
-          <a:p>
-            <a:pPr lvl="0"/>
-            <a:r>
-              <a:rPr lang="en-US"/>
-              <a:t>kpi_value_1</a:t>
-            </a:r>
-          </a:p>
-        </p:txBody>
-      </p:sp>
-      <p:sp>
-        <p:nvSpPr>
-          <p:cNvPr id="8" name="kpi_label_1">
-            <a:extLst>
-              <a:ext uri="{FF2B5EF4-FFF2-40B4-BE49-F238E27FC236}">
-                <a16:creationId xmlns:a16="http://schemas.microsoft.com/office/drawing/2014/main" id="{B45AE577-C5D6-40CD-3A9E-1FFCB4E042FE}"/>
-              </a:ext>
-            </a:extLst>
-          </p:cNvPr>
-          <p:cNvSpPr>
-            <a:spLocks noGrp="1"/>
-          </p:cNvSpPr>
-          <p:nvPr>
-            <p:ph type="body" sz="quarter" idx="15" hasCustomPrompt="1"/>
-          </p:nvPr>
-        </p:nvSpPr>
-        <p:spPr>
-          <a:xfrm>
-            <a:off x="1223515" y="4026101"/>
-            <a:ext cx="4461265" cy="848482"/>
-          </a:xfrm>
-          <a:prstGeom prst="rect">
-            <a:avLst/>
-          </a:prstGeom>
-        </p:spPr>
-        <p:txBody>
-          <a:bodyPr wrap="square" anchor="t">
-            <a:noAutofit/>
-          </a:bodyPr>
-          <a:lstStyle>
-            <a:lvl1pPr marL="0" indent="0">
-              <a:spcBef>
-                <a:spcPts val="0"/>
-              </a:spcBef>
-              <a:buFontTx/>
-              <a:buNone/>
-              <a:defRPr sz="1800"/>
-            </a:lvl1pPr>
-          </a:lstStyle>
-          <a:p>
-            <a:pPr lvl="0"/>
-            <a:r>
-              <a:rPr lang="en-US"/>
-              <a:t>kpi_label_1</a:t>
-            </a:r>
-          </a:p>
-        </p:txBody>
-      </p:sp>
-      <p:sp>
-        <p:nvSpPr>
-          <p:cNvPr id="9" name="kpi_value_2">
-            <a:extLst>
-              <a:ext uri="{FF2B5EF4-FFF2-40B4-BE49-F238E27FC236}">
-                <a16:creationId xmlns:a16="http://schemas.microsoft.com/office/drawing/2014/main" id="{2DA07A7F-E81C-34AF-56D1-F036749B51B6}"/>
-              </a:ext>
-            </a:extLst>
-          </p:cNvPr>
-          <p:cNvSpPr>
-            <a:spLocks noGrp="1"/>
-          </p:cNvSpPr>
-          <p:nvPr>
-            <p:ph type="body" sz="quarter" idx="16" hasCustomPrompt="1"/>
-          </p:nvPr>
-        </p:nvSpPr>
-        <p:spPr>
-          <a:xfrm>
-            <a:off x="6282937" y="2498833"/>
-            <a:ext cx="4261878" cy="558402"/>
+            <a:off x="1198592" y="2472230"/>
+            <a:ext cx="4511111" cy="1561473"/>
           </a:xfrm>
           <a:prstGeom prst="rect">
             <a:avLst/>
@@ -18762,17 +18659,17 @@
             <a:pPr lvl="0"/>
             <a:r>
               <a:rPr lang="en-US"/>
-              <a:t>kpi_value_2</a:t>
+              <a:t>kpi_value_1</a:t>
             </a:r>
           </a:p>
         </p:txBody>
       </p:sp>
       <p:sp>
         <p:nvSpPr>
-          <p:cNvPr id="10" name="kpi_label_2">
-            <a:extLst>
-              <a:ext uri="{FF2B5EF4-FFF2-40B4-BE49-F238E27FC236}">
-                <a16:creationId xmlns:a16="http://schemas.microsoft.com/office/drawing/2014/main" id="{D75834CF-1241-D0DC-C52B-759595DC9084}"/>
+          <p:cNvPr id="8" name="kpi_label_1">
+            <a:extLst>
+              <a:ext uri="{FF2B5EF4-FFF2-40B4-BE49-F238E27FC236}">
+                <a16:creationId xmlns:a16="http://schemas.microsoft.com/office/drawing/2014/main" id="{3F1B8B43-F474-1BB9-C973-560834522CF9}"/>
               </a:ext>
             </a:extLst>
           </p:cNvPr>
@@ -18780,13 +18677,13 @@
             <a:spLocks noGrp="1"/>
           </p:cNvSpPr>
           <p:nvPr>
-            <p:ph type="body" sz="quarter" idx="17" hasCustomPrompt="1"/>
+            <p:ph type="body" sz="quarter" idx="15" hasCustomPrompt="1"/>
           </p:nvPr>
         </p:nvSpPr>
         <p:spPr>
           <a:xfrm>
-            <a:off x="6282937" y="3057236"/>
-            <a:ext cx="4261878" cy="310223"/>
+            <a:off x="1198592" y="4033703"/>
+            <a:ext cx="4511111" cy="867485"/>
           </a:xfrm>
           <a:prstGeom prst="rect">
             <a:avLst/>
@@ -18803,24 +18700,24 @@
               </a:spcBef>
               <a:buFontTx/>
               <a:buNone/>
-              <a:defRPr sz="1800"/>
+              <a:defRPr sz="2000"/>
             </a:lvl1pPr>
           </a:lstStyle>
           <a:p>
             <a:pPr lvl="0"/>
             <a:r>
               <a:rPr lang="en-US"/>
-              <a:t>kpi_label_2</a:t>
+              <a:t>kpi_label_1</a:t>
             </a:r>
           </a:p>
         </p:txBody>
       </p:sp>
       <p:sp>
         <p:nvSpPr>
-          <p:cNvPr id="11" name="kpi_value_3">
-            <a:extLst>
-              <a:ext uri="{FF2B5EF4-FFF2-40B4-BE49-F238E27FC236}">
-                <a16:creationId xmlns:a16="http://schemas.microsoft.com/office/drawing/2014/main" id="{CDD07233-E490-D9DF-5274-616EC6024AD3}"/>
+          <p:cNvPr id="9" name="kpi_value_2">
+            <a:extLst>
+              <a:ext uri="{FF2B5EF4-FFF2-40B4-BE49-F238E27FC236}">
+                <a16:creationId xmlns:a16="http://schemas.microsoft.com/office/drawing/2014/main" id="{E95B655C-95D1-A482-A775-2E1BE1019B34}"/>
               </a:ext>
             </a:extLst>
           </p:cNvPr>
@@ -18828,13 +18725,13 @@
             <a:spLocks noGrp="1"/>
           </p:cNvSpPr>
           <p:nvPr>
-            <p:ph type="body" sz="quarter" idx="18" hasCustomPrompt="1"/>
+            <p:ph type="body" sz="quarter" idx="16" hasCustomPrompt="1"/>
           </p:nvPr>
         </p:nvSpPr>
         <p:spPr>
           <a:xfrm>
-            <a:off x="6282937" y="4005958"/>
-            <a:ext cx="1831860" cy="558402"/>
+            <a:off x="6258015" y="2472230"/>
+            <a:ext cx="4311725" cy="592607"/>
           </a:xfrm>
           <a:prstGeom prst="rect">
             <a:avLst/>
@@ -18865,17 +18762,17 @@
             <a:pPr lvl="0"/>
             <a:r>
               <a:rPr lang="en-US"/>
-              <a:t>kpi_value_3</a:t>
+              <a:t>kpi_value_2</a:t>
             </a:r>
           </a:p>
         </p:txBody>
       </p:sp>
       <p:sp>
         <p:nvSpPr>
-          <p:cNvPr id="12" name="kpi_label_3">
-            <a:extLst>
-              <a:ext uri="{FF2B5EF4-FFF2-40B4-BE49-F238E27FC236}">
-                <a16:creationId xmlns:a16="http://schemas.microsoft.com/office/drawing/2014/main" id="{4934612A-E9B5-2150-EDCD-81F7EB3A4B40}"/>
+          <p:cNvPr id="10" name="kpi_label_2">
+            <a:extLst>
+              <a:ext uri="{FF2B5EF4-FFF2-40B4-BE49-F238E27FC236}">
+                <a16:creationId xmlns:a16="http://schemas.microsoft.com/office/drawing/2014/main" id="{0249525E-C952-94DA-9D77-07F7F94E97EF}"/>
               </a:ext>
             </a:extLst>
           </p:cNvPr>
@@ -18883,13 +18780,13 @@
             <a:spLocks noGrp="1"/>
           </p:cNvSpPr>
           <p:nvPr>
-            <p:ph type="body" sz="quarter" idx="19" hasCustomPrompt="1"/>
+            <p:ph type="body" sz="quarter" idx="17" hasCustomPrompt="1"/>
           </p:nvPr>
         </p:nvSpPr>
         <p:spPr>
           <a:xfrm>
-            <a:off x="6282937" y="4564361"/>
-            <a:ext cx="1831860" cy="310223"/>
+            <a:off x="6258015" y="3064836"/>
+            <a:ext cx="4311725" cy="329226"/>
           </a:xfrm>
           <a:prstGeom prst="rect">
             <a:avLst/>
@@ -18906,24 +18803,24 @@
               </a:spcBef>
               <a:buFontTx/>
               <a:buNone/>
-              <a:defRPr sz="1800"/>
+              <a:defRPr sz="2000"/>
             </a:lvl1pPr>
           </a:lstStyle>
           <a:p>
             <a:pPr lvl="0"/>
             <a:r>
               <a:rPr lang="en-US"/>
-              <a:t>kpi_label_3</a:t>
+              <a:t>kpi_label_2</a:t>
             </a:r>
           </a:p>
         </p:txBody>
       </p:sp>
       <p:sp>
         <p:nvSpPr>
-          <p:cNvPr id="13" name="kpi_value_4">
-            <a:extLst>
-              <a:ext uri="{FF2B5EF4-FFF2-40B4-BE49-F238E27FC236}">
-                <a16:creationId xmlns:a16="http://schemas.microsoft.com/office/drawing/2014/main" id="{B6093357-722A-DBA9-3A38-D6F309E2934C}"/>
+          <p:cNvPr id="11" name="kpi_value_3">
+            <a:extLst>
+              <a:ext uri="{FF2B5EF4-FFF2-40B4-BE49-F238E27FC236}">
+                <a16:creationId xmlns:a16="http://schemas.microsoft.com/office/drawing/2014/main" id="{83490007-D86F-20DF-51EF-4BF415A8BCD6}"/>
               </a:ext>
             </a:extLst>
           </p:cNvPr>
@@ -18931,13 +18828,13 @@
             <a:spLocks noGrp="1"/>
           </p:cNvSpPr>
           <p:nvPr>
-            <p:ph type="body" sz="quarter" idx="20" hasCustomPrompt="1"/>
+            <p:ph type="body" sz="quarter" idx="18" hasCustomPrompt="1"/>
           </p:nvPr>
         </p:nvSpPr>
         <p:spPr>
           <a:xfrm>
-            <a:off x="8712955" y="4005958"/>
-            <a:ext cx="1831860" cy="558402"/>
+            <a:off x="6258014" y="3979355"/>
+            <a:ext cx="1881706" cy="592607"/>
           </a:xfrm>
           <a:prstGeom prst="rect">
             <a:avLst/>
@@ -18968,17 +18865,17 @@
             <a:pPr lvl="0"/>
             <a:r>
               <a:rPr lang="en-US"/>
-              <a:t>kpi_value_4</a:t>
+              <a:t>kpi_value_3</a:t>
             </a:r>
           </a:p>
         </p:txBody>
       </p:sp>
       <p:sp>
         <p:nvSpPr>
-          <p:cNvPr id="14" name="kpi_label_4">
-            <a:extLst>
-              <a:ext uri="{FF2B5EF4-FFF2-40B4-BE49-F238E27FC236}">
-                <a16:creationId xmlns:a16="http://schemas.microsoft.com/office/drawing/2014/main" id="{7342205D-179C-921F-101F-458B7B0ADD19}"/>
+          <p:cNvPr id="12" name="kpi_label_3">
+            <a:extLst>
+              <a:ext uri="{FF2B5EF4-FFF2-40B4-BE49-F238E27FC236}">
+                <a16:creationId xmlns:a16="http://schemas.microsoft.com/office/drawing/2014/main" id="{66ACADA1-7BBE-9622-B210-EBDCCCEEF357}"/>
               </a:ext>
             </a:extLst>
           </p:cNvPr>
@@ -18986,13 +18883,13 @@
             <a:spLocks noGrp="1"/>
           </p:cNvSpPr>
           <p:nvPr>
-            <p:ph type="body" sz="quarter" idx="21" hasCustomPrompt="1"/>
+            <p:ph type="body" sz="quarter" idx="19" hasCustomPrompt="1"/>
           </p:nvPr>
         </p:nvSpPr>
         <p:spPr>
           <a:xfrm>
-            <a:off x="8712955" y="4564361"/>
-            <a:ext cx="1831860" cy="310223"/>
+            <a:off x="6258014" y="4571961"/>
+            <a:ext cx="1881706" cy="329226"/>
           </a:xfrm>
           <a:prstGeom prst="rect">
             <a:avLst/>
@@ -19009,7 +18906,110 @@
               </a:spcBef>
               <a:buFontTx/>
               <a:buNone/>
-              <a:defRPr sz="1800"/>
+              <a:defRPr sz="2000"/>
+            </a:lvl1pPr>
+          </a:lstStyle>
+          <a:p>
+            <a:pPr lvl="0"/>
+            <a:r>
+              <a:rPr lang="en-US"/>
+              <a:t>kpi_label_3</a:t>
+            </a:r>
+          </a:p>
+        </p:txBody>
+      </p:sp>
+      <p:sp>
+        <p:nvSpPr>
+          <p:cNvPr id="13" name="kpi_value_4">
+            <a:extLst>
+              <a:ext uri="{FF2B5EF4-FFF2-40B4-BE49-F238E27FC236}">
+                <a16:creationId xmlns:a16="http://schemas.microsoft.com/office/drawing/2014/main" id="{07DB9957-F915-1102-E007-66DE9D9AD835}"/>
+              </a:ext>
+            </a:extLst>
+          </p:cNvPr>
+          <p:cNvSpPr>
+            <a:spLocks noGrp="1"/>
+          </p:cNvSpPr>
+          <p:nvPr>
+            <p:ph type="body" sz="quarter" idx="20" hasCustomPrompt="1"/>
+          </p:nvPr>
+        </p:nvSpPr>
+        <p:spPr>
+          <a:xfrm>
+            <a:off x="8688032" y="3979355"/>
+            <a:ext cx="1881706" cy="592607"/>
+          </a:xfrm>
+          <a:prstGeom prst="rect">
+            <a:avLst/>
+          </a:prstGeom>
+        </p:spPr>
+        <p:txBody>
+          <a:bodyPr wrap="square" anchor="t">
+            <a:noAutofit/>
+          </a:bodyPr>
+          <a:lstStyle>
+            <a:lvl1pPr marL="0" indent="0">
+              <a:spcBef>
+                <a:spcPts val="0"/>
+              </a:spcBef>
+              <a:buFontTx/>
+              <a:buNone/>
+              <a:defRPr sz="6000" b="1">
+                <a:solidFill>
+                  <a:schemeClr val="accent1">
+                    <a:lumMod val="70000"/>
+                  </a:schemeClr>
+                </a:solidFill>
+                <a:latin typeface="+mj-lt"/>
+              </a:defRPr>
+            </a:lvl1pPr>
+          </a:lstStyle>
+          <a:p>
+            <a:pPr lvl="0"/>
+            <a:r>
+              <a:rPr lang="en-US"/>
+              <a:t>kpi_value_4</a:t>
+            </a:r>
+          </a:p>
+        </p:txBody>
+      </p:sp>
+      <p:sp>
+        <p:nvSpPr>
+          <p:cNvPr id="14" name="kpi_label_4">
+            <a:extLst>
+              <a:ext uri="{FF2B5EF4-FFF2-40B4-BE49-F238E27FC236}">
+                <a16:creationId xmlns:a16="http://schemas.microsoft.com/office/drawing/2014/main" id="{87616324-5201-D861-68D1-3DF2BAE27B66}"/>
+              </a:ext>
+            </a:extLst>
+          </p:cNvPr>
+          <p:cNvSpPr>
+            <a:spLocks noGrp="1"/>
+          </p:cNvSpPr>
+          <p:nvPr>
+            <p:ph type="body" sz="quarter" idx="21" hasCustomPrompt="1"/>
+          </p:nvPr>
+        </p:nvSpPr>
+        <p:spPr>
+          <a:xfrm>
+            <a:off x="8688032" y="4571961"/>
+            <a:ext cx="1881706" cy="329226"/>
+          </a:xfrm>
+          <a:prstGeom prst="rect">
+            <a:avLst/>
+          </a:prstGeom>
+        </p:spPr>
+        <p:txBody>
+          <a:bodyPr wrap="square" anchor="t">
+            <a:noAutofit/>
+          </a:bodyPr>
+          <a:lstStyle>
+            <a:lvl1pPr marL="0" indent="0">
+              <a:spcBef>
+                <a:spcPts val="0"/>
+              </a:spcBef>
+              <a:buFontTx/>
+              <a:buNone/>
+              <a:defRPr sz="2000"/>
             </a:lvl1pPr>
           </a:lstStyle>
           <a:p>
@@ -19026,7 +19026,7 @@
           <p:cNvPr id="15" name="source">
             <a:extLst>
               <a:ext uri="{FF2B5EF4-FFF2-40B4-BE49-F238E27FC236}">
-                <a16:creationId xmlns:a16="http://schemas.microsoft.com/office/drawing/2014/main" id="{2F043662-2B9A-D11C-C3D7-872EBE75D488}"/>
+                <a16:creationId xmlns:a16="http://schemas.microsoft.com/office/drawing/2014/main" id="{7DF2193F-69E4-7FA5-7F56-813A0A832682}"/>
               </a:ext>
             </a:extLst>
           </p:cNvPr>
@@ -19083,7 +19083,7 @@
     </p:spTree>
     <p:extLst>
       <p:ext uri="{BB962C8B-B14F-4D97-AF65-F5344CB8AC3E}">
-        <p14:creationId xmlns:p14="http://schemas.microsoft.com/office/powerpoint/2010/main" val="3417708963"/>
+        <p14:creationId xmlns:p14="http://schemas.microsoft.com/office/powerpoint/2010/main" val="3248147920"/>
       </p:ext>
     </p:extLst>
   </p:cSld>
@@ -19152,7 +19152,7 @@
           <a:bodyPr/>
           <a:lstStyle/>
           <a:p>
-            <a:fld id="{1146AB1F-C91F-4F0F-9868-5252CDCD6051}" type="datetimeFigureOut">
+            <a:fld id="{A9C3E1C2-504C-4CFF-A37A-AE4693906186}" type="datetimeFigureOut">
               <a:rPr lang="en-US" smtClean="0"/>
               <a:t>10/3/2026</a:t>
             </a:fld>
@@ -19194,7 +19194,7 @@
           <a:bodyPr/>
           <a:lstStyle/>
           <a:p>
-            <a:fld id="{FE1B144C-6E1C-47C6-9306-1DC2A92756EB}" type="slidenum">
+            <a:fld id="{0CAC26E6-90F8-49CB-BE00-E3E555820112}" type="slidenum">
               <a:rPr lang="en-US" smtClean="0"/>
               <a:t>‹#›</a:t>
             </a:fld>
@@ -19207,7 +19207,7 @@
           <p:cNvPr id="6" name="body">
             <a:extLst>
               <a:ext uri="{FF2B5EF4-FFF2-40B4-BE49-F238E27FC236}">
-                <a16:creationId xmlns:a16="http://schemas.microsoft.com/office/drawing/2014/main" id="{5A7AADCF-4CE8-59CF-884A-61DC6D0FAC72}"/>
+                <a16:creationId xmlns:a16="http://schemas.microsoft.com/office/drawing/2014/main" id="{B23F36F3-31DC-8708-45CA-579FC710A2F4}"/>
               </a:ext>
             </a:extLst>
           </p:cNvPr>
@@ -19247,7 +19247,7 @@
           <p:cNvPr id="7" name="kpi_value_1">
             <a:extLst>
               <a:ext uri="{FF2B5EF4-FFF2-40B4-BE49-F238E27FC236}">
-                <a16:creationId xmlns:a16="http://schemas.microsoft.com/office/drawing/2014/main" id="{5F4E7A1E-1F36-68D4-890E-70B8FE9DF36D}"/>
+                <a16:creationId xmlns:a16="http://schemas.microsoft.com/office/drawing/2014/main" id="{C98CFC3C-B54F-34C7-184D-AB52488C168A}"/>
               </a:ext>
             </a:extLst>
           </p:cNvPr>
@@ -19260,8 +19260,8 @@
         </p:nvSpPr>
         <p:spPr>
           <a:xfrm>
-            <a:off x="1223515" y="2498833"/>
-            <a:ext cx="4361571" cy="1155770"/>
+            <a:off x="1198591" y="2472229"/>
+            <a:ext cx="4411418" cy="1181656"/>
           </a:xfrm>
           <a:prstGeom prst="rect">
             <a:avLst/>
@@ -19302,7 +19302,7 @@
           <p:cNvPr id="8" name="kpi_label_1">
             <a:extLst>
               <a:ext uri="{FF2B5EF4-FFF2-40B4-BE49-F238E27FC236}">
-                <a16:creationId xmlns:a16="http://schemas.microsoft.com/office/drawing/2014/main" id="{24F3E760-ADA6-D7F0-AB95-41CAE9C4AE4E}"/>
+                <a16:creationId xmlns:a16="http://schemas.microsoft.com/office/drawing/2014/main" id="{4230CF00-4FB5-97C7-4B30-05CB35C40BBC}"/>
               </a:ext>
             </a:extLst>
           </p:cNvPr>
@@ -19315,8 +19315,8 @@
         </p:nvSpPr>
         <p:spPr>
           <a:xfrm>
-            <a:off x="1223515" y="3654605"/>
-            <a:ext cx="4361571" cy="642095"/>
+            <a:off x="1198591" y="3653886"/>
+            <a:ext cx="4411418" cy="656475"/>
           </a:xfrm>
           <a:prstGeom prst="rect">
             <a:avLst/>
@@ -19333,7 +19333,7 @@
               </a:spcBef>
               <a:buFontTx/>
               <a:buNone/>
-              <a:defRPr sz="1800"/>
+              <a:defRPr sz="2000"/>
             </a:lvl1pPr>
           </a:lstStyle>
           <a:p>
@@ -19350,7 +19350,7 @@
           <p:cNvPr id="9" name="kpi_value_2">
             <a:extLst>
               <a:ext uri="{FF2B5EF4-FFF2-40B4-BE49-F238E27FC236}">
-                <a16:creationId xmlns:a16="http://schemas.microsoft.com/office/drawing/2014/main" id="{61FE3865-7371-E88D-0DA6-408157266E48}"/>
+                <a16:creationId xmlns:a16="http://schemas.microsoft.com/office/drawing/2014/main" id="{AFF03748-5037-2878-169B-36FD967B231B}"/>
               </a:ext>
             </a:extLst>
           </p:cNvPr>
@@ -19363,8 +19363,8 @@
         </p:nvSpPr>
         <p:spPr>
           <a:xfrm>
-            <a:off x="6183245" y="2498833"/>
-            <a:ext cx="4361571" cy="1155770"/>
+            <a:off x="6158321" y="2472229"/>
+            <a:ext cx="4411418" cy="1181656"/>
           </a:xfrm>
           <a:prstGeom prst="rect">
             <a:avLst/>
@@ -19405,7 +19405,7 @@
           <p:cNvPr id="10" name="kpi_label_2">
             <a:extLst>
               <a:ext uri="{FF2B5EF4-FFF2-40B4-BE49-F238E27FC236}">
-                <a16:creationId xmlns:a16="http://schemas.microsoft.com/office/drawing/2014/main" id="{D5E88045-140D-F4BA-5843-CC4AC9B1AF3B}"/>
+                <a16:creationId xmlns:a16="http://schemas.microsoft.com/office/drawing/2014/main" id="{FED860C1-8AD5-2447-6BB0-FE3D1ECE4D2A}"/>
               </a:ext>
             </a:extLst>
           </p:cNvPr>
@@ -19418,8 +19418,8 @@
         </p:nvSpPr>
         <p:spPr>
           <a:xfrm>
-            <a:off x="6183245" y="3654605"/>
-            <a:ext cx="4361571" cy="642095"/>
+            <a:off x="6158321" y="3653886"/>
+            <a:ext cx="4411418" cy="656475"/>
           </a:xfrm>
           <a:prstGeom prst="rect">
             <a:avLst/>
@@ -19436,7 +19436,7 @@
               </a:spcBef>
               <a:buFontTx/>
               <a:buNone/>
-              <a:defRPr sz="1800"/>
+              <a:defRPr sz="2000"/>
             </a:lvl1pPr>
           </a:lstStyle>
           <a:p>
@@ -19453,7 +19453,7 @@
           <p:cNvPr id="11" name="source">
             <a:extLst>
               <a:ext uri="{FF2B5EF4-FFF2-40B4-BE49-F238E27FC236}">
-                <a16:creationId xmlns:a16="http://schemas.microsoft.com/office/drawing/2014/main" id="{E3988FAF-E6B0-51C4-57D1-BE6F654C4191}"/>
+                <a16:creationId xmlns:a16="http://schemas.microsoft.com/office/drawing/2014/main" id="{6F15D271-AFEC-CF77-97C8-4E42B2F3C858}"/>
               </a:ext>
             </a:extLst>
           </p:cNvPr>
@@ -19510,7 +19510,7 @@
     </p:spTree>
     <p:extLst>
       <p:ext uri="{BB962C8B-B14F-4D97-AF65-F5344CB8AC3E}">
-        <p14:creationId xmlns:p14="http://schemas.microsoft.com/office/powerpoint/2010/main" val="2456781395"/>
+        <p14:creationId xmlns:p14="http://schemas.microsoft.com/office/powerpoint/2010/main" val="513896079"/>
       </p:ext>
     </p:extLst>
   </p:cSld>
@@ -19579,7 +19579,7 @@
           <a:bodyPr/>
           <a:lstStyle/>
           <a:p>
-            <a:fld id="{1146AB1F-C91F-4F0F-9868-5252CDCD6051}" type="datetimeFigureOut">
+            <a:fld id="{A9C3E1C2-504C-4CFF-A37A-AE4693906186}" type="datetimeFigureOut">
               <a:rPr lang="en-US" smtClean="0"/>
               <a:t>10/3/2026</a:t>
             </a:fld>
@@ -19621,7 +19621,7 @@
           <a:bodyPr/>
           <a:lstStyle/>
           <a:p>
-            <a:fld id="{FE1B144C-6E1C-47C6-9306-1DC2A92756EB}" type="slidenum">
+            <a:fld id="{0CAC26E6-90F8-49CB-BE00-E3E555820112}" type="slidenum">
               <a:rPr lang="en-US" smtClean="0"/>
               <a:t>‹#›</a:t>
             </a:fld>
@@ -19634,7 +19634,7 @@
           <p:cNvPr id="6" name="body">
             <a:extLst>
               <a:ext uri="{FF2B5EF4-FFF2-40B4-BE49-F238E27FC236}">
-                <a16:creationId xmlns:a16="http://schemas.microsoft.com/office/drawing/2014/main" id="{6B50B8D0-8D9D-C7B5-AADE-0C54B4F94B42}"/>
+                <a16:creationId xmlns:a16="http://schemas.microsoft.com/office/drawing/2014/main" id="{F16B13F4-B0ED-5741-157C-771A51EC71BA}"/>
               </a:ext>
             </a:extLst>
           </p:cNvPr>
@@ -19674,7 +19674,7 @@
           <p:cNvPr id="7" name="kpi_value_1">
             <a:extLst>
               <a:ext uri="{FF2B5EF4-FFF2-40B4-BE49-F238E27FC236}">
-                <a16:creationId xmlns:a16="http://schemas.microsoft.com/office/drawing/2014/main" id="{9855A977-FA12-1A0F-47FF-A62FC6352B1A}"/>
+                <a16:creationId xmlns:a16="http://schemas.microsoft.com/office/drawing/2014/main" id="{B6CB3957-1A62-1C62-2417-5DA6C3FD0811}"/>
               </a:ext>
             </a:extLst>
           </p:cNvPr>
@@ -19705,7 +19705,7 @@
               </a:spcBef>
               <a:buFontTx/>
               <a:buNone/>
-              <a:defRPr sz="4000" b="1">
+              <a:defRPr sz="6000" b="1">
                 <a:solidFill>
                   <a:schemeClr val="accent1">
                     <a:lumMod val="70000"/>
@@ -19729,7 +19729,7 @@
           <p:cNvPr id="8" name="kpi_label_1">
             <a:extLst>
               <a:ext uri="{FF2B5EF4-FFF2-40B4-BE49-F238E27FC236}">
-                <a16:creationId xmlns:a16="http://schemas.microsoft.com/office/drawing/2014/main" id="{57B3A54C-C828-1720-E0BF-D45D18D7757A}"/>
+                <a16:creationId xmlns:a16="http://schemas.microsoft.com/office/drawing/2014/main" id="{859A4579-DBE1-588F-6597-F3DAD58AB977}"/>
               </a:ext>
             </a:extLst>
           </p:cNvPr>
@@ -19760,7 +19760,7 @@
               </a:spcBef>
               <a:buFontTx/>
               <a:buNone/>
-              <a:defRPr sz="1800"/>
+              <a:defRPr sz="2000"/>
             </a:lvl1pPr>
           </a:lstStyle>
           <a:p>
@@ -19777,7 +19777,7 @@
           <p:cNvPr id="9" name="kpi_value_2">
             <a:extLst>
               <a:ext uri="{FF2B5EF4-FFF2-40B4-BE49-F238E27FC236}">
-                <a16:creationId xmlns:a16="http://schemas.microsoft.com/office/drawing/2014/main" id="{347152DB-6D53-389F-B7AE-A7500625B007}"/>
+                <a16:creationId xmlns:a16="http://schemas.microsoft.com/office/drawing/2014/main" id="{C99FE52A-3255-9221-6843-1CB50FBCEBF0}"/>
               </a:ext>
             </a:extLst>
           </p:cNvPr>
@@ -19808,7 +19808,7 @@
               </a:spcBef>
               <a:buFontTx/>
               <a:buNone/>
-              <a:defRPr sz="4000" b="1">
+              <a:defRPr sz="6000" b="1">
                 <a:solidFill>
                   <a:schemeClr val="accent1">
                     <a:lumMod val="70000"/>
@@ -19832,7 +19832,7 @@
           <p:cNvPr id="10" name="kpi_label_2">
             <a:extLst>
               <a:ext uri="{FF2B5EF4-FFF2-40B4-BE49-F238E27FC236}">
-                <a16:creationId xmlns:a16="http://schemas.microsoft.com/office/drawing/2014/main" id="{49419E22-1DEC-4F29-EC68-772BA8F774F7}"/>
+                <a16:creationId xmlns:a16="http://schemas.microsoft.com/office/drawing/2014/main" id="{1F5D6F9E-6D8B-7113-0F92-30520C14D80E}"/>
               </a:ext>
             </a:extLst>
           </p:cNvPr>
@@ -19863,7 +19863,7 @@
               </a:spcBef>
               <a:buFontTx/>
               <a:buNone/>
-              <a:defRPr sz="1800"/>
+              <a:defRPr sz="2000"/>
             </a:lvl1pPr>
           </a:lstStyle>
           <a:p>
@@ -19880,7 +19880,7 @@
           <p:cNvPr id="11" name="kpi_value_3">
             <a:extLst>
               <a:ext uri="{FF2B5EF4-FFF2-40B4-BE49-F238E27FC236}">
-                <a16:creationId xmlns:a16="http://schemas.microsoft.com/office/drawing/2014/main" id="{A3AF6800-AD0D-61D9-E824-D91B6F9071F7}"/>
+                <a16:creationId xmlns:a16="http://schemas.microsoft.com/office/drawing/2014/main" id="{0992B9C5-CDD3-373E-3278-4AAF90D1E9E2}"/>
               </a:ext>
             </a:extLst>
           </p:cNvPr>
@@ -19911,7 +19911,7 @@
               </a:spcBef>
               <a:buFontTx/>
               <a:buNone/>
-              <a:defRPr sz="4000" b="1">
+              <a:defRPr sz="6000" b="1">
                 <a:solidFill>
                   <a:schemeClr val="accent1">
                     <a:lumMod val="70000"/>
@@ -19935,7 +19935,7 @@
           <p:cNvPr id="12" name="kpi_label_3">
             <a:extLst>
               <a:ext uri="{FF2B5EF4-FFF2-40B4-BE49-F238E27FC236}">
-                <a16:creationId xmlns:a16="http://schemas.microsoft.com/office/drawing/2014/main" id="{C7117FAC-F36A-D8A1-A0BF-83FB84A1139B}"/>
+                <a16:creationId xmlns:a16="http://schemas.microsoft.com/office/drawing/2014/main" id="{576C07EB-7C14-8441-FE35-40E635445AFC}"/>
               </a:ext>
             </a:extLst>
           </p:cNvPr>
@@ -19966,7 +19966,7 @@
               </a:spcBef>
               <a:buFontTx/>
               <a:buNone/>
-              <a:defRPr sz="1800"/>
+              <a:defRPr sz="2000"/>
             </a:lvl1pPr>
           </a:lstStyle>
           <a:p>
@@ -19983,7 +19983,7 @@
           <p:cNvPr id="13" name="kpi_value_4">
             <a:extLst>
               <a:ext uri="{FF2B5EF4-FFF2-40B4-BE49-F238E27FC236}">
-                <a16:creationId xmlns:a16="http://schemas.microsoft.com/office/drawing/2014/main" id="{97F70419-CCD0-DAD9-B279-6A4FD1CC23E4}"/>
+                <a16:creationId xmlns:a16="http://schemas.microsoft.com/office/drawing/2014/main" id="{46B7A50E-CCE8-CCFC-0800-EF04DCB0193A}"/>
               </a:ext>
             </a:extLst>
           </p:cNvPr>
@@ -20014,7 +20014,7 @@
               </a:spcBef>
               <a:buFontTx/>
               <a:buNone/>
-              <a:defRPr sz="4000" b="1">
+              <a:defRPr sz="6000" b="1">
                 <a:solidFill>
                   <a:schemeClr val="accent1">
                     <a:lumMod val="70000"/>
@@ -20038,7 +20038,7 @@
           <p:cNvPr id="14" name="kpi_label_4">
             <a:extLst>
               <a:ext uri="{FF2B5EF4-FFF2-40B4-BE49-F238E27FC236}">
-                <a16:creationId xmlns:a16="http://schemas.microsoft.com/office/drawing/2014/main" id="{58E51295-59B2-2AAB-1E85-5FDDF76FF98B}"/>
+                <a16:creationId xmlns:a16="http://schemas.microsoft.com/office/drawing/2014/main" id="{72CF6E62-DE40-C94E-55F6-399A07EFAC40}"/>
               </a:ext>
             </a:extLst>
           </p:cNvPr>
@@ -20069,7 +20069,7 @@
               </a:spcBef>
               <a:buFontTx/>
               <a:buNone/>
-              <a:defRPr sz="1800"/>
+              <a:defRPr sz="2000"/>
             </a:lvl1pPr>
           </a:lstStyle>
           <a:p>
@@ -20086,7 +20086,7 @@
           <p:cNvPr id="15" name="source">
             <a:extLst>
               <a:ext uri="{FF2B5EF4-FFF2-40B4-BE49-F238E27FC236}">
-                <a16:creationId xmlns:a16="http://schemas.microsoft.com/office/drawing/2014/main" id="{B39FB739-8FA9-D13A-B2CA-8E32B8C19340}"/>
+                <a16:creationId xmlns:a16="http://schemas.microsoft.com/office/drawing/2014/main" id="{403E1FD2-3F97-F1ED-0E1A-951E6698B1BA}"/>
               </a:ext>
             </a:extLst>
           </p:cNvPr>
@@ -20143,7 +20143,7 @@
     </p:spTree>
     <p:extLst>
       <p:ext uri="{BB962C8B-B14F-4D97-AF65-F5344CB8AC3E}">
-        <p14:creationId xmlns:p14="http://schemas.microsoft.com/office/powerpoint/2010/main" val="821620305"/>
+        <p14:creationId xmlns:p14="http://schemas.microsoft.com/office/powerpoint/2010/main" val="1563599221"/>
       </p:ext>
     </p:extLst>
   </p:cSld>
@@ -20212,7 +20212,7 @@
           <a:bodyPr/>
           <a:lstStyle/>
           <a:p>
-            <a:fld id="{1146AB1F-C91F-4F0F-9868-5252CDCD6051}" type="datetimeFigureOut">
+            <a:fld id="{A9C3E1C2-504C-4CFF-A37A-AE4693906186}" type="datetimeFigureOut">
               <a:rPr lang="en-US" smtClean="0"/>
               <a:t>10/3/2026</a:t>
             </a:fld>
@@ -20254,7 +20254,7 @@
           <a:bodyPr/>
           <a:lstStyle/>
           <a:p>
-            <a:fld id="{FE1B144C-6E1C-47C6-9306-1DC2A92756EB}" type="slidenum">
+            <a:fld id="{0CAC26E6-90F8-49CB-BE00-E3E555820112}" type="slidenum">
               <a:rPr lang="en-US" smtClean="0"/>
               <a:t>‹#›</a:t>
             </a:fld>
@@ -20267,7 +20267,7 @@
           <p:cNvPr id="6" name="item_1_title">
             <a:extLst>
               <a:ext uri="{FF2B5EF4-FFF2-40B4-BE49-F238E27FC236}">
-                <a16:creationId xmlns:a16="http://schemas.microsoft.com/office/drawing/2014/main" id="{91D10DAA-6E1D-C2CC-DCB2-EF6A0475A7E8}"/>
+                <a16:creationId xmlns:a16="http://schemas.microsoft.com/office/drawing/2014/main" id="{F4486514-F233-F5FC-1094-01D2B852FE5F}"/>
               </a:ext>
             </a:extLst>
           </p:cNvPr>
@@ -20295,7 +20295,7 @@
               </a:spcBef>
               <a:buFontTx/>
               <a:buNone/>
-              <a:defRPr sz="2200" b="1">
+              <a:defRPr sz="2000" b="1">
                 <a:solidFill>
                   <a:schemeClr val="accent1">
                     <a:lumMod val="70000"/>
@@ -20319,7 +20319,7 @@
           <p:cNvPr id="7" name="item_1">
             <a:extLst>
               <a:ext uri="{FF2B5EF4-FFF2-40B4-BE49-F238E27FC236}">
-                <a16:creationId xmlns:a16="http://schemas.microsoft.com/office/drawing/2014/main" id="{CA6261EF-2AC3-A7D2-CD0E-B0E7E85BCB17}"/>
+                <a16:creationId xmlns:a16="http://schemas.microsoft.com/office/drawing/2014/main" id="{2BC688F7-FAEF-E01B-2876-17481DE85EA7}"/>
               </a:ext>
             </a:extLst>
           </p:cNvPr>
@@ -20367,7 +20367,7 @@
           <p:cNvPr id="8" name="item_2_title">
             <a:extLst>
               <a:ext uri="{FF2B5EF4-FFF2-40B4-BE49-F238E27FC236}">
-                <a16:creationId xmlns:a16="http://schemas.microsoft.com/office/drawing/2014/main" id="{1FBFFCAB-6991-6C0F-2A7F-A90FE8D5BDAB}"/>
+                <a16:creationId xmlns:a16="http://schemas.microsoft.com/office/drawing/2014/main" id="{68A41556-2880-32A6-D19C-AAAFA8D4C421}"/>
               </a:ext>
             </a:extLst>
           </p:cNvPr>
@@ -20398,7 +20398,7 @@
               </a:spcBef>
               <a:buFontTx/>
               <a:buNone/>
-              <a:defRPr sz="2200" b="1">
+              <a:defRPr sz="2000" b="1">
                 <a:solidFill>
                   <a:schemeClr val="accent1">
                     <a:lumMod val="70000"/>
@@ -20422,7 +20422,7 @@
           <p:cNvPr id="9" name="item_2">
             <a:extLst>
               <a:ext uri="{FF2B5EF4-FFF2-40B4-BE49-F238E27FC236}">
-                <a16:creationId xmlns:a16="http://schemas.microsoft.com/office/drawing/2014/main" id="{0346DA80-7102-7D47-4CBD-943D94F0CE50}"/>
+                <a16:creationId xmlns:a16="http://schemas.microsoft.com/office/drawing/2014/main" id="{FB9C4928-689F-28DF-C98A-E1C46A81E44A}"/>
               </a:ext>
             </a:extLst>
           </p:cNvPr>
@@ -20470,7 +20470,7 @@
           <p:cNvPr id="10" name="item_3_title">
             <a:extLst>
               <a:ext uri="{FF2B5EF4-FFF2-40B4-BE49-F238E27FC236}">
-                <a16:creationId xmlns:a16="http://schemas.microsoft.com/office/drawing/2014/main" id="{9743EB22-1985-4D4D-5AF7-D38ACFEC6EFB}"/>
+                <a16:creationId xmlns:a16="http://schemas.microsoft.com/office/drawing/2014/main" id="{6680DAFD-EB9D-6CE9-DD9A-A358F692B4CF}"/>
               </a:ext>
             </a:extLst>
           </p:cNvPr>
@@ -20501,7 +20501,7 @@
               </a:spcBef>
               <a:buFontTx/>
               <a:buNone/>
-              <a:defRPr sz="2200" b="1">
+              <a:defRPr sz="2000" b="1">
                 <a:solidFill>
                   <a:schemeClr val="accent1">
                     <a:lumMod val="70000"/>
@@ -20525,7 +20525,7 @@
           <p:cNvPr id="11" name="item_3">
             <a:extLst>
               <a:ext uri="{FF2B5EF4-FFF2-40B4-BE49-F238E27FC236}">
-                <a16:creationId xmlns:a16="http://schemas.microsoft.com/office/drawing/2014/main" id="{2F7C6CA6-7C14-30C6-4592-FB3E9971519C}"/>
+                <a16:creationId xmlns:a16="http://schemas.microsoft.com/office/drawing/2014/main" id="{D08B31E6-D214-4D2B-1F64-5BD059821B6C}"/>
               </a:ext>
             </a:extLst>
           </p:cNvPr>
@@ -20573,7 +20573,7 @@
           <p:cNvPr id="12" name="item_4_title">
             <a:extLst>
               <a:ext uri="{FF2B5EF4-FFF2-40B4-BE49-F238E27FC236}">
-                <a16:creationId xmlns:a16="http://schemas.microsoft.com/office/drawing/2014/main" id="{74407F26-6F94-C71A-497D-6CAF73AFCB38}"/>
+                <a16:creationId xmlns:a16="http://schemas.microsoft.com/office/drawing/2014/main" id="{94418AFA-AF17-DF6C-777D-FAE5F56DAE2C}"/>
               </a:ext>
             </a:extLst>
           </p:cNvPr>
@@ -20604,7 +20604,7 @@
               </a:spcBef>
               <a:buFontTx/>
               <a:buNone/>
-              <a:defRPr sz="2200" b="1">
+              <a:defRPr sz="2000" b="1">
                 <a:solidFill>
                   <a:schemeClr val="accent1">
                     <a:lumMod val="70000"/>
@@ -20628,7 +20628,7 @@
           <p:cNvPr id="13" name="item_4">
             <a:extLst>
               <a:ext uri="{FF2B5EF4-FFF2-40B4-BE49-F238E27FC236}">
-                <a16:creationId xmlns:a16="http://schemas.microsoft.com/office/drawing/2014/main" id="{DF31D4C0-9503-CF8D-E9BE-BA8F1144E213}"/>
+                <a16:creationId xmlns:a16="http://schemas.microsoft.com/office/drawing/2014/main" id="{95FA8DA2-36F3-C643-3D04-0C2248E81655}"/>
               </a:ext>
             </a:extLst>
           </p:cNvPr>
@@ -20676,7 +20676,7 @@
           <p:cNvPr id="14" name="source">
             <a:extLst>
               <a:ext uri="{FF2B5EF4-FFF2-40B4-BE49-F238E27FC236}">
-                <a16:creationId xmlns:a16="http://schemas.microsoft.com/office/drawing/2014/main" id="{109BA5BA-EC45-E874-8F91-5C3DF8D1E91A}"/>
+                <a16:creationId xmlns:a16="http://schemas.microsoft.com/office/drawing/2014/main" id="{99536C85-3E62-EE17-E1FC-4BBCA4478951}"/>
               </a:ext>
             </a:extLst>
           </p:cNvPr>
@@ -20733,7 +20733,7 @@
     </p:spTree>
     <p:extLst>
       <p:ext uri="{BB962C8B-B14F-4D97-AF65-F5344CB8AC3E}">
-        <p14:creationId xmlns:p14="http://schemas.microsoft.com/office/powerpoint/2010/main" val="3458355805"/>
+        <p14:creationId xmlns:p14="http://schemas.microsoft.com/office/powerpoint/2010/main" val="1862410337"/>
       </p:ext>
     </p:extLst>
   </p:cSld>
@@ -20802,7 +20802,7 @@
           <a:bodyPr/>
           <a:lstStyle/>
           <a:p>
-            <a:fld id="{1146AB1F-C91F-4F0F-9868-5252CDCD6051}" type="datetimeFigureOut">
+            <a:fld id="{A9C3E1C2-504C-4CFF-A37A-AE4693906186}" type="datetimeFigureOut">
               <a:rPr lang="en-US" smtClean="0"/>
               <a:t>10/3/2026</a:t>
             </a:fld>
@@ -20844,7 +20844,7 @@
           <a:bodyPr/>
           <a:lstStyle/>
           <a:p>
-            <a:fld id="{FE1B144C-6E1C-47C6-9306-1DC2A92756EB}" type="slidenum">
+            <a:fld id="{0CAC26E6-90F8-49CB-BE00-E3E555820112}" type="slidenum">
               <a:rPr lang="en-US" smtClean="0"/>
               <a:t>‹#›</a:t>
             </a:fld>
@@ -20857,7 +20857,7 @@
           <p:cNvPr id="6" name="marker_1">
             <a:extLst>
               <a:ext uri="{FF2B5EF4-FFF2-40B4-BE49-F238E27FC236}">
-                <a16:creationId xmlns:a16="http://schemas.microsoft.com/office/drawing/2014/main" id="{00F5F4F3-82D2-955C-0438-3964124CA957}"/>
+                <a16:creationId xmlns:a16="http://schemas.microsoft.com/office/drawing/2014/main" id="{AAA3E23F-5C09-D07D-32D1-7FF242495CED}"/>
               </a:ext>
             </a:extLst>
           </p:cNvPr>
@@ -20870,7 +20870,7 @@
         </p:nvSpPr>
         <p:spPr>
           <a:xfrm>
-            <a:off x="1223514" y="2498834"/>
+            <a:off x="1198591" y="2472230"/>
             <a:ext cx="548312" cy="585291"/>
           </a:xfrm>
           <a:prstGeom prst="ellipse">
@@ -20893,7 +20893,7 @@
               </a:spcBef>
               <a:buFontTx/>
               <a:buNone/>
-              <a:defRPr sz="2400" b="1">
+              <a:defRPr sz="2000" b="1">
                 <a:solidFill>
                   <a:schemeClr val="bg1"/>
                 </a:solidFill>
@@ -20915,7 +20915,7 @@
           <p:cNvPr id="7" name="item_1_title">
             <a:extLst>
               <a:ext uri="{FF2B5EF4-FFF2-40B4-BE49-F238E27FC236}">
-                <a16:creationId xmlns:a16="http://schemas.microsoft.com/office/drawing/2014/main" id="{1C0B9E1D-B386-C922-07CB-7F79D7864FD8}"/>
+                <a16:creationId xmlns:a16="http://schemas.microsoft.com/office/drawing/2014/main" id="{713D696A-4098-1516-BADB-B5315100B4A3}"/>
               </a:ext>
             </a:extLst>
           </p:cNvPr>
@@ -20928,8 +20928,8 @@
         </p:nvSpPr>
         <p:spPr>
           <a:xfrm>
-            <a:off x="1871519" y="2498833"/>
-            <a:ext cx="8673296" cy="371676"/>
+            <a:off x="1846597" y="2472230"/>
+            <a:ext cx="8723143" cy="387325"/>
           </a:xfrm>
           <a:prstGeom prst="rect">
             <a:avLst/>
@@ -20946,7 +20946,7 @@
               </a:spcBef>
               <a:buFontTx/>
               <a:buNone/>
-              <a:defRPr sz="2200" b="1">
+              <a:defRPr sz="2000" b="1">
                 <a:solidFill>
                   <a:schemeClr val="accent1">
                     <a:lumMod val="70000"/>
@@ -20970,7 +20970,7 @@
           <p:cNvPr id="8" name="item_1">
             <a:extLst>
               <a:ext uri="{FF2B5EF4-FFF2-40B4-BE49-F238E27FC236}">
-                <a16:creationId xmlns:a16="http://schemas.microsoft.com/office/drawing/2014/main" id="{8DC9DC83-F817-EA05-4302-0803BEF70BE2}"/>
+                <a16:creationId xmlns:a16="http://schemas.microsoft.com/office/drawing/2014/main" id="{ACE674F7-7396-172E-411E-6723FA06A74B}"/>
               </a:ext>
             </a:extLst>
           </p:cNvPr>
@@ -20983,8 +20983,8 @@
         </p:nvSpPr>
         <p:spPr>
           <a:xfrm>
-            <a:off x="1871519" y="2870510"/>
-            <a:ext cx="8673296" cy="892021"/>
+            <a:off x="1846597" y="2859554"/>
+            <a:ext cx="8723143" cy="929580"/>
           </a:xfrm>
           <a:prstGeom prst="rect">
             <a:avLst/>
@@ -21018,7 +21018,7 @@
           <p:cNvPr id="9" name="marker_2">
             <a:extLst>
               <a:ext uri="{FF2B5EF4-FFF2-40B4-BE49-F238E27FC236}">
-                <a16:creationId xmlns:a16="http://schemas.microsoft.com/office/drawing/2014/main" id="{1FE66B8C-E46A-22B5-C522-F1A8611169F6}"/>
+                <a16:creationId xmlns:a16="http://schemas.microsoft.com/office/drawing/2014/main" id="{472C2229-0582-BD84-FF6E-5C164CEBD315}"/>
               </a:ext>
             </a:extLst>
           </p:cNvPr>
@@ -21031,7 +21031,7 @@
         </p:nvSpPr>
         <p:spPr>
           <a:xfrm>
-            <a:off x="1223514" y="4401031"/>
+            <a:off x="1198591" y="4374427"/>
             <a:ext cx="548312" cy="585291"/>
           </a:xfrm>
           <a:prstGeom prst="ellipse">
@@ -21054,7 +21054,7 @@
               </a:spcBef>
               <a:buFontTx/>
               <a:buNone/>
-              <a:defRPr sz="2400" b="1">
+              <a:defRPr sz="2000" b="1">
                 <a:solidFill>
                   <a:schemeClr val="bg1"/>
                 </a:solidFill>
@@ -21076,7 +21076,7 @@
           <p:cNvPr id="10" name="item_2_title">
             <a:extLst>
               <a:ext uri="{FF2B5EF4-FFF2-40B4-BE49-F238E27FC236}">
-                <a16:creationId xmlns:a16="http://schemas.microsoft.com/office/drawing/2014/main" id="{40D667B0-F97E-97FE-536C-F3B86E1D9A74}"/>
+                <a16:creationId xmlns:a16="http://schemas.microsoft.com/office/drawing/2014/main" id="{9224182C-FAF3-7279-FE2C-D46572A0F362}"/>
               </a:ext>
             </a:extLst>
           </p:cNvPr>
@@ -21089,8 +21089,8 @@
         </p:nvSpPr>
         <p:spPr>
           <a:xfrm>
-            <a:off x="1871519" y="4401030"/>
-            <a:ext cx="8673296" cy="371676"/>
+            <a:off x="1846597" y="4374427"/>
+            <a:ext cx="8723143" cy="387325"/>
           </a:xfrm>
           <a:prstGeom prst="rect">
             <a:avLst/>
@@ -21107,7 +21107,7 @@
               </a:spcBef>
               <a:buFontTx/>
               <a:buNone/>
-              <a:defRPr sz="2200" b="1">
+              <a:defRPr sz="2000" b="1">
                 <a:solidFill>
                   <a:schemeClr val="accent1">
                     <a:lumMod val="70000"/>
@@ -21131,7 +21131,7 @@
           <p:cNvPr id="11" name="item_2">
             <a:extLst>
               <a:ext uri="{FF2B5EF4-FFF2-40B4-BE49-F238E27FC236}">
-                <a16:creationId xmlns:a16="http://schemas.microsoft.com/office/drawing/2014/main" id="{E7EC3FF4-1E7A-1C1C-9BF3-49E188F76465}"/>
+                <a16:creationId xmlns:a16="http://schemas.microsoft.com/office/drawing/2014/main" id="{E07CA806-1EC1-C685-9B68-833210FAAD32}"/>
               </a:ext>
             </a:extLst>
           </p:cNvPr>
@@ -21144,8 +21144,8 @@
         </p:nvSpPr>
         <p:spPr>
           <a:xfrm>
-            <a:off x="1871519" y="4772706"/>
-            <a:ext cx="8673296" cy="892021"/>
+            <a:off x="1846597" y="4761750"/>
+            <a:ext cx="8723143" cy="929580"/>
           </a:xfrm>
           <a:prstGeom prst="rect">
             <a:avLst/>
@@ -21179,7 +21179,7 @@
           <p:cNvPr id="12" name="source">
             <a:extLst>
               <a:ext uri="{FF2B5EF4-FFF2-40B4-BE49-F238E27FC236}">
-                <a16:creationId xmlns:a16="http://schemas.microsoft.com/office/drawing/2014/main" id="{531DAF50-61F1-C3FC-7123-683E75DAAAA2}"/>
+                <a16:creationId xmlns:a16="http://schemas.microsoft.com/office/drawing/2014/main" id="{110806F7-FB06-0354-447F-467CF1A1813A}"/>
               </a:ext>
             </a:extLst>
           </p:cNvPr>
@@ -21236,7 +21236,7 @@
     </p:spTree>
     <p:extLst>
       <p:ext uri="{BB962C8B-B14F-4D97-AF65-F5344CB8AC3E}">
-        <p14:creationId xmlns:p14="http://schemas.microsoft.com/office/powerpoint/2010/main" val="1678042772"/>
+        <p14:creationId xmlns:p14="http://schemas.microsoft.com/office/powerpoint/2010/main" val="27962649"/>
       </p:ext>
     </p:extLst>
   </p:cSld>
@@ -21305,7 +21305,7 @@
           <a:bodyPr/>
           <a:lstStyle/>
           <a:p>
-            <a:fld id="{1146AB1F-C91F-4F0F-9868-5252CDCD6051}" type="datetimeFigureOut">
+            <a:fld id="{A9C3E1C2-504C-4CFF-A37A-AE4693906186}" type="datetimeFigureOut">
               <a:rPr lang="en-US" smtClean="0"/>
               <a:t>10/3/2026</a:t>
             </a:fld>
@@ -21347,7 +21347,7 @@
           <a:bodyPr/>
           <a:lstStyle/>
           <a:p>
-            <a:fld id="{FE1B144C-6E1C-47C6-9306-1DC2A92756EB}" type="slidenum">
+            <a:fld id="{0CAC26E6-90F8-49CB-BE00-E3E555820112}" type="slidenum">
               <a:rPr lang="en-US" smtClean="0"/>
               <a:t>‹#›</a:t>
             </a:fld>
@@ -21360,7 +21360,7 @@
           <p:cNvPr id="6" name="item_1_title">
             <a:extLst>
               <a:ext uri="{FF2B5EF4-FFF2-40B4-BE49-F238E27FC236}">
-                <a16:creationId xmlns:a16="http://schemas.microsoft.com/office/drawing/2014/main" id="{30D9E7AB-4BF5-C7C1-7763-770F4A8A2099}"/>
+                <a16:creationId xmlns:a16="http://schemas.microsoft.com/office/drawing/2014/main" id="{23370574-CB10-1096-04A7-BB5672D87405}"/>
               </a:ext>
             </a:extLst>
           </p:cNvPr>
@@ -21373,8 +21373,8 @@
         </p:nvSpPr>
         <p:spPr>
           <a:xfrm>
-            <a:off x="1223514" y="2498833"/>
-            <a:ext cx="4361571" cy="371676"/>
+            <a:off x="1198591" y="2472230"/>
+            <a:ext cx="4411418" cy="387325"/>
           </a:xfrm>
         </p:spPr>
         <p:txBody>
@@ -21388,7 +21388,7 @@
               </a:spcBef>
               <a:buFontTx/>
               <a:buNone/>
-              <a:defRPr sz="2200" b="1">
+              <a:defRPr sz="2000" b="1">
                 <a:solidFill>
                   <a:schemeClr val="accent1">
                     <a:lumMod val="70000"/>
@@ -21412,7 +21412,7 @@
           <p:cNvPr id="7" name="item_1">
             <a:extLst>
               <a:ext uri="{FF2B5EF4-FFF2-40B4-BE49-F238E27FC236}">
-                <a16:creationId xmlns:a16="http://schemas.microsoft.com/office/drawing/2014/main" id="{87282546-A52E-6DBE-515C-6933972BFEA7}"/>
+                <a16:creationId xmlns:a16="http://schemas.microsoft.com/office/drawing/2014/main" id="{28EC9D59-D6EE-5097-3E0B-63192436F3D9}"/>
               </a:ext>
             </a:extLst>
           </p:cNvPr>
@@ -21425,8 +21425,8 @@
         </p:nvSpPr>
         <p:spPr>
           <a:xfrm>
-            <a:off x="1223515" y="2870510"/>
-            <a:ext cx="4361571" cy="892021"/>
+            <a:off x="1198591" y="2859554"/>
+            <a:ext cx="4411418" cy="929580"/>
           </a:xfrm>
           <a:prstGeom prst="rect">
             <a:avLst/>
@@ -21460,7 +21460,7 @@
           <p:cNvPr id="8" name="item_2_title">
             <a:extLst>
               <a:ext uri="{FF2B5EF4-FFF2-40B4-BE49-F238E27FC236}">
-                <a16:creationId xmlns:a16="http://schemas.microsoft.com/office/drawing/2014/main" id="{240ABFF3-8CC9-A5E7-6945-7A4A8E794626}"/>
+                <a16:creationId xmlns:a16="http://schemas.microsoft.com/office/drawing/2014/main" id="{379C66F7-C188-2E1C-B0DE-EB010FA5518F}"/>
               </a:ext>
             </a:extLst>
           </p:cNvPr>
@@ -21473,8 +21473,8 @@
         </p:nvSpPr>
         <p:spPr>
           <a:xfrm>
-            <a:off x="6183245" y="2498833"/>
-            <a:ext cx="4361571" cy="371676"/>
+            <a:off x="6158321" y="2472230"/>
+            <a:ext cx="4411418" cy="387325"/>
           </a:xfrm>
           <a:prstGeom prst="rect">
             <a:avLst/>
@@ -21491,7 +21491,7 @@
               </a:spcBef>
               <a:buFontTx/>
               <a:buNone/>
-              <a:defRPr sz="2200" b="1">
+              <a:defRPr sz="2000" b="1">
                 <a:solidFill>
                   <a:schemeClr val="accent1">
                     <a:lumMod val="70000"/>
@@ -21515,7 +21515,7 @@
           <p:cNvPr id="9" name="item_2">
             <a:extLst>
               <a:ext uri="{FF2B5EF4-FFF2-40B4-BE49-F238E27FC236}">
-                <a16:creationId xmlns:a16="http://schemas.microsoft.com/office/drawing/2014/main" id="{6B9491F0-74AD-96E4-97ED-5D9563BA82D4}"/>
+                <a16:creationId xmlns:a16="http://schemas.microsoft.com/office/drawing/2014/main" id="{1B423889-4A1F-0885-4314-1A503B380C12}"/>
               </a:ext>
             </a:extLst>
           </p:cNvPr>
@@ -21528,8 +21528,8 @@
         </p:nvSpPr>
         <p:spPr>
           <a:xfrm>
-            <a:off x="6183245" y="2870510"/>
-            <a:ext cx="4361571" cy="892021"/>
+            <a:off x="6158321" y="2859554"/>
+            <a:ext cx="4411418" cy="929580"/>
           </a:xfrm>
           <a:prstGeom prst="rect">
             <a:avLst/>
@@ -21563,7 +21563,7 @@
           <p:cNvPr id="10" name="item_3_title">
             <a:extLst>
               <a:ext uri="{FF2B5EF4-FFF2-40B4-BE49-F238E27FC236}">
-                <a16:creationId xmlns:a16="http://schemas.microsoft.com/office/drawing/2014/main" id="{20D4F841-CCBA-FE3D-C197-2B8F9057A0B5}"/>
+                <a16:creationId xmlns:a16="http://schemas.microsoft.com/office/drawing/2014/main" id="{1459DA6F-5A7B-E906-C1E1-EB92548ED475}"/>
               </a:ext>
             </a:extLst>
           </p:cNvPr>
@@ -21576,8 +21576,8 @@
         </p:nvSpPr>
         <p:spPr>
           <a:xfrm>
-            <a:off x="1223515" y="4401030"/>
-            <a:ext cx="4361571" cy="371676"/>
+            <a:off x="1198591" y="4374427"/>
+            <a:ext cx="4411418" cy="387325"/>
           </a:xfrm>
           <a:prstGeom prst="rect">
             <a:avLst/>
@@ -21594,7 +21594,7 @@
               </a:spcBef>
               <a:buFontTx/>
               <a:buNone/>
-              <a:defRPr sz="2200" b="1">
+              <a:defRPr sz="2000" b="1">
                 <a:solidFill>
                   <a:schemeClr val="accent1">
                     <a:lumMod val="70000"/>
@@ -21618,7 +21618,7 @@
           <p:cNvPr id="11" name="item_3">
             <a:extLst>
               <a:ext uri="{FF2B5EF4-FFF2-40B4-BE49-F238E27FC236}">
-                <a16:creationId xmlns:a16="http://schemas.microsoft.com/office/drawing/2014/main" id="{3CE5381C-28CD-7215-849F-E51375E517AC}"/>
+                <a16:creationId xmlns:a16="http://schemas.microsoft.com/office/drawing/2014/main" id="{C94CB35B-64F3-FEE3-624A-983DA8C6AC91}"/>
               </a:ext>
             </a:extLst>
           </p:cNvPr>
@@ -21631,8 +21631,8 @@
         </p:nvSpPr>
         <p:spPr>
           <a:xfrm>
-            <a:off x="1223515" y="4772706"/>
-            <a:ext cx="4361571" cy="892021"/>
+            <a:off x="1198591" y="4761750"/>
+            <a:ext cx="4411418" cy="929580"/>
           </a:xfrm>
           <a:prstGeom prst="rect">
             <a:avLst/>
@@ -21666,7 +21666,7 @@
           <p:cNvPr id="12" name="item_4_title">
             <a:extLst>
               <a:ext uri="{FF2B5EF4-FFF2-40B4-BE49-F238E27FC236}">
-                <a16:creationId xmlns:a16="http://schemas.microsoft.com/office/drawing/2014/main" id="{FD49DC8F-7742-6361-CCE6-5E6418EE2F94}"/>
+                <a16:creationId xmlns:a16="http://schemas.microsoft.com/office/drawing/2014/main" id="{9D116BF5-A885-B1B9-F0C5-5E2222EF83FA}"/>
               </a:ext>
             </a:extLst>
           </p:cNvPr>
@@ -21679,8 +21679,8 @@
         </p:nvSpPr>
         <p:spPr>
           <a:xfrm>
-            <a:off x="6183245" y="4401030"/>
-            <a:ext cx="4361571" cy="371676"/>
+            <a:off x="6158321" y="4374427"/>
+            <a:ext cx="4411418" cy="387325"/>
           </a:xfrm>
           <a:prstGeom prst="rect">
             <a:avLst/>
@@ -21697,7 +21697,7 @@
               </a:spcBef>
               <a:buFontTx/>
               <a:buNone/>
-              <a:defRPr sz="2200" b="1">
+              <a:defRPr sz="2000" b="1">
                 <a:solidFill>
                   <a:schemeClr val="accent1">
                     <a:lumMod val="70000"/>
@@ -21721,7 +21721,7 @@
           <p:cNvPr id="13" name="item_4">
             <a:extLst>
               <a:ext uri="{FF2B5EF4-FFF2-40B4-BE49-F238E27FC236}">
-                <a16:creationId xmlns:a16="http://schemas.microsoft.com/office/drawing/2014/main" id="{8DE9D496-27DF-0990-CA3C-BAC5D84DF368}"/>
+                <a16:creationId xmlns:a16="http://schemas.microsoft.com/office/drawing/2014/main" id="{3E4E1060-5577-A032-7DE1-34D1046894A6}"/>
               </a:ext>
             </a:extLst>
           </p:cNvPr>
@@ -21734,8 +21734,8 @@
         </p:nvSpPr>
         <p:spPr>
           <a:xfrm>
-            <a:off x="6183245" y="4772706"/>
-            <a:ext cx="4361571" cy="892021"/>
+            <a:off x="6158321" y="4761750"/>
+            <a:ext cx="4411418" cy="929580"/>
           </a:xfrm>
           <a:prstGeom prst="rect">
             <a:avLst/>
@@ -21769,7 +21769,7 @@
           <p:cNvPr id="14" name="source">
             <a:extLst>
               <a:ext uri="{FF2B5EF4-FFF2-40B4-BE49-F238E27FC236}">
-                <a16:creationId xmlns:a16="http://schemas.microsoft.com/office/drawing/2014/main" id="{899E1AA5-5C05-86BE-E87E-DF66EB77F9D1}"/>
+                <a16:creationId xmlns:a16="http://schemas.microsoft.com/office/drawing/2014/main" id="{5C5201F8-6713-7CE8-94C5-9A08DD7B6812}"/>
               </a:ext>
             </a:extLst>
           </p:cNvPr>
@@ -21826,7 +21826,7 @@
     </p:spTree>
     <p:extLst>
       <p:ext uri="{BB962C8B-B14F-4D97-AF65-F5344CB8AC3E}">
-        <p14:creationId xmlns:p14="http://schemas.microsoft.com/office/powerpoint/2010/main" val="1272531659"/>
+        <p14:creationId xmlns:p14="http://schemas.microsoft.com/office/powerpoint/2010/main" val="2986309518"/>
       </p:ext>
     </p:extLst>
   </p:cSld>
@@ -21895,7 +21895,7 @@
           <a:bodyPr/>
           <a:lstStyle/>
           <a:p>
-            <a:fld id="{1146AB1F-C91F-4F0F-9868-5252CDCD6051}" type="datetimeFigureOut">
+            <a:fld id="{A9C3E1C2-504C-4CFF-A37A-AE4693906186}" type="datetimeFigureOut">
               <a:rPr lang="en-US" smtClean="0"/>
               <a:t>10/3/2026</a:t>
             </a:fld>
@@ -21937,7 +21937,7 @@
           <a:bodyPr/>
           <a:lstStyle/>
           <a:p>
-            <a:fld id="{FE1B144C-6E1C-47C6-9306-1DC2A92756EB}" type="slidenum">
+            <a:fld id="{0CAC26E6-90F8-49CB-BE00-E3E555820112}" type="slidenum">
               <a:rPr lang="en-US" smtClean="0"/>
               <a:t>‹#›</a:t>
             </a:fld>
@@ -21950,7 +21950,7 @@
           <p:cNvPr id="6" name="item_1_title">
             <a:extLst>
               <a:ext uri="{FF2B5EF4-FFF2-40B4-BE49-F238E27FC236}">
-                <a16:creationId xmlns:a16="http://schemas.microsoft.com/office/drawing/2014/main" id="{AD6338FC-B41B-FCB4-DF9C-7FDD28765EB1}"/>
+                <a16:creationId xmlns:a16="http://schemas.microsoft.com/office/drawing/2014/main" id="{EC2725E6-3F7C-D065-009F-2005EA9DEB3F}"/>
               </a:ext>
             </a:extLst>
           </p:cNvPr>
@@ -21963,8 +21963,8 @@
         </p:nvSpPr>
         <p:spPr>
           <a:xfrm>
-            <a:off x="1024128" y="2664060"/>
-            <a:ext cx="2280479" cy="945147"/>
+            <a:off x="1198591" y="2811082"/>
+            <a:ext cx="1931553" cy="847132"/>
           </a:xfrm>
         </p:spPr>
         <p:txBody>
@@ -21978,7 +21978,7 @@
               </a:spcBef>
               <a:buFontTx/>
               <a:buNone/>
-              <a:defRPr sz="2200" b="1">
+              <a:defRPr sz="2000" b="1">
                 <a:solidFill>
                   <a:schemeClr val="accent1">
                     <a:lumMod val="70000"/>
@@ -22002,7 +22002,7 @@
           <p:cNvPr id="7" name="item_1">
             <a:extLst>
               <a:ext uri="{FF2B5EF4-FFF2-40B4-BE49-F238E27FC236}">
-                <a16:creationId xmlns:a16="http://schemas.microsoft.com/office/drawing/2014/main" id="{385C4F8E-10E0-6493-01EE-0BC0FBC6CDF4}"/>
+                <a16:creationId xmlns:a16="http://schemas.microsoft.com/office/drawing/2014/main" id="{BD1C13C6-62C2-C127-042F-F4A489BF4EA4}"/>
               </a:ext>
             </a:extLst>
           </p:cNvPr>
@@ -22015,8 +22015,8 @@
         </p:nvSpPr>
         <p:spPr>
           <a:xfrm>
-            <a:off x="1024129" y="3609206"/>
-            <a:ext cx="2280479" cy="2268354"/>
+            <a:off x="1198592" y="3658215"/>
+            <a:ext cx="1931553" cy="2033117"/>
           </a:xfrm>
           <a:prstGeom prst="rect">
             <a:avLst/>
@@ -22050,7 +22050,7 @@
           <p:cNvPr id="8" name="item_2_title">
             <a:extLst>
               <a:ext uri="{FF2B5EF4-FFF2-40B4-BE49-F238E27FC236}">
-                <a16:creationId xmlns:a16="http://schemas.microsoft.com/office/drawing/2014/main" id="{9DEEEAF1-9FDB-DDF0-69F4-49C42ABE7978}"/>
+                <a16:creationId xmlns:a16="http://schemas.microsoft.com/office/drawing/2014/main" id="{29DA66D5-9F7A-736F-A6A5-AA7CF09727B1}"/>
               </a:ext>
             </a:extLst>
           </p:cNvPr>
@@ -22063,8 +22063,8 @@
         </p:nvSpPr>
         <p:spPr>
           <a:xfrm>
-            <a:off x="3503994" y="2664060"/>
-            <a:ext cx="2280479" cy="945147"/>
+            <a:off x="3678457" y="2811082"/>
+            <a:ext cx="1931553" cy="847132"/>
           </a:xfrm>
           <a:prstGeom prst="rect">
             <a:avLst/>
@@ -22081,7 +22081,7 @@
               </a:spcBef>
               <a:buFontTx/>
               <a:buNone/>
-              <a:defRPr sz="2200" b="1">
+              <a:defRPr sz="2000" b="1">
                 <a:solidFill>
                   <a:schemeClr val="accent1">
                     <a:lumMod val="70000"/>
@@ -22105,7 +22105,7 @@
           <p:cNvPr id="9" name="item_2">
             <a:extLst>
               <a:ext uri="{FF2B5EF4-FFF2-40B4-BE49-F238E27FC236}">
-                <a16:creationId xmlns:a16="http://schemas.microsoft.com/office/drawing/2014/main" id="{3CA370E7-033F-9BE6-8920-A013EFD55786}"/>
+                <a16:creationId xmlns:a16="http://schemas.microsoft.com/office/drawing/2014/main" id="{AB1181C6-02E9-7A89-B6CD-9398D9E0DA38}"/>
               </a:ext>
             </a:extLst>
           </p:cNvPr>
@@ -22118,8 +22118,8 @@
         </p:nvSpPr>
         <p:spPr>
           <a:xfrm>
-            <a:off x="3503994" y="3609206"/>
-            <a:ext cx="2280479" cy="2268354"/>
+            <a:off x="3678457" y="3658215"/>
+            <a:ext cx="1931553" cy="2033117"/>
           </a:xfrm>
           <a:prstGeom prst="rect">
             <a:avLst/>
@@ -22153,7 +22153,7 @@
           <p:cNvPr id="10" name="item_3_title">
             <a:extLst>
               <a:ext uri="{FF2B5EF4-FFF2-40B4-BE49-F238E27FC236}">
-                <a16:creationId xmlns:a16="http://schemas.microsoft.com/office/drawing/2014/main" id="{37B6732B-3E16-2B11-B029-A9AFE96B66A4}"/>
+                <a16:creationId xmlns:a16="http://schemas.microsoft.com/office/drawing/2014/main" id="{A54EF5EF-3827-1F44-6044-E44E0F7A14E9}"/>
               </a:ext>
             </a:extLst>
           </p:cNvPr>
@@ -22166,8 +22166,8 @@
         </p:nvSpPr>
         <p:spPr>
           <a:xfrm>
-            <a:off x="5983859" y="2664060"/>
-            <a:ext cx="2280479" cy="945147"/>
+            <a:off x="6158322" y="2811082"/>
+            <a:ext cx="1931553" cy="847132"/>
           </a:xfrm>
           <a:prstGeom prst="rect">
             <a:avLst/>
@@ -22184,7 +22184,7 @@
               </a:spcBef>
               <a:buFontTx/>
               <a:buNone/>
-              <a:defRPr sz="2200" b="1">
+              <a:defRPr sz="2000" b="1">
                 <a:solidFill>
                   <a:schemeClr val="accent1">
                     <a:lumMod val="70000"/>
@@ -22208,7 +22208,7 @@
           <p:cNvPr id="11" name="item_3">
             <a:extLst>
               <a:ext uri="{FF2B5EF4-FFF2-40B4-BE49-F238E27FC236}">
-                <a16:creationId xmlns:a16="http://schemas.microsoft.com/office/drawing/2014/main" id="{FDD804DA-7D99-816E-A3EC-6149C3E660C3}"/>
+                <a16:creationId xmlns:a16="http://schemas.microsoft.com/office/drawing/2014/main" id="{39F2C379-ABBB-B881-4810-8B75901C9874}"/>
               </a:ext>
             </a:extLst>
           </p:cNvPr>
@@ -22221,8 +22221,8 @@
         </p:nvSpPr>
         <p:spPr>
           <a:xfrm>
-            <a:off x="5983859" y="3609206"/>
-            <a:ext cx="2280479" cy="2268354"/>
+            <a:off x="6158322" y="3658215"/>
+            <a:ext cx="1931553" cy="2033117"/>
           </a:xfrm>
           <a:prstGeom prst="rect">
             <a:avLst/>
@@ -22256,7 +22256,7 @@
           <p:cNvPr id="12" name="item_4_title">
             <a:extLst>
               <a:ext uri="{FF2B5EF4-FFF2-40B4-BE49-F238E27FC236}">
-                <a16:creationId xmlns:a16="http://schemas.microsoft.com/office/drawing/2014/main" id="{A69CD65A-5452-57FE-2E56-736149731938}"/>
+                <a16:creationId xmlns:a16="http://schemas.microsoft.com/office/drawing/2014/main" id="{C0230891-D68E-9F7F-538A-862AC5EA6595}"/>
               </a:ext>
             </a:extLst>
           </p:cNvPr>
@@ -22269,8 +22269,8 @@
         </p:nvSpPr>
         <p:spPr>
           <a:xfrm>
-            <a:off x="8463724" y="2664060"/>
-            <a:ext cx="2280479" cy="945147"/>
+            <a:off x="8638186" y="2811082"/>
+            <a:ext cx="1931553" cy="847132"/>
           </a:xfrm>
           <a:prstGeom prst="rect">
             <a:avLst/>
@@ -22287,7 +22287,7 @@
               </a:spcBef>
               <a:buFontTx/>
               <a:buNone/>
-              <a:defRPr sz="2200" b="1">
+              <a:defRPr sz="2000" b="1">
                 <a:solidFill>
                   <a:schemeClr val="accent1">
                     <a:lumMod val="70000"/>
@@ -22311,7 +22311,7 @@
           <p:cNvPr id="13" name="item_4">
             <a:extLst>
               <a:ext uri="{FF2B5EF4-FFF2-40B4-BE49-F238E27FC236}">
-                <a16:creationId xmlns:a16="http://schemas.microsoft.com/office/drawing/2014/main" id="{C5433119-F4BE-0E9A-B223-46559B436539}"/>
+                <a16:creationId xmlns:a16="http://schemas.microsoft.com/office/drawing/2014/main" id="{008AC823-9101-45E9-967D-B8A92BB353A6}"/>
               </a:ext>
             </a:extLst>
           </p:cNvPr>
@@ -22324,8 +22324,8 @@
         </p:nvSpPr>
         <p:spPr>
           <a:xfrm>
-            <a:off x="8463724" y="3609206"/>
-            <a:ext cx="2280479" cy="2268354"/>
+            <a:off x="8638186" y="3658215"/>
+            <a:ext cx="1931553" cy="2033117"/>
           </a:xfrm>
           <a:prstGeom prst="rect">
             <a:avLst/>
@@ -22359,7 +22359,7 @@
           <p:cNvPr id="14" name="source">
             <a:extLst>
               <a:ext uri="{FF2B5EF4-FFF2-40B4-BE49-F238E27FC236}">
-                <a16:creationId xmlns:a16="http://schemas.microsoft.com/office/drawing/2014/main" id="{009CA375-39F9-2F67-CA12-1DDE0375BFBD}"/>
+                <a16:creationId xmlns:a16="http://schemas.microsoft.com/office/drawing/2014/main" id="{EC576AEA-D96E-1636-8156-A6239CCAD41F}"/>
               </a:ext>
             </a:extLst>
           </p:cNvPr>
@@ -22416,7 +22416,7 @@
     </p:spTree>
     <p:extLst>
       <p:ext uri="{BB962C8B-B14F-4D97-AF65-F5344CB8AC3E}">
-        <p14:creationId xmlns:p14="http://schemas.microsoft.com/office/powerpoint/2010/main" val="4202568915"/>
+        <p14:creationId xmlns:p14="http://schemas.microsoft.com/office/powerpoint/2010/main" val="4117396764"/>
       </p:ext>
     </p:extLst>
   </p:cSld>
@@ -22485,7 +22485,7 @@
           <a:bodyPr/>
           <a:lstStyle/>
           <a:p>
-            <a:fld id="{1146AB1F-C91F-4F0F-9868-5252CDCD6051}" type="datetimeFigureOut">
+            <a:fld id="{A9C3E1C2-504C-4CFF-A37A-AE4693906186}" type="datetimeFigureOut">
               <a:rPr lang="en-US" smtClean="0"/>
               <a:t>10/3/2026</a:t>
             </a:fld>
@@ -22527,7 +22527,7 @@
           <a:bodyPr/>
           <a:lstStyle/>
           <a:p>
-            <a:fld id="{FE1B144C-6E1C-47C6-9306-1DC2A92756EB}" type="slidenum">
+            <a:fld id="{0CAC26E6-90F8-49CB-BE00-E3E555820112}" type="slidenum">
               <a:rPr lang="en-US" smtClean="0"/>
               <a:t>‹#›</a:t>
             </a:fld>
@@ -22540,7 +22540,7 @@
           <p:cNvPr id="6" name="kpi_value_1">
             <a:extLst>
               <a:ext uri="{FF2B5EF4-FFF2-40B4-BE49-F238E27FC236}">
-                <a16:creationId xmlns:a16="http://schemas.microsoft.com/office/drawing/2014/main" id="{EFDB3C85-66A2-3C45-478A-5376E66C646A}"/>
+                <a16:creationId xmlns:a16="http://schemas.microsoft.com/office/drawing/2014/main" id="{467ED77E-B769-0D3D-C0D4-B1ABC26B00F6}"/>
               </a:ext>
             </a:extLst>
           </p:cNvPr>
@@ -22553,8 +22553,8 @@
         </p:nvSpPr>
         <p:spPr>
           <a:xfrm>
-            <a:off x="1223514" y="2498833"/>
-            <a:ext cx="4655666" cy="1962854"/>
+            <a:off x="1198591" y="2472230"/>
+            <a:ext cx="4705512" cy="1995843"/>
           </a:xfrm>
         </p:spPr>
         <p:txBody>
@@ -22592,7 +22592,7 @@
           <p:cNvPr id="7" name="kpi_label_1">
             <a:extLst>
               <a:ext uri="{FF2B5EF4-FFF2-40B4-BE49-F238E27FC236}">
-                <a16:creationId xmlns:a16="http://schemas.microsoft.com/office/drawing/2014/main" id="{55AB687E-E482-D621-B5BF-EED63BDF6A7E}"/>
+                <a16:creationId xmlns:a16="http://schemas.microsoft.com/office/drawing/2014/main" id="{9680D319-E70D-9067-2CA9-BBF310E232DF}"/>
               </a:ext>
             </a:extLst>
           </p:cNvPr>
@@ -22605,209 +22605,8 @@
         </p:nvSpPr>
         <p:spPr>
           <a:xfrm>
-            <a:off x="1223514" y="4525005"/>
-            <a:ext cx="4655666" cy="1139722"/>
-          </a:xfrm>
-          <a:prstGeom prst="rect">
-            <a:avLst/>
-          </a:prstGeom>
-        </p:spPr>
-        <p:txBody>
-          <a:bodyPr wrap="square" anchor="t">
-            <a:noAutofit/>
-          </a:bodyPr>
-          <a:lstStyle>
-            <a:lvl1pPr marL="0" indent="0">
-              <a:spcBef>
-                <a:spcPts val="0"/>
-              </a:spcBef>
-              <a:buFontTx/>
-              <a:buNone/>
-              <a:defRPr sz="1800"/>
-            </a:lvl1pPr>
-          </a:lstStyle>
-          <a:p>
-            <a:pPr lvl="0"/>
-            <a:r>
-              <a:rPr lang="en-US"/>
-              <a:t>kpi_label_1</a:t>
-            </a:r>
-          </a:p>
-        </p:txBody>
-      </p:sp>
-      <p:sp>
-        <p:nvSpPr>
-          <p:cNvPr id="8" name="quote">
-            <a:extLst>
-              <a:ext uri="{FF2B5EF4-FFF2-40B4-BE49-F238E27FC236}">
-                <a16:creationId xmlns:a16="http://schemas.microsoft.com/office/drawing/2014/main" id="{B4C19993-6675-4A58-AC47-6325080E44FF}"/>
-              </a:ext>
-            </a:extLst>
-          </p:cNvPr>
-          <p:cNvSpPr>
-            <a:spLocks noGrp="1"/>
-          </p:cNvSpPr>
-          <p:nvPr>
-            <p:ph type="body" sz="quarter" idx="15" hasCustomPrompt="1"/>
-          </p:nvPr>
-        </p:nvSpPr>
-        <p:spPr>
-          <a:xfrm>
-            <a:off x="1223514" y="2498834"/>
-            <a:ext cx="4655666" cy="2469397"/>
-          </a:xfrm>
-          <a:prstGeom prst="rect">
-            <a:avLst/>
-          </a:prstGeom>
-        </p:spPr>
-        <p:txBody>
-          <a:bodyPr wrap="square" anchor="t">
-            <a:noAutofit/>
-          </a:bodyPr>
-          <a:lstStyle>
-            <a:lvl1pPr marL="0" indent="0">
-              <a:spcBef>
-                <a:spcPts val="0"/>
-              </a:spcBef>
-              <a:buFontTx/>
-              <a:buNone/>
-              <a:defRPr sz="2400" i="1">
-                <a:latin typeface="+mj-lt"/>
-              </a:defRPr>
-            </a:lvl1pPr>
-          </a:lstStyle>
-          <a:p>
-            <a:pPr lvl="0"/>
-            <a:r>
-              <a:rPr lang="en-US"/>
-              <a:t>quote</a:t>
-            </a:r>
-          </a:p>
-        </p:txBody>
-      </p:sp>
-      <p:sp>
-        <p:nvSpPr>
-          <p:cNvPr id="9" name="attribution">
-            <a:extLst>
-              <a:ext uri="{FF2B5EF4-FFF2-40B4-BE49-F238E27FC236}">
-                <a16:creationId xmlns:a16="http://schemas.microsoft.com/office/drawing/2014/main" id="{BAAADFBB-3F3E-820B-CC6B-89788AB6C263}"/>
-              </a:ext>
-            </a:extLst>
-          </p:cNvPr>
-          <p:cNvSpPr>
-            <a:spLocks noGrp="1"/>
-          </p:cNvSpPr>
-          <p:nvPr>
-            <p:ph type="body" sz="quarter" idx="16" hasCustomPrompt="1"/>
-          </p:nvPr>
-        </p:nvSpPr>
-        <p:spPr>
-          <a:xfrm>
-            <a:off x="1223514" y="5031549"/>
-            <a:ext cx="4655666" cy="633179"/>
-          </a:xfrm>
-          <a:prstGeom prst="rect">
-            <a:avLst/>
-          </a:prstGeom>
-        </p:spPr>
-        <p:txBody>
-          <a:bodyPr wrap="square" anchor="t">
-            <a:noAutofit/>
-          </a:bodyPr>
-          <a:lstStyle>
-            <a:lvl1pPr marL="0" indent="0">
-              <a:spcBef>
-                <a:spcPts val="0"/>
-              </a:spcBef>
-              <a:buFontTx/>
-              <a:buNone/>
-              <a:defRPr sz="1400"/>
-            </a:lvl1pPr>
-          </a:lstStyle>
-          <a:p>
-            <a:pPr lvl="0"/>
-            <a:r>
-              <a:rPr lang="en-US"/>
-              <a:t>attribution</a:t>
-            </a:r>
-          </a:p>
-        </p:txBody>
-      </p:sp>
-      <p:sp>
-        <p:nvSpPr>
-          <p:cNvPr id="10" name="item_1_title">
-            <a:extLst>
-              <a:ext uri="{FF2B5EF4-FFF2-40B4-BE49-F238E27FC236}">
-                <a16:creationId xmlns:a16="http://schemas.microsoft.com/office/drawing/2014/main" id="{4CCE7CA6-C82D-F686-BBBF-EDC9697B36DB}"/>
-              </a:ext>
-            </a:extLst>
-          </p:cNvPr>
-          <p:cNvSpPr>
-            <a:spLocks noGrp="1"/>
-          </p:cNvSpPr>
-          <p:nvPr>
-            <p:ph type="body" sz="quarter" idx="17" hasCustomPrompt="1"/>
-          </p:nvPr>
-        </p:nvSpPr>
-        <p:spPr>
-          <a:xfrm>
-            <a:off x="6467369" y="2286001"/>
-            <a:ext cx="4276832" cy="1056341"/>
-          </a:xfrm>
-          <a:prstGeom prst="rect">
-            <a:avLst/>
-          </a:prstGeom>
-        </p:spPr>
-        <p:txBody>
-          <a:bodyPr wrap="square" anchor="t">
-            <a:noAutofit/>
-          </a:bodyPr>
-          <a:lstStyle>
-            <a:lvl1pPr marL="0" indent="0">
-              <a:spcBef>
-                <a:spcPts val="0"/>
-              </a:spcBef>
-              <a:buFontTx/>
-              <a:buNone/>
-              <a:defRPr sz="2200" b="1">
-                <a:solidFill>
-                  <a:schemeClr val="accent1">
-                    <a:lumMod val="70000"/>
-                  </a:schemeClr>
-                </a:solidFill>
-                <a:latin typeface="+mj-lt"/>
-              </a:defRPr>
-            </a:lvl1pPr>
-          </a:lstStyle>
-          <a:p>
-            <a:pPr lvl="0"/>
-            <a:r>
-              <a:rPr lang="en-US"/>
-              <a:t>item_1_title</a:t>
-            </a:r>
-          </a:p>
-        </p:txBody>
-      </p:sp>
-      <p:sp>
-        <p:nvSpPr>
-          <p:cNvPr id="11" name="item_1">
-            <a:extLst>
-              <a:ext uri="{FF2B5EF4-FFF2-40B4-BE49-F238E27FC236}">
-                <a16:creationId xmlns:a16="http://schemas.microsoft.com/office/drawing/2014/main" id="{8DD9DCD9-5C88-F048-7E0F-009AFA51EE24}"/>
-              </a:ext>
-            </a:extLst>
-          </p:cNvPr>
-          <p:cNvSpPr>
-            <a:spLocks noGrp="1"/>
-          </p:cNvSpPr>
-          <p:nvPr>
-            <p:ph type="body" sz="quarter" idx="18" hasCustomPrompt="1"/>
-          </p:nvPr>
-        </p:nvSpPr>
-        <p:spPr>
-          <a:xfrm>
-            <a:off x="6467369" y="3342342"/>
-            <a:ext cx="4276832" cy="2535219"/>
+            <a:off x="1198591" y="4532455"/>
+            <a:ext cx="4705512" cy="1158877"/>
           </a:xfrm>
           <a:prstGeom prst="rect">
             <a:avLst/>
@@ -22831,6 +22630,207 @@
             <a:pPr lvl="0"/>
             <a:r>
               <a:rPr lang="en-US"/>
+              <a:t>kpi_label_1</a:t>
+            </a:r>
+          </a:p>
+        </p:txBody>
+      </p:sp>
+      <p:sp>
+        <p:nvSpPr>
+          <p:cNvPr id="8" name="quote">
+            <a:extLst>
+              <a:ext uri="{FF2B5EF4-FFF2-40B4-BE49-F238E27FC236}">
+                <a16:creationId xmlns:a16="http://schemas.microsoft.com/office/drawing/2014/main" id="{F8293764-A465-3634-7B8A-300911227727}"/>
+              </a:ext>
+            </a:extLst>
+          </p:cNvPr>
+          <p:cNvSpPr>
+            <a:spLocks noGrp="1"/>
+          </p:cNvSpPr>
+          <p:nvPr>
+            <p:ph type="body" sz="quarter" idx="15" hasCustomPrompt="1"/>
+          </p:nvPr>
+        </p:nvSpPr>
+        <p:spPr>
+          <a:xfrm>
+            <a:off x="1198591" y="2472230"/>
+            <a:ext cx="4705512" cy="2510899"/>
+          </a:xfrm>
+          <a:prstGeom prst="rect">
+            <a:avLst/>
+          </a:prstGeom>
+        </p:spPr>
+        <p:txBody>
+          <a:bodyPr wrap="square" anchor="t">
+            <a:noAutofit/>
+          </a:bodyPr>
+          <a:lstStyle>
+            <a:lvl1pPr marL="0" indent="0">
+              <a:spcBef>
+                <a:spcPts val="0"/>
+              </a:spcBef>
+              <a:buFontTx/>
+              <a:buNone/>
+              <a:defRPr sz="2000" i="1">
+                <a:latin typeface="+mj-lt"/>
+              </a:defRPr>
+            </a:lvl1pPr>
+          </a:lstStyle>
+          <a:p>
+            <a:pPr lvl="0"/>
+            <a:r>
+              <a:rPr lang="en-US"/>
+              <a:t>quote</a:t>
+            </a:r>
+          </a:p>
+        </p:txBody>
+      </p:sp>
+      <p:sp>
+        <p:nvSpPr>
+          <p:cNvPr id="9" name="attribution">
+            <a:extLst>
+              <a:ext uri="{FF2B5EF4-FFF2-40B4-BE49-F238E27FC236}">
+                <a16:creationId xmlns:a16="http://schemas.microsoft.com/office/drawing/2014/main" id="{1DD9CB6C-E6D9-D9DC-D0FF-1BA04C746FDC}"/>
+              </a:ext>
+            </a:extLst>
+          </p:cNvPr>
+          <p:cNvSpPr>
+            <a:spLocks noGrp="1"/>
+          </p:cNvSpPr>
+          <p:nvPr>
+            <p:ph type="body" sz="quarter" idx="16" hasCustomPrompt="1"/>
+          </p:nvPr>
+        </p:nvSpPr>
+        <p:spPr>
+          <a:xfrm>
+            <a:off x="1198591" y="5047511"/>
+            <a:ext cx="4705512" cy="643820"/>
+          </a:xfrm>
+          <a:prstGeom prst="rect">
+            <a:avLst/>
+          </a:prstGeom>
+        </p:spPr>
+        <p:txBody>
+          <a:bodyPr wrap="square" anchor="t">
+            <a:noAutofit/>
+          </a:bodyPr>
+          <a:lstStyle>
+            <a:lvl1pPr marL="0" indent="0">
+              <a:spcBef>
+                <a:spcPts val="0"/>
+              </a:spcBef>
+              <a:buFontTx/>
+              <a:buNone/>
+              <a:defRPr sz="2000"/>
+            </a:lvl1pPr>
+          </a:lstStyle>
+          <a:p>
+            <a:pPr lvl="0"/>
+            <a:r>
+              <a:rPr lang="en-US"/>
+              <a:t>attribution</a:t>
+            </a:r>
+          </a:p>
+        </p:txBody>
+      </p:sp>
+      <p:sp>
+        <p:nvSpPr>
+          <p:cNvPr id="10" name="item_1_title">
+            <a:extLst>
+              <a:ext uri="{FF2B5EF4-FFF2-40B4-BE49-F238E27FC236}">
+                <a16:creationId xmlns:a16="http://schemas.microsoft.com/office/drawing/2014/main" id="{A1D3A59B-24F2-5B27-68AD-FBAC6C8959DA}"/>
+              </a:ext>
+            </a:extLst>
+          </p:cNvPr>
+          <p:cNvSpPr>
+            <a:spLocks noGrp="1"/>
+          </p:cNvSpPr>
+          <p:nvPr>
+            <p:ph type="body" sz="quarter" idx="17" hasCustomPrompt="1"/>
+          </p:nvPr>
+        </p:nvSpPr>
+        <p:spPr>
+          <a:xfrm>
+            <a:off x="6467369" y="2286001"/>
+            <a:ext cx="4276832" cy="1056341"/>
+          </a:xfrm>
+          <a:prstGeom prst="rect">
+            <a:avLst/>
+          </a:prstGeom>
+        </p:spPr>
+        <p:txBody>
+          <a:bodyPr wrap="square" anchor="t">
+            <a:noAutofit/>
+          </a:bodyPr>
+          <a:lstStyle>
+            <a:lvl1pPr marL="0" indent="0">
+              <a:spcBef>
+                <a:spcPts val="0"/>
+              </a:spcBef>
+              <a:buFontTx/>
+              <a:buNone/>
+              <a:defRPr sz="2000" b="1">
+                <a:solidFill>
+                  <a:schemeClr val="accent1">
+                    <a:lumMod val="70000"/>
+                  </a:schemeClr>
+                </a:solidFill>
+                <a:latin typeface="+mj-lt"/>
+              </a:defRPr>
+            </a:lvl1pPr>
+          </a:lstStyle>
+          <a:p>
+            <a:pPr lvl="0"/>
+            <a:r>
+              <a:rPr lang="en-US"/>
+              <a:t>item_1_title</a:t>
+            </a:r>
+          </a:p>
+        </p:txBody>
+      </p:sp>
+      <p:sp>
+        <p:nvSpPr>
+          <p:cNvPr id="11" name="item_1">
+            <a:extLst>
+              <a:ext uri="{FF2B5EF4-FFF2-40B4-BE49-F238E27FC236}">
+                <a16:creationId xmlns:a16="http://schemas.microsoft.com/office/drawing/2014/main" id="{4C1DD34E-3CD5-734B-A4A0-D889A381673B}"/>
+              </a:ext>
+            </a:extLst>
+          </p:cNvPr>
+          <p:cNvSpPr>
+            <a:spLocks noGrp="1"/>
+          </p:cNvSpPr>
+          <p:nvPr>
+            <p:ph type="body" sz="quarter" idx="18" hasCustomPrompt="1"/>
+          </p:nvPr>
+        </p:nvSpPr>
+        <p:spPr>
+          <a:xfrm>
+            <a:off x="6467369" y="3342342"/>
+            <a:ext cx="4276832" cy="2535219"/>
+          </a:xfrm>
+          <a:prstGeom prst="rect">
+            <a:avLst/>
+          </a:prstGeom>
+        </p:spPr>
+        <p:txBody>
+          <a:bodyPr wrap="square" anchor="t">
+            <a:noAutofit/>
+          </a:bodyPr>
+          <a:lstStyle>
+            <a:lvl1pPr marL="0" indent="0">
+              <a:spcBef>
+                <a:spcPts val="0"/>
+              </a:spcBef>
+              <a:buFontTx/>
+              <a:buNone/>
+              <a:defRPr sz="2000"/>
+            </a:lvl1pPr>
+          </a:lstStyle>
+          <a:p>
+            <a:pPr lvl="0"/>
+            <a:r>
+              <a:rPr lang="en-US"/>
               <a:t>item_1</a:t>
             </a:r>
           </a:p>
@@ -22841,7 +22841,7 @@
           <p:cNvPr id="12" name="source">
             <a:extLst>
               <a:ext uri="{FF2B5EF4-FFF2-40B4-BE49-F238E27FC236}">
-                <a16:creationId xmlns:a16="http://schemas.microsoft.com/office/drawing/2014/main" id="{BE9403DA-9C1E-14DB-EB51-754676459FDF}"/>
+                <a16:creationId xmlns:a16="http://schemas.microsoft.com/office/drawing/2014/main" id="{D1513989-4280-73C4-2599-0A702AAA1CA8}"/>
               </a:ext>
             </a:extLst>
           </p:cNvPr>
@@ -22898,7 +22898,7 @@
     </p:spTree>
     <p:extLst>
       <p:ext uri="{BB962C8B-B14F-4D97-AF65-F5344CB8AC3E}">
-        <p14:creationId xmlns:p14="http://schemas.microsoft.com/office/powerpoint/2010/main" val="569618580"/>
+        <p14:creationId xmlns:p14="http://schemas.microsoft.com/office/powerpoint/2010/main" val="100638834"/>
       </p:ext>
     </p:extLst>
   </p:cSld>
@@ -22967,7 +22967,7 @@
           <a:bodyPr/>
           <a:lstStyle/>
           <a:p>
-            <a:fld id="{1146AB1F-C91F-4F0F-9868-5252CDCD6051}" type="datetimeFigureOut">
+            <a:fld id="{A9C3E1C2-504C-4CFF-A37A-AE4693906186}" type="datetimeFigureOut">
               <a:rPr lang="en-US" smtClean="0"/>
               <a:t>10/3/2026</a:t>
             </a:fld>
@@ -23009,7 +23009,7 @@
           <a:bodyPr/>
           <a:lstStyle/>
           <a:p>
-            <a:fld id="{FE1B144C-6E1C-47C6-9306-1DC2A92756EB}" type="slidenum">
+            <a:fld id="{0CAC26E6-90F8-49CB-BE00-E3E555820112}" type="slidenum">
               <a:rPr lang="en-US" smtClean="0"/>
               <a:t>‹#›</a:t>
             </a:fld>
@@ -23022,7 +23022,7 @@
           <p:cNvPr id="6" name="item_1_title">
             <a:extLst>
               <a:ext uri="{FF2B5EF4-FFF2-40B4-BE49-F238E27FC236}">
-                <a16:creationId xmlns:a16="http://schemas.microsoft.com/office/drawing/2014/main" id="{98447568-9506-892E-F0D4-767B5E7F10F3}"/>
+                <a16:creationId xmlns:a16="http://schemas.microsoft.com/office/drawing/2014/main" id="{79E242F4-B089-9E41-0FCE-608F3971874E}"/>
               </a:ext>
             </a:extLst>
           </p:cNvPr>
@@ -23035,8 +23035,8 @@
         </p:nvSpPr>
         <p:spPr>
           <a:xfrm>
-            <a:off x="1223514" y="2498834"/>
-            <a:ext cx="2708328" cy="931145"/>
+            <a:off x="1198591" y="2472230"/>
+            <a:ext cx="2758175" cy="946795"/>
           </a:xfrm>
         </p:spPr>
         <p:txBody>
@@ -23050,7 +23050,7 @@
               </a:spcBef>
               <a:buFontTx/>
               <a:buNone/>
-              <a:defRPr sz="2200" b="1">
+              <a:defRPr sz="2000" b="1">
                 <a:solidFill>
                   <a:schemeClr val="accent1">
                     <a:lumMod val="70000"/>
@@ -23074,7 +23074,7 @@
           <p:cNvPr id="7" name="item_1">
             <a:extLst>
               <a:ext uri="{FF2B5EF4-FFF2-40B4-BE49-F238E27FC236}">
-                <a16:creationId xmlns:a16="http://schemas.microsoft.com/office/drawing/2014/main" id="{C101CFB3-C6CA-1FD4-8F04-080F20FE30DA}"/>
+                <a16:creationId xmlns:a16="http://schemas.microsoft.com/office/drawing/2014/main" id="{0CD01326-875B-67CA-6F55-C5EE947A5560}"/>
               </a:ext>
             </a:extLst>
           </p:cNvPr>
@@ -23087,8 +23087,8 @@
         </p:nvSpPr>
         <p:spPr>
           <a:xfrm>
-            <a:off x="1223514" y="3429978"/>
-            <a:ext cx="2708328" cy="2234748"/>
+            <a:off x="1198592" y="3419025"/>
+            <a:ext cx="2758175" cy="2272307"/>
           </a:xfrm>
           <a:prstGeom prst="rect">
             <a:avLst/>
@@ -23122,7 +23122,7 @@
           <p:cNvPr id="8" name="item_2_title">
             <a:extLst>
               <a:ext uri="{FF2B5EF4-FFF2-40B4-BE49-F238E27FC236}">
-                <a16:creationId xmlns:a16="http://schemas.microsoft.com/office/drawing/2014/main" id="{516717A3-9B5A-8EE3-C744-BF9D6E06CBCC}"/>
+                <a16:creationId xmlns:a16="http://schemas.microsoft.com/office/drawing/2014/main" id="{3EF455EC-F5BF-BB01-ABB6-9E608CFE348B}"/>
               </a:ext>
             </a:extLst>
           </p:cNvPr>
@@ -23135,8 +23135,8 @@
         </p:nvSpPr>
         <p:spPr>
           <a:xfrm>
-            <a:off x="4530001" y="2498834"/>
-            <a:ext cx="2708328" cy="931145"/>
+            <a:off x="4505078" y="2472230"/>
+            <a:ext cx="2758175" cy="946795"/>
           </a:xfrm>
           <a:prstGeom prst="rect">
             <a:avLst/>
@@ -23153,7 +23153,7 @@
               </a:spcBef>
               <a:buFontTx/>
               <a:buNone/>
-              <a:defRPr sz="2200" b="1">
+              <a:defRPr sz="2000" b="1">
                 <a:solidFill>
                   <a:schemeClr val="accent1">
                     <a:lumMod val="70000"/>
@@ -23177,7 +23177,7 @@
           <p:cNvPr id="9" name="item_2">
             <a:extLst>
               <a:ext uri="{FF2B5EF4-FFF2-40B4-BE49-F238E27FC236}">
-                <a16:creationId xmlns:a16="http://schemas.microsoft.com/office/drawing/2014/main" id="{AE9ABD1F-1412-A72B-9385-88D926B1CE4C}"/>
+                <a16:creationId xmlns:a16="http://schemas.microsoft.com/office/drawing/2014/main" id="{581BDD91-7B42-26DC-EFB1-5CC8D2E8A2CC}"/>
               </a:ext>
             </a:extLst>
           </p:cNvPr>
@@ -23190,8 +23190,8 @@
         </p:nvSpPr>
         <p:spPr>
           <a:xfrm>
-            <a:off x="4530001" y="3429978"/>
-            <a:ext cx="2708328" cy="2234748"/>
+            <a:off x="4505078" y="3419025"/>
+            <a:ext cx="2758175" cy="2272307"/>
           </a:xfrm>
           <a:prstGeom prst="rect">
             <a:avLst/>
@@ -23225,7 +23225,7 @@
           <p:cNvPr id="10" name="item_3_title">
             <a:extLst>
               <a:ext uri="{FF2B5EF4-FFF2-40B4-BE49-F238E27FC236}">
-                <a16:creationId xmlns:a16="http://schemas.microsoft.com/office/drawing/2014/main" id="{61B47566-D409-D0E4-655C-1FF0B10D0A8F}"/>
+                <a16:creationId xmlns:a16="http://schemas.microsoft.com/office/drawing/2014/main" id="{038BFC01-A44E-0F81-2060-7B12074CE7F4}"/>
               </a:ext>
             </a:extLst>
           </p:cNvPr>
@@ -23238,8 +23238,8 @@
         </p:nvSpPr>
         <p:spPr>
           <a:xfrm>
-            <a:off x="7836487" y="2498834"/>
-            <a:ext cx="2708328" cy="931145"/>
+            <a:off x="7811565" y="2472230"/>
+            <a:ext cx="2758175" cy="946795"/>
           </a:xfrm>
           <a:prstGeom prst="rect">
             <a:avLst/>
@@ -23256,7 +23256,7 @@
               </a:spcBef>
               <a:buFontTx/>
               <a:buNone/>
-              <a:defRPr sz="2200" b="1">
+              <a:defRPr sz="2000" b="1">
                 <a:solidFill>
                   <a:schemeClr val="accent1">
                     <a:lumMod val="70000"/>
@@ -23280,7 +23280,7 @@
           <p:cNvPr id="11" name="item_3">
             <a:extLst>
               <a:ext uri="{FF2B5EF4-FFF2-40B4-BE49-F238E27FC236}">
-                <a16:creationId xmlns:a16="http://schemas.microsoft.com/office/drawing/2014/main" id="{9DAE7983-9482-35A3-8C0E-5C7629B20E08}"/>
+                <a16:creationId xmlns:a16="http://schemas.microsoft.com/office/drawing/2014/main" id="{5769C5C6-1F5B-D5ED-4E0D-FC6D16D8C014}"/>
               </a:ext>
             </a:extLst>
           </p:cNvPr>
@@ -23293,8 +23293,8 @@
         </p:nvSpPr>
         <p:spPr>
           <a:xfrm>
-            <a:off x="7836487" y="3429978"/>
-            <a:ext cx="2708328" cy="2234748"/>
+            <a:off x="7811565" y="3419025"/>
+            <a:ext cx="2758175" cy="2272307"/>
           </a:xfrm>
           <a:prstGeom prst="rect">
             <a:avLst/>
@@ -23328,7 +23328,7 @@
           <p:cNvPr id="12" name="source">
             <a:extLst>
               <a:ext uri="{FF2B5EF4-FFF2-40B4-BE49-F238E27FC236}">
-                <a16:creationId xmlns:a16="http://schemas.microsoft.com/office/drawing/2014/main" id="{A33E6FFF-47DF-38A3-DADC-2D8BEE35B8C2}"/>
+                <a16:creationId xmlns:a16="http://schemas.microsoft.com/office/drawing/2014/main" id="{E2343A0B-6B16-18CD-5403-439F9171B189}"/>
               </a:ext>
             </a:extLst>
           </p:cNvPr>
@@ -23385,7 +23385,7 @@
     </p:spTree>
     <p:extLst>
       <p:ext uri="{BB962C8B-B14F-4D97-AF65-F5344CB8AC3E}">
-        <p14:creationId xmlns:p14="http://schemas.microsoft.com/office/powerpoint/2010/main" val="1189214269"/>
+        <p14:creationId xmlns:p14="http://schemas.microsoft.com/office/powerpoint/2010/main" val="3070223705"/>
       </p:ext>
     </p:extLst>
   </p:cSld>
@@ -23454,7 +23454,7 @@
           <a:bodyPr/>
           <a:lstStyle/>
           <a:p>
-            <a:fld id="{1146AB1F-C91F-4F0F-9868-5252CDCD6051}" type="datetimeFigureOut">
+            <a:fld id="{A9C3E1C2-504C-4CFF-A37A-AE4693906186}" type="datetimeFigureOut">
               <a:rPr lang="en-US" smtClean="0"/>
               <a:t>10/3/2026</a:t>
             </a:fld>
@@ -23496,7 +23496,7 @@
           <a:bodyPr/>
           <a:lstStyle/>
           <a:p>
-            <a:fld id="{FE1B144C-6E1C-47C6-9306-1DC2A92756EB}" type="slidenum">
+            <a:fld id="{0CAC26E6-90F8-49CB-BE00-E3E555820112}" type="slidenum">
               <a:rPr lang="en-US" smtClean="0"/>
               <a:t>‹#›</a:t>
             </a:fld>
@@ -23509,7 +23509,7 @@
           <p:cNvPr id="6" name="marker_1">
             <a:extLst>
               <a:ext uri="{FF2B5EF4-FFF2-40B4-BE49-F238E27FC236}">
-                <a16:creationId xmlns:a16="http://schemas.microsoft.com/office/drawing/2014/main" id="{8AF31988-FAA7-90E1-AFDE-681495C1BB63}"/>
+                <a16:creationId xmlns:a16="http://schemas.microsoft.com/office/drawing/2014/main" id="{DECEA2FB-E267-DA1A-FDBB-AA7734155CE8}"/>
               </a:ext>
             </a:extLst>
           </p:cNvPr>
@@ -23522,7 +23522,7 @@
         </p:nvSpPr>
         <p:spPr>
           <a:xfrm>
-            <a:off x="1223514" y="2498834"/>
+            <a:off x="1198591" y="2472230"/>
             <a:ext cx="548312" cy="585291"/>
           </a:xfrm>
           <a:prstGeom prst="ellipse">
@@ -23545,7 +23545,7 @@
               </a:spcBef>
               <a:buFontTx/>
               <a:buNone/>
-              <a:defRPr sz="2400" b="1">
+              <a:defRPr sz="2000" b="1">
                 <a:solidFill>
                   <a:schemeClr val="bg1"/>
                 </a:solidFill>
@@ -23567,7 +23567,7 @@
           <p:cNvPr id="7" name="item_1_title">
             <a:extLst>
               <a:ext uri="{FF2B5EF4-FFF2-40B4-BE49-F238E27FC236}">
-                <a16:creationId xmlns:a16="http://schemas.microsoft.com/office/drawing/2014/main" id="{FA6A432B-4387-A628-EB3C-8D4F18DF2068}"/>
+                <a16:creationId xmlns:a16="http://schemas.microsoft.com/office/drawing/2014/main" id="{49313A02-3C90-A41C-5C56-C8FF0148EDE7}"/>
               </a:ext>
             </a:extLst>
           </p:cNvPr>
@@ -23580,8 +23580,8 @@
         </p:nvSpPr>
         <p:spPr>
           <a:xfrm>
-            <a:off x="1871519" y="2498833"/>
-            <a:ext cx="8673296" cy="371676"/>
+            <a:off x="1846597" y="2472230"/>
+            <a:ext cx="8723143" cy="387325"/>
           </a:xfrm>
           <a:prstGeom prst="rect">
             <a:avLst/>
@@ -23598,7 +23598,7 @@
               </a:spcBef>
               <a:buFontTx/>
               <a:buNone/>
-              <a:defRPr sz="2200" b="1">
+              <a:defRPr sz="2000" b="1">
                 <a:solidFill>
                   <a:schemeClr val="accent1">
                     <a:lumMod val="70000"/>
@@ -23622,7 +23622,7 @@
           <p:cNvPr id="8" name="item_1">
             <a:extLst>
               <a:ext uri="{FF2B5EF4-FFF2-40B4-BE49-F238E27FC236}">
-                <a16:creationId xmlns:a16="http://schemas.microsoft.com/office/drawing/2014/main" id="{FAD82D5B-635C-63BC-2210-317ABDA7EF98}"/>
+                <a16:creationId xmlns:a16="http://schemas.microsoft.com/office/drawing/2014/main" id="{2E11E8DE-A092-D11E-F205-A2C897347150}"/>
               </a:ext>
             </a:extLst>
           </p:cNvPr>
@@ -23635,8 +23635,8 @@
         </p:nvSpPr>
         <p:spPr>
           <a:xfrm>
-            <a:off x="1871519" y="2870510"/>
-            <a:ext cx="8673296" cy="892021"/>
+            <a:off x="1846597" y="2859554"/>
+            <a:ext cx="8723143" cy="929580"/>
           </a:xfrm>
           <a:prstGeom prst="rect">
             <a:avLst/>
@@ -23670,7 +23670,7 @@
           <p:cNvPr id="9" name="marker_2">
             <a:extLst>
               <a:ext uri="{FF2B5EF4-FFF2-40B4-BE49-F238E27FC236}">
-                <a16:creationId xmlns:a16="http://schemas.microsoft.com/office/drawing/2014/main" id="{0E726102-CC62-D397-8D39-CDE4722EBFD4}"/>
+                <a16:creationId xmlns:a16="http://schemas.microsoft.com/office/drawing/2014/main" id="{DF0F241E-EEF2-0715-F3A8-D5651C705071}"/>
               </a:ext>
             </a:extLst>
           </p:cNvPr>
@@ -23683,7 +23683,7 @@
         </p:nvSpPr>
         <p:spPr>
           <a:xfrm>
-            <a:off x="1223514" y="4401031"/>
+            <a:off x="1198591" y="4374427"/>
             <a:ext cx="548312" cy="585291"/>
           </a:xfrm>
           <a:prstGeom prst="ellipse">
@@ -23706,7 +23706,7 @@
               </a:spcBef>
               <a:buFontTx/>
               <a:buNone/>
-              <a:defRPr sz="2400" b="1">
+              <a:defRPr sz="2000" b="1">
                 <a:solidFill>
                   <a:schemeClr val="bg1"/>
                 </a:solidFill>
@@ -23728,7 +23728,7 @@
           <p:cNvPr id="10" name="item_2_title">
             <a:extLst>
               <a:ext uri="{FF2B5EF4-FFF2-40B4-BE49-F238E27FC236}">
-                <a16:creationId xmlns:a16="http://schemas.microsoft.com/office/drawing/2014/main" id="{D71FF906-7D61-D55B-7E8E-EA765D212391}"/>
+                <a16:creationId xmlns:a16="http://schemas.microsoft.com/office/drawing/2014/main" id="{38FAD0A4-D3C6-1C5F-0219-989D1F8DA9A1}"/>
               </a:ext>
             </a:extLst>
           </p:cNvPr>
@@ -23741,8 +23741,8 @@
         </p:nvSpPr>
         <p:spPr>
           <a:xfrm>
-            <a:off x="1871519" y="4401030"/>
-            <a:ext cx="8673296" cy="371676"/>
+            <a:off x="1846597" y="4374427"/>
+            <a:ext cx="8723143" cy="387325"/>
           </a:xfrm>
           <a:prstGeom prst="rect">
             <a:avLst/>
@@ -23759,7 +23759,7 @@
               </a:spcBef>
               <a:buFontTx/>
               <a:buNone/>
-              <a:defRPr sz="2200" b="1">
+              <a:defRPr sz="2000" b="1">
                 <a:solidFill>
                   <a:schemeClr val="accent1">
                     <a:lumMod val="70000"/>
@@ -23783,7 +23783,7 @@
           <p:cNvPr id="11" name="item_2">
             <a:extLst>
               <a:ext uri="{FF2B5EF4-FFF2-40B4-BE49-F238E27FC236}">
-                <a16:creationId xmlns:a16="http://schemas.microsoft.com/office/drawing/2014/main" id="{F41BEE4F-A2B8-9ED0-9FF2-E7F9F02121B6}"/>
+                <a16:creationId xmlns:a16="http://schemas.microsoft.com/office/drawing/2014/main" id="{A4A5244F-6E5E-CB55-F4F3-D9C4C007C514}"/>
               </a:ext>
             </a:extLst>
           </p:cNvPr>
@@ -23796,8 +23796,8 @@
         </p:nvSpPr>
         <p:spPr>
           <a:xfrm>
-            <a:off x="1871519" y="4772706"/>
-            <a:ext cx="8673296" cy="892021"/>
+            <a:off x="1846597" y="4761750"/>
+            <a:ext cx="8723143" cy="929580"/>
           </a:xfrm>
           <a:prstGeom prst="rect">
             <a:avLst/>
@@ -23831,7 +23831,7 @@
           <p:cNvPr id="12" name="source">
             <a:extLst>
               <a:ext uri="{FF2B5EF4-FFF2-40B4-BE49-F238E27FC236}">
-                <a16:creationId xmlns:a16="http://schemas.microsoft.com/office/drawing/2014/main" id="{347CBCCC-DC14-2D7C-4C19-CDBE41D49A9B}"/>
+                <a16:creationId xmlns:a16="http://schemas.microsoft.com/office/drawing/2014/main" id="{E5E963AE-EE55-ADC8-BBB6-20D274E1B3B4}"/>
               </a:ext>
             </a:extLst>
           </p:cNvPr>
@@ -23888,7 +23888,7 @@
     </p:spTree>
     <p:extLst>
       <p:ext uri="{BB962C8B-B14F-4D97-AF65-F5344CB8AC3E}">
-        <p14:creationId xmlns:p14="http://schemas.microsoft.com/office/powerpoint/2010/main" val="2397881066"/>
+        <p14:creationId xmlns:p14="http://schemas.microsoft.com/office/powerpoint/2010/main" val="3798801477"/>
       </p:ext>
     </p:extLst>
   </p:cSld>
@@ -23957,7 +23957,7 @@
           <a:bodyPr/>
           <a:lstStyle/>
           <a:p>
-            <a:fld id="{1146AB1F-C91F-4F0F-9868-5252CDCD6051}" type="datetimeFigureOut">
+            <a:fld id="{A9C3E1C2-504C-4CFF-A37A-AE4693906186}" type="datetimeFigureOut">
               <a:rPr lang="en-US" smtClean="0"/>
               <a:t>10/3/2026</a:t>
             </a:fld>
@@ -23999,7 +23999,7 @@
           <a:bodyPr/>
           <a:lstStyle/>
           <a:p>
-            <a:fld id="{FE1B144C-6E1C-47C6-9306-1DC2A92756EB}" type="slidenum">
+            <a:fld id="{0CAC26E6-90F8-49CB-BE00-E3E555820112}" type="slidenum">
               <a:rPr lang="en-US" smtClean="0"/>
               <a:t>‹#›</a:t>
             </a:fld>
@@ -24012,7 +24012,7 @@
           <p:cNvPr id="6" name="kpi_value_1">
             <a:extLst>
               <a:ext uri="{FF2B5EF4-FFF2-40B4-BE49-F238E27FC236}">
-                <a16:creationId xmlns:a16="http://schemas.microsoft.com/office/drawing/2014/main" id="{A452EF83-2908-4F98-D364-A2A3CFCEC775}"/>
+                <a16:creationId xmlns:a16="http://schemas.microsoft.com/office/drawing/2014/main" id="{F2A6299F-31C1-2643-BFBB-827192565D3E}"/>
               </a:ext>
             </a:extLst>
           </p:cNvPr>
@@ -24025,8 +24025,8 @@
         </p:nvSpPr>
         <p:spPr>
           <a:xfrm>
-            <a:off x="1223514" y="2498833"/>
-            <a:ext cx="4655666" cy="1962854"/>
+            <a:off x="1198591" y="2472230"/>
+            <a:ext cx="4705512" cy="1995843"/>
           </a:xfrm>
         </p:spPr>
         <p:txBody>
@@ -24064,7 +24064,7 @@
           <p:cNvPr id="7" name="kpi_label_1">
             <a:extLst>
               <a:ext uri="{FF2B5EF4-FFF2-40B4-BE49-F238E27FC236}">
-                <a16:creationId xmlns:a16="http://schemas.microsoft.com/office/drawing/2014/main" id="{04261ED9-CB06-91B4-6437-1F857945E18A}"/>
+                <a16:creationId xmlns:a16="http://schemas.microsoft.com/office/drawing/2014/main" id="{92B288CC-1453-06BA-5B5F-3D09E915B66C}"/>
               </a:ext>
             </a:extLst>
           </p:cNvPr>
@@ -24077,209 +24077,8 @@
         </p:nvSpPr>
         <p:spPr>
           <a:xfrm>
-            <a:off x="1223514" y="4525005"/>
-            <a:ext cx="4655666" cy="1139722"/>
-          </a:xfrm>
-          <a:prstGeom prst="rect">
-            <a:avLst/>
-          </a:prstGeom>
-        </p:spPr>
-        <p:txBody>
-          <a:bodyPr wrap="square" anchor="t">
-            <a:noAutofit/>
-          </a:bodyPr>
-          <a:lstStyle>
-            <a:lvl1pPr marL="0" indent="0">
-              <a:spcBef>
-                <a:spcPts val="0"/>
-              </a:spcBef>
-              <a:buFontTx/>
-              <a:buNone/>
-              <a:defRPr sz="1800"/>
-            </a:lvl1pPr>
-          </a:lstStyle>
-          <a:p>
-            <a:pPr lvl="0"/>
-            <a:r>
-              <a:rPr lang="en-US"/>
-              <a:t>kpi_label_1</a:t>
-            </a:r>
-          </a:p>
-        </p:txBody>
-      </p:sp>
-      <p:sp>
-        <p:nvSpPr>
-          <p:cNvPr id="8" name="quote">
-            <a:extLst>
-              <a:ext uri="{FF2B5EF4-FFF2-40B4-BE49-F238E27FC236}">
-                <a16:creationId xmlns:a16="http://schemas.microsoft.com/office/drawing/2014/main" id="{536D283D-A789-790F-28FF-376C564166E1}"/>
-              </a:ext>
-            </a:extLst>
-          </p:cNvPr>
-          <p:cNvSpPr>
-            <a:spLocks noGrp="1"/>
-          </p:cNvSpPr>
-          <p:nvPr>
-            <p:ph type="body" sz="quarter" idx="15" hasCustomPrompt="1"/>
-          </p:nvPr>
-        </p:nvSpPr>
-        <p:spPr>
-          <a:xfrm>
-            <a:off x="1223514" y="2498834"/>
-            <a:ext cx="4655666" cy="2469397"/>
-          </a:xfrm>
-          <a:prstGeom prst="rect">
-            <a:avLst/>
-          </a:prstGeom>
-        </p:spPr>
-        <p:txBody>
-          <a:bodyPr wrap="square" anchor="t">
-            <a:noAutofit/>
-          </a:bodyPr>
-          <a:lstStyle>
-            <a:lvl1pPr marL="0" indent="0">
-              <a:spcBef>
-                <a:spcPts val="0"/>
-              </a:spcBef>
-              <a:buFontTx/>
-              <a:buNone/>
-              <a:defRPr sz="2400" i="1">
-                <a:latin typeface="+mj-lt"/>
-              </a:defRPr>
-            </a:lvl1pPr>
-          </a:lstStyle>
-          <a:p>
-            <a:pPr lvl="0"/>
-            <a:r>
-              <a:rPr lang="en-US"/>
-              <a:t>quote</a:t>
-            </a:r>
-          </a:p>
-        </p:txBody>
-      </p:sp>
-      <p:sp>
-        <p:nvSpPr>
-          <p:cNvPr id="9" name="attribution">
-            <a:extLst>
-              <a:ext uri="{FF2B5EF4-FFF2-40B4-BE49-F238E27FC236}">
-                <a16:creationId xmlns:a16="http://schemas.microsoft.com/office/drawing/2014/main" id="{EF32F87D-A661-2140-0B3E-DC2189665EFB}"/>
-              </a:ext>
-            </a:extLst>
-          </p:cNvPr>
-          <p:cNvSpPr>
-            <a:spLocks noGrp="1"/>
-          </p:cNvSpPr>
-          <p:nvPr>
-            <p:ph type="body" sz="quarter" idx="16" hasCustomPrompt="1"/>
-          </p:nvPr>
-        </p:nvSpPr>
-        <p:spPr>
-          <a:xfrm>
-            <a:off x="1223514" y="5031549"/>
-            <a:ext cx="4655666" cy="633179"/>
-          </a:xfrm>
-          <a:prstGeom prst="rect">
-            <a:avLst/>
-          </a:prstGeom>
-        </p:spPr>
-        <p:txBody>
-          <a:bodyPr wrap="square" anchor="t">
-            <a:noAutofit/>
-          </a:bodyPr>
-          <a:lstStyle>
-            <a:lvl1pPr marL="0" indent="0">
-              <a:spcBef>
-                <a:spcPts val="0"/>
-              </a:spcBef>
-              <a:buFontTx/>
-              <a:buNone/>
-              <a:defRPr sz="1400"/>
-            </a:lvl1pPr>
-          </a:lstStyle>
-          <a:p>
-            <a:pPr lvl="0"/>
-            <a:r>
-              <a:rPr lang="en-US"/>
-              <a:t>attribution</a:t>
-            </a:r>
-          </a:p>
-        </p:txBody>
-      </p:sp>
-      <p:sp>
-        <p:nvSpPr>
-          <p:cNvPr id="10" name="item_1_title">
-            <a:extLst>
-              <a:ext uri="{FF2B5EF4-FFF2-40B4-BE49-F238E27FC236}">
-                <a16:creationId xmlns:a16="http://schemas.microsoft.com/office/drawing/2014/main" id="{9212405E-3023-26B8-E712-0C3EAD27A1D0}"/>
-              </a:ext>
-            </a:extLst>
-          </p:cNvPr>
-          <p:cNvSpPr>
-            <a:spLocks noGrp="1"/>
-          </p:cNvSpPr>
-          <p:nvPr>
-            <p:ph type="body" sz="quarter" idx="17" hasCustomPrompt="1"/>
-          </p:nvPr>
-        </p:nvSpPr>
-        <p:spPr>
-          <a:xfrm>
-            <a:off x="6467369" y="2286001"/>
-            <a:ext cx="4276832" cy="1056341"/>
-          </a:xfrm>
-          <a:prstGeom prst="rect">
-            <a:avLst/>
-          </a:prstGeom>
-        </p:spPr>
-        <p:txBody>
-          <a:bodyPr wrap="square" anchor="t">
-            <a:noAutofit/>
-          </a:bodyPr>
-          <a:lstStyle>
-            <a:lvl1pPr marL="0" indent="0">
-              <a:spcBef>
-                <a:spcPts val="0"/>
-              </a:spcBef>
-              <a:buFontTx/>
-              <a:buNone/>
-              <a:defRPr sz="2200" b="1">
-                <a:solidFill>
-                  <a:schemeClr val="accent1">
-                    <a:lumMod val="70000"/>
-                  </a:schemeClr>
-                </a:solidFill>
-                <a:latin typeface="+mj-lt"/>
-              </a:defRPr>
-            </a:lvl1pPr>
-          </a:lstStyle>
-          <a:p>
-            <a:pPr lvl="0"/>
-            <a:r>
-              <a:rPr lang="en-US"/>
-              <a:t>item_1_title</a:t>
-            </a:r>
-          </a:p>
-        </p:txBody>
-      </p:sp>
-      <p:sp>
-        <p:nvSpPr>
-          <p:cNvPr id="11" name="item_1">
-            <a:extLst>
-              <a:ext uri="{FF2B5EF4-FFF2-40B4-BE49-F238E27FC236}">
-                <a16:creationId xmlns:a16="http://schemas.microsoft.com/office/drawing/2014/main" id="{6137533D-E723-2D97-973F-ECAFF884802E}"/>
-              </a:ext>
-            </a:extLst>
-          </p:cNvPr>
-          <p:cNvSpPr>
-            <a:spLocks noGrp="1"/>
-          </p:cNvSpPr>
-          <p:nvPr>
-            <p:ph type="body" sz="quarter" idx="18" hasCustomPrompt="1"/>
-          </p:nvPr>
-        </p:nvSpPr>
-        <p:spPr>
-          <a:xfrm>
-            <a:off x="6467369" y="3342342"/>
-            <a:ext cx="4276832" cy="2535219"/>
+            <a:off x="1198591" y="4532455"/>
+            <a:ext cx="4705512" cy="1158877"/>
           </a:xfrm>
           <a:prstGeom prst="rect">
             <a:avLst/>
@@ -24303,6 +24102,207 @@
             <a:pPr lvl="0"/>
             <a:r>
               <a:rPr lang="en-US"/>
+              <a:t>kpi_label_1</a:t>
+            </a:r>
+          </a:p>
+        </p:txBody>
+      </p:sp>
+      <p:sp>
+        <p:nvSpPr>
+          <p:cNvPr id="8" name="quote">
+            <a:extLst>
+              <a:ext uri="{FF2B5EF4-FFF2-40B4-BE49-F238E27FC236}">
+                <a16:creationId xmlns:a16="http://schemas.microsoft.com/office/drawing/2014/main" id="{B133181F-A5C1-7879-2699-EB6FB41D1B9E}"/>
+              </a:ext>
+            </a:extLst>
+          </p:cNvPr>
+          <p:cNvSpPr>
+            <a:spLocks noGrp="1"/>
+          </p:cNvSpPr>
+          <p:nvPr>
+            <p:ph type="body" sz="quarter" idx="15" hasCustomPrompt="1"/>
+          </p:nvPr>
+        </p:nvSpPr>
+        <p:spPr>
+          <a:xfrm>
+            <a:off x="1198591" y="2472230"/>
+            <a:ext cx="4705512" cy="2510899"/>
+          </a:xfrm>
+          <a:prstGeom prst="rect">
+            <a:avLst/>
+          </a:prstGeom>
+        </p:spPr>
+        <p:txBody>
+          <a:bodyPr wrap="square" anchor="t">
+            <a:noAutofit/>
+          </a:bodyPr>
+          <a:lstStyle>
+            <a:lvl1pPr marL="0" indent="0">
+              <a:spcBef>
+                <a:spcPts val="0"/>
+              </a:spcBef>
+              <a:buFontTx/>
+              <a:buNone/>
+              <a:defRPr sz="2000" i="1">
+                <a:latin typeface="+mj-lt"/>
+              </a:defRPr>
+            </a:lvl1pPr>
+          </a:lstStyle>
+          <a:p>
+            <a:pPr lvl="0"/>
+            <a:r>
+              <a:rPr lang="en-US"/>
+              <a:t>quote</a:t>
+            </a:r>
+          </a:p>
+        </p:txBody>
+      </p:sp>
+      <p:sp>
+        <p:nvSpPr>
+          <p:cNvPr id="9" name="attribution">
+            <a:extLst>
+              <a:ext uri="{FF2B5EF4-FFF2-40B4-BE49-F238E27FC236}">
+                <a16:creationId xmlns:a16="http://schemas.microsoft.com/office/drawing/2014/main" id="{3D4A8D43-E50F-CE52-5236-FAFF995AFC02}"/>
+              </a:ext>
+            </a:extLst>
+          </p:cNvPr>
+          <p:cNvSpPr>
+            <a:spLocks noGrp="1"/>
+          </p:cNvSpPr>
+          <p:nvPr>
+            <p:ph type="body" sz="quarter" idx="16" hasCustomPrompt="1"/>
+          </p:nvPr>
+        </p:nvSpPr>
+        <p:spPr>
+          <a:xfrm>
+            <a:off x="1198591" y="5047511"/>
+            <a:ext cx="4705512" cy="643820"/>
+          </a:xfrm>
+          <a:prstGeom prst="rect">
+            <a:avLst/>
+          </a:prstGeom>
+        </p:spPr>
+        <p:txBody>
+          <a:bodyPr wrap="square" anchor="t">
+            <a:noAutofit/>
+          </a:bodyPr>
+          <a:lstStyle>
+            <a:lvl1pPr marL="0" indent="0">
+              <a:spcBef>
+                <a:spcPts val="0"/>
+              </a:spcBef>
+              <a:buFontTx/>
+              <a:buNone/>
+              <a:defRPr sz="2000"/>
+            </a:lvl1pPr>
+          </a:lstStyle>
+          <a:p>
+            <a:pPr lvl="0"/>
+            <a:r>
+              <a:rPr lang="en-US"/>
+              <a:t>attribution</a:t>
+            </a:r>
+          </a:p>
+        </p:txBody>
+      </p:sp>
+      <p:sp>
+        <p:nvSpPr>
+          <p:cNvPr id="10" name="item_1_title">
+            <a:extLst>
+              <a:ext uri="{FF2B5EF4-FFF2-40B4-BE49-F238E27FC236}">
+                <a16:creationId xmlns:a16="http://schemas.microsoft.com/office/drawing/2014/main" id="{60DA38DE-4756-E139-3C20-A9AB1120E5C9}"/>
+              </a:ext>
+            </a:extLst>
+          </p:cNvPr>
+          <p:cNvSpPr>
+            <a:spLocks noGrp="1"/>
+          </p:cNvSpPr>
+          <p:nvPr>
+            <p:ph type="body" sz="quarter" idx="17" hasCustomPrompt="1"/>
+          </p:nvPr>
+        </p:nvSpPr>
+        <p:spPr>
+          <a:xfrm>
+            <a:off x="6467369" y="2286001"/>
+            <a:ext cx="4276832" cy="1056341"/>
+          </a:xfrm>
+          <a:prstGeom prst="rect">
+            <a:avLst/>
+          </a:prstGeom>
+        </p:spPr>
+        <p:txBody>
+          <a:bodyPr wrap="square" anchor="t">
+            <a:noAutofit/>
+          </a:bodyPr>
+          <a:lstStyle>
+            <a:lvl1pPr marL="0" indent="0">
+              <a:spcBef>
+                <a:spcPts val="0"/>
+              </a:spcBef>
+              <a:buFontTx/>
+              <a:buNone/>
+              <a:defRPr sz="2000" b="1">
+                <a:solidFill>
+                  <a:schemeClr val="accent1">
+                    <a:lumMod val="70000"/>
+                  </a:schemeClr>
+                </a:solidFill>
+                <a:latin typeface="+mj-lt"/>
+              </a:defRPr>
+            </a:lvl1pPr>
+          </a:lstStyle>
+          <a:p>
+            <a:pPr lvl="0"/>
+            <a:r>
+              <a:rPr lang="en-US"/>
+              <a:t>item_1_title</a:t>
+            </a:r>
+          </a:p>
+        </p:txBody>
+      </p:sp>
+      <p:sp>
+        <p:nvSpPr>
+          <p:cNvPr id="11" name="item_1">
+            <a:extLst>
+              <a:ext uri="{FF2B5EF4-FFF2-40B4-BE49-F238E27FC236}">
+                <a16:creationId xmlns:a16="http://schemas.microsoft.com/office/drawing/2014/main" id="{7C65B62F-EDD6-C8A4-057A-0E0D19E53E6B}"/>
+              </a:ext>
+            </a:extLst>
+          </p:cNvPr>
+          <p:cNvSpPr>
+            <a:spLocks noGrp="1"/>
+          </p:cNvSpPr>
+          <p:nvPr>
+            <p:ph type="body" sz="quarter" idx="18" hasCustomPrompt="1"/>
+          </p:nvPr>
+        </p:nvSpPr>
+        <p:spPr>
+          <a:xfrm>
+            <a:off x="6467369" y="3342342"/>
+            <a:ext cx="4276832" cy="2535219"/>
+          </a:xfrm>
+          <a:prstGeom prst="rect">
+            <a:avLst/>
+          </a:prstGeom>
+        </p:spPr>
+        <p:txBody>
+          <a:bodyPr wrap="square" anchor="t">
+            <a:noAutofit/>
+          </a:bodyPr>
+          <a:lstStyle>
+            <a:lvl1pPr marL="0" indent="0">
+              <a:spcBef>
+                <a:spcPts val="0"/>
+              </a:spcBef>
+              <a:buFontTx/>
+              <a:buNone/>
+              <a:defRPr sz="2000"/>
+            </a:lvl1pPr>
+          </a:lstStyle>
+          <a:p>
+            <a:pPr lvl="0"/>
+            <a:r>
+              <a:rPr lang="en-US"/>
               <a:t>item_1</a:t>
             </a:r>
           </a:p>
@@ -24313,7 +24313,7 @@
           <p:cNvPr id="12" name="source">
             <a:extLst>
               <a:ext uri="{FF2B5EF4-FFF2-40B4-BE49-F238E27FC236}">
-                <a16:creationId xmlns:a16="http://schemas.microsoft.com/office/drawing/2014/main" id="{6AEFEC0F-422F-FF90-94A1-44AF58DDD964}"/>
+                <a16:creationId xmlns:a16="http://schemas.microsoft.com/office/drawing/2014/main" id="{5960A037-B165-3A50-A539-0F48061CB9DC}"/>
               </a:ext>
             </a:extLst>
           </p:cNvPr>
@@ -24370,7 +24370,7 @@
     </p:spTree>
     <p:extLst>
       <p:ext uri="{BB962C8B-B14F-4D97-AF65-F5344CB8AC3E}">
-        <p14:creationId xmlns:p14="http://schemas.microsoft.com/office/powerpoint/2010/main" val="1151008087"/>
+        <p14:creationId xmlns:p14="http://schemas.microsoft.com/office/powerpoint/2010/main" val="3888859651"/>
       </p:ext>
     </p:extLst>
   </p:cSld>
@@ -24439,7 +24439,7 @@
           <a:bodyPr/>
           <a:lstStyle/>
           <a:p>
-            <a:fld id="{1146AB1F-C91F-4F0F-9868-5252CDCD6051}" type="datetimeFigureOut">
+            <a:fld id="{A9C3E1C2-504C-4CFF-A37A-AE4693906186}" type="datetimeFigureOut">
               <a:rPr lang="en-US" smtClean="0"/>
               <a:t>10/3/2026</a:t>
             </a:fld>
@@ -24481,7 +24481,7 @@
           <a:bodyPr/>
           <a:lstStyle/>
           <a:p>
-            <a:fld id="{FE1B144C-6E1C-47C6-9306-1DC2A92756EB}" type="slidenum">
+            <a:fld id="{0CAC26E6-90F8-49CB-BE00-E3E555820112}" type="slidenum">
               <a:rPr lang="en-US" smtClean="0"/>
               <a:t>‹#›</a:t>
             </a:fld>
@@ -24494,7 +24494,7 @@
           <p:cNvPr id="6" name="marker_1">
             <a:extLst>
               <a:ext uri="{FF2B5EF4-FFF2-40B4-BE49-F238E27FC236}">
-                <a16:creationId xmlns:a16="http://schemas.microsoft.com/office/drawing/2014/main" id="{04EC0923-B002-B28D-701A-336D046EDC65}"/>
+                <a16:creationId xmlns:a16="http://schemas.microsoft.com/office/drawing/2014/main" id="{B5B8B31B-DFBE-297F-8CEB-B2BC12562452}"/>
               </a:ext>
             </a:extLst>
           </p:cNvPr>
@@ -24530,7 +24530,7 @@
               </a:spcBef>
               <a:buFontTx/>
               <a:buNone/>
-              <a:defRPr sz="2400" b="1">
+              <a:defRPr sz="2000" b="1">
                 <a:solidFill>
                   <a:schemeClr val="bg1"/>
                 </a:solidFill>
@@ -24552,7 +24552,7 @@
           <p:cNvPr id="7" name="item_1">
             <a:extLst>
               <a:ext uri="{FF2B5EF4-FFF2-40B4-BE49-F238E27FC236}">
-                <a16:creationId xmlns:a16="http://schemas.microsoft.com/office/drawing/2014/main" id="{DB1697FC-87BB-F408-33BF-5C6C774195E0}"/>
+                <a16:creationId xmlns:a16="http://schemas.microsoft.com/office/drawing/2014/main" id="{37F52056-B13F-4B3D-AF62-3FA3D987D52C}"/>
               </a:ext>
             </a:extLst>
           </p:cNvPr>
@@ -24600,7 +24600,7 @@
           <p:cNvPr id="8" name="marker_2">
             <a:extLst>
               <a:ext uri="{FF2B5EF4-FFF2-40B4-BE49-F238E27FC236}">
-                <a16:creationId xmlns:a16="http://schemas.microsoft.com/office/drawing/2014/main" id="{012D28B0-01AF-9BD5-4B06-39070E86D31D}"/>
+                <a16:creationId xmlns:a16="http://schemas.microsoft.com/office/drawing/2014/main" id="{EE14A26F-8993-F799-2AB2-4A59580B493D}"/>
               </a:ext>
             </a:extLst>
           </p:cNvPr>
@@ -24636,7 +24636,7 @@
               </a:spcBef>
               <a:buFontTx/>
               <a:buNone/>
-              <a:defRPr sz="2400" b="1">
+              <a:defRPr sz="2000" b="1">
                 <a:solidFill>
                   <a:schemeClr val="bg1"/>
                 </a:solidFill>
@@ -24658,7 +24658,7 @@
           <p:cNvPr id="9" name="item_2">
             <a:extLst>
               <a:ext uri="{FF2B5EF4-FFF2-40B4-BE49-F238E27FC236}">
-                <a16:creationId xmlns:a16="http://schemas.microsoft.com/office/drawing/2014/main" id="{83460FE7-8572-8867-79B7-ED67FF9979D1}"/>
+                <a16:creationId xmlns:a16="http://schemas.microsoft.com/office/drawing/2014/main" id="{B703902E-DCB7-9A20-3EEE-2CF8468E760F}"/>
               </a:ext>
             </a:extLst>
           </p:cNvPr>
@@ -24706,7 +24706,7 @@
           <p:cNvPr id="10" name="marker_3">
             <a:extLst>
               <a:ext uri="{FF2B5EF4-FFF2-40B4-BE49-F238E27FC236}">
-                <a16:creationId xmlns:a16="http://schemas.microsoft.com/office/drawing/2014/main" id="{6699F00F-35F9-56EA-36BA-D710F71F3DA9}"/>
+                <a16:creationId xmlns:a16="http://schemas.microsoft.com/office/drawing/2014/main" id="{33E22C9A-105B-28D2-5766-38670E870693}"/>
               </a:ext>
             </a:extLst>
           </p:cNvPr>
@@ -24742,7 +24742,7 @@
               </a:spcBef>
               <a:buFontTx/>
               <a:buNone/>
-              <a:defRPr sz="2400" b="1">
+              <a:defRPr sz="2000" b="1">
                 <a:solidFill>
                   <a:schemeClr val="bg1"/>
                 </a:solidFill>
@@ -24764,7 +24764,7 @@
           <p:cNvPr id="11" name="item_3">
             <a:extLst>
               <a:ext uri="{FF2B5EF4-FFF2-40B4-BE49-F238E27FC236}">
-                <a16:creationId xmlns:a16="http://schemas.microsoft.com/office/drawing/2014/main" id="{052D42A4-68A2-CE26-3FD6-353B7C7CD069}"/>
+                <a16:creationId xmlns:a16="http://schemas.microsoft.com/office/drawing/2014/main" id="{27F5F45C-056A-55BF-0A8A-8B222EBACD7B}"/>
               </a:ext>
             </a:extLst>
           </p:cNvPr>
@@ -24812,7 +24812,7 @@
           <p:cNvPr id="12" name="marker_4">
             <a:extLst>
               <a:ext uri="{FF2B5EF4-FFF2-40B4-BE49-F238E27FC236}">
-                <a16:creationId xmlns:a16="http://schemas.microsoft.com/office/drawing/2014/main" id="{87ECBFB1-1A6D-A05E-F695-A416476F4EF8}"/>
+                <a16:creationId xmlns:a16="http://schemas.microsoft.com/office/drawing/2014/main" id="{7EB2956E-6626-867B-DBA4-FDB9BBD4068C}"/>
               </a:ext>
             </a:extLst>
           </p:cNvPr>
@@ -24848,7 +24848,7 @@
               </a:spcBef>
               <a:buFontTx/>
               <a:buNone/>
-              <a:defRPr sz="2400" b="1">
+              <a:defRPr sz="2000" b="1">
                 <a:solidFill>
                   <a:schemeClr val="bg1"/>
                 </a:solidFill>
@@ -24870,7 +24870,7 @@
           <p:cNvPr id="13" name="item_4">
             <a:extLst>
               <a:ext uri="{FF2B5EF4-FFF2-40B4-BE49-F238E27FC236}">
-                <a16:creationId xmlns:a16="http://schemas.microsoft.com/office/drawing/2014/main" id="{52B1CB1D-55DD-A90F-82B0-3290EBBF2FAF}"/>
+                <a16:creationId xmlns:a16="http://schemas.microsoft.com/office/drawing/2014/main" id="{55609973-97F1-2841-6828-ECEB07ACE656}"/>
               </a:ext>
             </a:extLst>
           </p:cNvPr>
@@ -24918,7 +24918,7 @@
           <p:cNvPr id="14" name="source">
             <a:extLst>
               <a:ext uri="{FF2B5EF4-FFF2-40B4-BE49-F238E27FC236}">
-                <a16:creationId xmlns:a16="http://schemas.microsoft.com/office/drawing/2014/main" id="{3DABBBC4-E043-C3B9-6D46-A7335EA6829A}"/>
+                <a16:creationId xmlns:a16="http://schemas.microsoft.com/office/drawing/2014/main" id="{51D9B809-E9C8-5332-612A-3DC1C7C1E1CA}"/>
               </a:ext>
             </a:extLst>
           </p:cNvPr>
@@ -24975,7 +24975,7 @@
     </p:spTree>
     <p:extLst>
       <p:ext uri="{BB962C8B-B14F-4D97-AF65-F5344CB8AC3E}">
-        <p14:creationId xmlns:p14="http://schemas.microsoft.com/office/powerpoint/2010/main" val="795622561"/>
+        <p14:creationId xmlns:p14="http://schemas.microsoft.com/office/powerpoint/2010/main" val="400105792"/>
       </p:ext>
     </p:extLst>
   </p:cSld>
@@ -25044,7 +25044,7 @@
           <a:bodyPr/>
           <a:lstStyle/>
           <a:p>
-            <a:fld id="{1146AB1F-C91F-4F0F-9868-5252CDCD6051}" type="datetimeFigureOut">
+            <a:fld id="{A9C3E1C2-504C-4CFF-A37A-AE4693906186}" type="datetimeFigureOut">
               <a:rPr lang="en-US" smtClean="0"/>
               <a:t>10/3/2026</a:t>
             </a:fld>
@@ -25086,7 +25086,7 @@
           <a:bodyPr/>
           <a:lstStyle/>
           <a:p>
-            <a:fld id="{FE1B144C-6E1C-47C6-9306-1DC2A92756EB}" type="slidenum">
+            <a:fld id="{0CAC26E6-90F8-49CB-BE00-E3E555820112}" type="slidenum">
               <a:rPr lang="en-US" smtClean="0"/>
               <a:t>‹#›</a:t>
             </a:fld>
@@ -25099,7 +25099,7 @@
           <p:cNvPr id="6" name="decisions_title">
             <a:extLst>
               <a:ext uri="{FF2B5EF4-FFF2-40B4-BE49-F238E27FC236}">
-                <a16:creationId xmlns:a16="http://schemas.microsoft.com/office/drawing/2014/main" id="{DCCC9251-72F9-C686-3CD8-EE343CAAC36E}"/>
+                <a16:creationId xmlns:a16="http://schemas.microsoft.com/office/drawing/2014/main" id="{BA70BBF0-E0B2-51C3-0DC8-A36B5635E743}"/>
               </a:ext>
             </a:extLst>
           </p:cNvPr>
@@ -25112,8 +25112,8 @@
         </p:nvSpPr>
         <p:spPr>
           <a:xfrm>
-            <a:off x="1223514" y="4869263"/>
-            <a:ext cx="2128447" cy="795464"/>
+            <a:off x="1198591" y="4842659"/>
+            <a:ext cx="2352756" cy="848672"/>
           </a:xfrm>
         </p:spPr>
         <p:txBody>
@@ -25151,7 +25151,7 @@
           <p:cNvPr id="7" name="decisions">
             <a:extLst>
               <a:ext uri="{FF2B5EF4-FFF2-40B4-BE49-F238E27FC236}">
-                <a16:creationId xmlns:a16="http://schemas.microsoft.com/office/drawing/2014/main" id="{65DE4A7E-B4A0-3CDD-A3DA-4DA4E074B122}"/>
+                <a16:creationId xmlns:a16="http://schemas.microsoft.com/office/drawing/2014/main" id="{8378DAB0-2768-03B8-B8FA-AEC43CB758B7}"/>
               </a:ext>
             </a:extLst>
           </p:cNvPr>
@@ -25164,8 +25164,8 @@
         </p:nvSpPr>
         <p:spPr>
           <a:xfrm>
-            <a:off x="3847935" y="4869263"/>
-            <a:ext cx="6696881" cy="795464"/>
+            <a:off x="3648549" y="4842659"/>
+            <a:ext cx="6921191" cy="848672"/>
           </a:xfrm>
           <a:prstGeom prst="rect">
             <a:avLst/>
@@ -25177,7 +25177,7 @@
           </a:bodyPr>
           <a:lstStyle>
             <a:lvl1pPr>
-              <a:defRPr sz="1800"/>
+              <a:defRPr sz="2000"/>
             </a:lvl1pPr>
           </a:lstStyle>
           <a:p>
@@ -25194,7 +25194,7 @@
           <p:cNvPr id="8" name="item_1_title">
             <a:extLst>
               <a:ext uri="{FF2B5EF4-FFF2-40B4-BE49-F238E27FC236}">
-                <a16:creationId xmlns:a16="http://schemas.microsoft.com/office/drawing/2014/main" id="{AEA135B9-7238-67E3-43B8-7FF11D713798}"/>
+                <a16:creationId xmlns:a16="http://schemas.microsoft.com/office/drawing/2014/main" id="{FB6CDB27-63CF-AFC2-A225-089FD2F20636}"/>
               </a:ext>
             </a:extLst>
           </p:cNvPr>
@@ -25207,8 +25207,8 @@
         </p:nvSpPr>
         <p:spPr>
           <a:xfrm>
-            <a:off x="1223514" y="2498834"/>
-            <a:ext cx="2708328" cy="508609"/>
+            <a:off x="1198592" y="2472229"/>
+            <a:ext cx="2758175" cy="524258"/>
           </a:xfrm>
           <a:prstGeom prst="rect">
             <a:avLst/>
@@ -25225,7 +25225,7 @@
               </a:spcBef>
               <a:buFontTx/>
               <a:buNone/>
-              <a:defRPr sz="2200" b="1">
+              <a:defRPr sz="2000" b="1">
                 <a:solidFill>
                   <a:schemeClr val="accent1">
                     <a:lumMod val="70000"/>
@@ -25249,7 +25249,7 @@
           <p:cNvPr id="9" name="item_1">
             <a:extLst>
               <a:ext uri="{FF2B5EF4-FFF2-40B4-BE49-F238E27FC236}">
-                <a16:creationId xmlns:a16="http://schemas.microsoft.com/office/drawing/2014/main" id="{A8F93BBC-54A0-DBBB-6278-55CED0C3F7C4}"/>
+                <a16:creationId xmlns:a16="http://schemas.microsoft.com/office/drawing/2014/main" id="{671F9E42-CB4F-5E81-3CA3-FE54CA66504C}"/>
               </a:ext>
             </a:extLst>
           </p:cNvPr>
@@ -25262,8 +25262,8 @@
         </p:nvSpPr>
         <p:spPr>
           <a:xfrm>
-            <a:off x="1223514" y="3007443"/>
-            <a:ext cx="2708328" cy="1220661"/>
+            <a:off x="1198592" y="2996487"/>
+            <a:ext cx="2758175" cy="1258220"/>
           </a:xfrm>
           <a:prstGeom prst="rect">
             <a:avLst/>
@@ -25297,7 +25297,7 @@
           <p:cNvPr id="10" name="item_2_title">
             <a:extLst>
               <a:ext uri="{FF2B5EF4-FFF2-40B4-BE49-F238E27FC236}">
-                <a16:creationId xmlns:a16="http://schemas.microsoft.com/office/drawing/2014/main" id="{094CACDC-03D1-ABFB-CE53-6739052FD972}"/>
+                <a16:creationId xmlns:a16="http://schemas.microsoft.com/office/drawing/2014/main" id="{89C92736-CC36-191C-3394-89C5A5B18870}"/>
               </a:ext>
             </a:extLst>
           </p:cNvPr>
@@ -25310,8 +25310,8 @@
         </p:nvSpPr>
         <p:spPr>
           <a:xfrm>
-            <a:off x="4530001" y="2498834"/>
-            <a:ext cx="2708328" cy="508609"/>
+            <a:off x="4505078" y="2472229"/>
+            <a:ext cx="2758175" cy="524258"/>
           </a:xfrm>
           <a:prstGeom prst="rect">
             <a:avLst/>
@@ -25328,7 +25328,7 @@
               </a:spcBef>
               <a:buFontTx/>
               <a:buNone/>
-              <a:defRPr sz="2200" b="1">
+              <a:defRPr sz="2000" b="1">
                 <a:solidFill>
                   <a:schemeClr val="accent1">
                     <a:lumMod val="70000"/>
@@ -25352,7 +25352,7 @@
           <p:cNvPr id="11" name="item_2">
             <a:extLst>
               <a:ext uri="{FF2B5EF4-FFF2-40B4-BE49-F238E27FC236}">
-                <a16:creationId xmlns:a16="http://schemas.microsoft.com/office/drawing/2014/main" id="{BF572DF8-6C19-8BA1-E43B-743CEAB6EB20}"/>
+                <a16:creationId xmlns:a16="http://schemas.microsoft.com/office/drawing/2014/main" id="{129590E7-6CFE-589E-80BF-81062D20F6AA}"/>
               </a:ext>
             </a:extLst>
           </p:cNvPr>
@@ -25365,8 +25365,8 @@
         </p:nvSpPr>
         <p:spPr>
           <a:xfrm>
-            <a:off x="4530001" y="3007443"/>
-            <a:ext cx="2708328" cy="1220661"/>
+            <a:off x="4505078" y="2996487"/>
+            <a:ext cx="2758175" cy="1258220"/>
           </a:xfrm>
           <a:prstGeom prst="rect">
             <a:avLst/>
@@ -25400,7 +25400,7 @@
           <p:cNvPr id="12" name="item_3_title">
             <a:extLst>
               <a:ext uri="{FF2B5EF4-FFF2-40B4-BE49-F238E27FC236}">
-                <a16:creationId xmlns:a16="http://schemas.microsoft.com/office/drawing/2014/main" id="{3F427B6A-24A2-544D-8068-6B595CF3DFDE}"/>
+                <a16:creationId xmlns:a16="http://schemas.microsoft.com/office/drawing/2014/main" id="{3B60EE8E-31BA-9750-7242-936E63D66BA1}"/>
               </a:ext>
             </a:extLst>
           </p:cNvPr>
@@ -25413,8 +25413,8 @@
         </p:nvSpPr>
         <p:spPr>
           <a:xfrm>
-            <a:off x="7836487" y="2498834"/>
-            <a:ext cx="2708328" cy="508609"/>
+            <a:off x="7811565" y="2472229"/>
+            <a:ext cx="2758175" cy="524258"/>
           </a:xfrm>
           <a:prstGeom prst="rect">
             <a:avLst/>
@@ -25431,7 +25431,7 @@
               </a:spcBef>
               <a:buFontTx/>
               <a:buNone/>
-              <a:defRPr sz="2200" b="1">
+              <a:defRPr sz="2000" b="1">
                 <a:solidFill>
                   <a:schemeClr val="accent1">
                     <a:lumMod val="70000"/>
@@ -25455,7 +25455,7 @@
           <p:cNvPr id="13" name="item_3">
             <a:extLst>
               <a:ext uri="{FF2B5EF4-FFF2-40B4-BE49-F238E27FC236}">
-                <a16:creationId xmlns:a16="http://schemas.microsoft.com/office/drawing/2014/main" id="{CFBA55D6-A95B-456C-D6F6-02621E0F417D}"/>
+                <a16:creationId xmlns:a16="http://schemas.microsoft.com/office/drawing/2014/main" id="{CECACAD9-DE60-4DB8-A7E1-64F3F6708E54}"/>
               </a:ext>
             </a:extLst>
           </p:cNvPr>
@@ -25468,8 +25468,8 @@
         </p:nvSpPr>
         <p:spPr>
           <a:xfrm>
-            <a:off x="7836487" y="3007443"/>
-            <a:ext cx="2708328" cy="1220661"/>
+            <a:off x="7811565" y="2996487"/>
+            <a:ext cx="2758175" cy="1258220"/>
           </a:xfrm>
           <a:prstGeom prst="rect">
             <a:avLst/>
@@ -25503,7 +25503,7 @@
           <p:cNvPr id="14" name="source">
             <a:extLst>
               <a:ext uri="{FF2B5EF4-FFF2-40B4-BE49-F238E27FC236}">
-                <a16:creationId xmlns:a16="http://schemas.microsoft.com/office/drawing/2014/main" id="{70637854-906E-EA57-6E3E-2D3A34E6C265}"/>
+                <a16:creationId xmlns:a16="http://schemas.microsoft.com/office/drawing/2014/main" id="{860B11B5-5E5A-C42A-2CFB-9231796A22E8}"/>
               </a:ext>
             </a:extLst>
           </p:cNvPr>
@@ -25560,7 +25560,7 @@
     </p:spTree>
     <p:extLst>
       <p:ext uri="{BB962C8B-B14F-4D97-AF65-F5344CB8AC3E}">
-        <p14:creationId xmlns:p14="http://schemas.microsoft.com/office/powerpoint/2010/main" val="4231261032"/>
+        <p14:creationId xmlns:p14="http://schemas.microsoft.com/office/powerpoint/2010/main" val="1253182568"/>
       </p:ext>
     </p:extLst>
   </p:cSld>
@@ -25629,7 +25629,7 @@
           <a:bodyPr/>
           <a:lstStyle/>
           <a:p>
-            <a:fld id="{1146AB1F-C91F-4F0F-9868-5252CDCD6051}" type="datetimeFigureOut">
+            <a:fld id="{A9C3E1C2-504C-4CFF-A37A-AE4693906186}" type="datetimeFigureOut">
               <a:rPr lang="en-US" smtClean="0"/>
               <a:t>10/3/2026</a:t>
             </a:fld>
@@ -25671,7 +25671,7 @@
           <a:bodyPr/>
           <a:lstStyle/>
           <a:p>
-            <a:fld id="{FE1B144C-6E1C-47C6-9306-1DC2A92756EB}" type="slidenum">
+            <a:fld id="{0CAC26E6-90F8-49CB-BE00-E3E555820112}" type="slidenum">
               <a:rPr lang="en-US" smtClean="0"/>
               <a:t>‹#›</a:t>
             </a:fld>
@@ -25684,7 +25684,7 @@
           <p:cNvPr id="6" name="body">
             <a:extLst>
               <a:ext uri="{FF2B5EF4-FFF2-40B4-BE49-F238E27FC236}">
-                <a16:creationId xmlns:a16="http://schemas.microsoft.com/office/drawing/2014/main" id="{B037F7AC-059B-C9C3-A96C-9999B7F37995}"/>
+                <a16:creationId xmlns:a16="http://schemas.microsoft.com/office/drawing/2014/main" id="{25866A8C-D8C4-9FDA-55A4-CC21213CED71}"/>
               </a:ext>
             </a:extLst>
           </p:cNvPr>
@@ -25724,7 +25724,7 @@
           <p:cNvPr id="7" name="kpi_value_1">
             <a:extLst>
               <a:ext uri="{FF2B5EF4-FFF2-40B4-BE49-F238E27FC236}">
-                <a16:creationId xmlns:a16="http://schemas.microsoft.com/office/drawing/2014/main" id="{AF9D98BF-4EEF-6FA0-2D55-2A13B0169299}"/>
+                <a16:creationId xmlns:a16="http://schemas.microsoft.com/office/drawing/2014/main" id="{EAEF24B7-81C0-C795-F64C-B9A3BAEC7142}"/>
               </a:ext>
             </a:extLst>
           </p:cNvPr>
@@ -25737,8 +25737,8 @@
         </p:nvSpPr>
         <p:spPr>
           <a:xfrm>
-            <a:off x="1223515" y="2498834"/>
-            <a:ext cx="4361571" cy="1481091"/>
+            <a:off x="1198591" y="2472229"/>
+            <a:ext cx="4411418" cy="1515296"/>
           </a:xfrm>
           <a:prstGeom prst="rect">
             <a:avLst/>
@@ -25755,7 +25755,7 @@
               </a:spcBef>
               <a:buFontTx/>
               <a:buNone/>
-              <a:defRPr sz="8400" b="1">
+              <a:defRPr sz="6000" b="1">
                 <a:solidFill>
                   <a:schemeClr val="accent1">
                     <a:lumMod val="70000"/>
@@ -25779,7 +25779,7 @@
           <p:cNvPr id="8" name="kpi_label_1">
             <a:extLst>
               <a:ext uri="{FF2B5EF4-FFF2-40B4-BE49-F238E27FC236}">
-                <a16:creationId xmlns:a16="http://schemas.microsoft.com/office/drawing/2014/main" id="{3C77D7EC-0ACA-715C-77AB-934086143C15}"/>
+                <a16:creationId xmlns:a16="http://schemas.microsoft.com/office/drawing/2014/main" id="{F0390243-973A-0516-14C0-FFA0A7072CF9}"/>
               </a:ext>
             </a:extLst>
           </p:cNvPr>
@@ -25792,8 +25792,8 @@
         </p:nvSpPr>
         <p:spPr>
           <a:xfrm>
-            <a:off x="1223515" y="3979924"/>
-            <a:ext cx="4361571" cy="822828"/>
+            <a:off x="1198591" y="3987526"/>
+            <a:ext cx="4411418" cy="841831"/>
           </a:xfrm>
           <a:prstGeom prst="rect">
             <a:avLst/>
@@ -25810,7 +25810,7 @@
               </a:spcBef>
               <a:buFontTx/>
               <a:buNone/>
-              <a:defRPr sz="1800"/>
+              <a:defRPr sz="2000"/>
             </a:lvl1pPr>
           </a:lstStyle>
           <a:p>
@@ -25827,7 +25827,7 @@
           <p:cNvPr id="9" name="kpi_value_2">
             <a:extLst>
               <a:ext uri="{FF2B5EF4-FFF2-40B4-BE49-F238E27FC236}">
-                <a16:creationId xmlns:a16="http://schemas.microsoft.com/office/drawing/2014/main" id="{04BA6517-6DE3-6A63-1C23-E500F346D0F7}"/>
+                <a16:creationId xmlns:a16="http://schemas.microsoft.com/office/drawing/2014/main" id="{3CE14602-C4C8-6FDF-1C1A-66AF61919322}"/>
               </a:ext>
             </a:extLst>
           </p:cNvPr>
@@ -25840,8 +25840,8 @@
         </p:nvSpPr>
         <p:spPr>
           <a:xfrm>
-            <a:off x="6183245" y="2498834"/>
-            <a:ext cx="4361571" cy="1481091"/>
+            <a:off x="6158321" y="2472229"/>
+            <a:ext cx="4411418" cy="1515296"/>
           </a:xfrm>
           <a:prstGeom prst="rect">
             <a:avLst/>
@@ -25858,7 +25858,7 @@
               </a:spcBef>
               <a:buFontTx/>
               <a:buNone/>
-              <a:defRPr sz="8400" b="1">
+              <a:defRPr sz="6000" b="1">
                 <a:solidFill>
                   <a:schemeClr val="accent1">
                     <a:lumMod val="70000"/>
@@ -25882,7 +25882,7 @@
           <p:cNvPr id="10" name="kpi_label_2">
             <a:extLst>
               <a:ext uri="{FF2B5EF4-FFF2-40B4-BE49-F238E27FC236}">
-                <a16:creationId xmlns:a16="http://schemas.microsoft.com/office/drawing/2014/main" id="{9FDB1B60-13E4-A2CA-9297-B46E7FAFD33B}"/>
+                <a16:creationId xmlns:a16="http://schemas.microsoft.com/office/drawing/2014/main" id="{0DE9D916-AE32-3D2C-4326-014BF36226DE}"/>
               </a:ext>
             </a:extLst>
           </p:cNvPr>
@@ -25895,8 +25895,8 @@
         </p:nvSpPr>
         <p:spPr>
           <a:xfrm>
-            <a:off x="6183245" y="3979924"/>
-            <a:ext cx="4361571" cy="822828"/>
+            <a:off x="6158321" y="3987526"/>
+            <a:ext cx="4411418" cy="841831"/>
           </a:xfrm>
           <a:prstGeom prst="rect">
             <a:avLst/>
@@ -25913,7 +25913,7 @@
               </a:spcBef>
               <a:buFontTx/>
               <a:buNone/>
-              <a:defRPr sz="1800"/>
+              <a:defRPr sz="2000"/>
             </a:lvl1pPr>
           </a:lstStyle>
           <a:p>
@@ -25930,7 +25930,7 @@
           <p:cNvPr id="11" name="source">
             <a:extLst>
               <a:ext uri="{FF2B5EF4-FFF2-40B4-BE49-F238E27FC236}">
-                <a16:creationId xmlns:a16="http://schemas.microsoft.com/office/drawing/2014/main" id="{7C4C5657-92A5-525B-6EB1-05CA0CC7F03B}"/>
+                <a16:creationId xmlns:a16="http://schemas.microsoft.com/office/drawing/2014/main" id="{7A4D2EE1-55F3-E647-BE8E-D7025B53087D}"/>
               </a:ext>
             </a:extLst>
           </p:cNvPr>
@@ -25987,7 +25987,7 @@
     </p:spTree>
     <p:extLst>
       <p:ext uri="{BB962C8B-B14F-4D97-AF65-F5344CB8AC3E}">
-        <p14:creationId xmlns:p14="http://schemas.microsoft.com/office/powerpoint/2010/main" val="387565773"/>
+        <p14:creationId xmlns:p14="http://schemas.microsoft.com/office/powerpoint/2010/main" val="1488165053"/>
       </p:ext>
     </p:extLst>
   </p:cSld>
@@ -26056,7 +26056,7 @@
           <a:bodyPr/>
           <a:lstStyle/>
           <a:p>
-            <a:fld id="{1146AB1F-C91F-4F0F-9868-5252CDCD6051}" type="datetimeFigureOut">
+            <a:fld id="{A9C3E1C2-504C-4CFF-A37A-AE4693906186}" type="datetimeFigureOut">
               <a:rPr lang="en-US" smtClean="0"/>
               <a:t>10/3/2026</a:t>
             </a:fld>
@@ -26098,7 +26098,7 @@
           <a:bodyPr/>
           <a:lstStyle/>
           <a:p>
-            <a:fld id="{FE1B144C-6E1C-47C6-9306-1DC2A92756EB}" type="slidenum">
+            <a:fld id="{0CAC26E6-90F8-49CB-BE00-E3E555820112}" type="slidenum">
               <a:rPr lang="en-US" smtClean="0"/>
               <a:t>‹#›</a:t>
             </a:fld>
@@ -26111,7 +26111,7 @@
           <p:cNvPr id="6" name="body">
             <a:extLst>
               <a:ext uri="{FF2B5EF4-FFF2-40B4-BE49-F238E27FC236}">
-                <a16:creationId xmlns:a16="http://schemas.microsoft.com/office/drawing/2014/main" id="{050E21D1-7224-7ED7-4356-164F309AD4F3}"/>
+                <a16:creationId xmlns:a16="http://schemas.microsoft.com/office/drawing/2014/main" id="{F3CC94C2-07A3-95FE-6CE4-B5F3116BEF2A}"/>
               </a:ext>
             </a:extLst>
           </p:cNvPr>
@@ -26151,7 +26151,7 @@
           <p:cNvPr id="7" name="kpi_value_1">
             <a:extLst>
               <a:ext uri="{FF2B5EF4-FFF2-40B4-BE49-F238E27FC236}">
-                <a16:creationId xmlns:a16="http://schemas.microsoft.com/office/drawing/2014/main" id="{695CDD52-B701-F631-270B-F0DD4176C007}"/>
+                <a16:creationId xmlns:a16="http://schemas.microsoft.com/office/drawing/2014/main" id="{048F0162-B3B9-8F46-E4E5-A368BC97707D}"/>
               </a:ext>
             </a:extLst>
           </p:cNvPr>
@@ -26164,8 +26164,8 @@
         </p:nvSpPr>
         <p:spPr>
           <a:xfrm>
-            <a:off x="1223514" y="2498834"/>
-            <a:ext cx="1881706" cy="1481091"/>
+            <a:off x="1198592" y="2472229"/>
+            <a:ext cx="1931553" cy="1515296"/>
           </a:xfrm>
           <a:prstGeom prst="rect">
             <a:avLst/>
@@ -26206,7 +26206,7 @@
           <p:cNvPr id="8" name="kpi_label_1">
             <a:extLst>
               <a:ext uri="{FF2B5EF4-FFF2-40B4-BE49-F238E27FC236}">
-                <a16:creationId xmlns:a16="http://schemas.microsoft.com/office/drawing/2014/main" id="{748431E7-2D20-B013-C239-31B7BA87927D}"/>
+                <a16:creationId xmlns:a16="http://schemas.microsoft.com/office/drawing/2014/main" id="{3B09DA46-C3BF-40F7-D01F-C74DB7175195}"/>
               </a:ext>
             </a:extLst>
           </p:cNvPr>
@@ -26219,8 +26219,8 @@
         </p:nvSpPr>
         <p:spPr>
           <a:xfrm>
-            <a:off x="1223514" y="3979924"/>
-            <a:ext cx="1881706" cy="822828"/>
+            <a:off x="1198592" y="3987526"/>
+            <a:ext cx="1931553" cy="841831"/>
           </a:xfrm>
           <a:prstGeom prst="rect">
             <a:avLst/>
@@ -26237,7 +26237,7 @@
               </a:spcBef>
               <a:buFontTx/>
               <a:buNone/>
-              <a:defRPr sz="1800"/>
+              <a:defRPr sz="2000"/>
             </a:lvl1pPr>
           </a:lstStyle>
           <a:p>
@@ -26254,7 +26254,7 @@
           <p:cNvPr id="9" name="kpi_value_2">
             <a:extLst>
               <a:ext uri="{FF2B5EF4-FFF2-40B4-BE49-F238E27FC236}">
-                <a16:creationId xmlns:a16="http://schemas.microsoft.com/office/drawing/2014/main" id="{1839E713-7A09-D875-E960-75FAD5CEFE01}"/>
+                <a16:creationId xmlns:a16="http://schemas.microsoft.com/office/drawing/2014/main" id="{C65364D9-C064-F05C-CA88-D9E7771A6C91}"/>
               </a:ext>
             </a:extLst>
           </p:cNvPr>
@@ -26267,8 +26267,8 @@
         </p:nvSpPr>
         <p:spPr>
           <a:xfrm>
-            <a:off x="3703379" y="2498834"/>
-            <a:ext cx="1881706" cy="1481091"/>
+            <a:off x="3678457" y="2472229"/>
+            <a:ext cx="1931553" cy="1515296"/>
           </a:xfrm>
           <a:prstGeom prst="rect">
             <a:avLst/>
@@ -26309,7 +26309,7 @@
           <p:cNvPr id="10" name="kpi_label_2">
             <a:extLst>
               <a:ext uri="{FF2B5EF4-FFF2-40B4-BE49-F238E27FC236}">
-                <a16:creationId xmlns:a16="http://schemas.microsoft.com/office/drawing/2014/main" id="{B7E1C876-DF55-65CC-5C3D-B95423DF15E6}"/>
+                <a16:creationId xmlns:a16="http://schemas.microsoft.com/office/drawing/2014/main" id="{08865A42-A465-E40A-88A8-7C24365FA5E0}"/>
               </a:ext>
             </a:extLst>
           </p:cNvPr>
@@ -26322,8 +26322,8 @@
         </p:nvSpPr>
         <p:spPr>
           <a:xfrm>
-            <a:off x="3703379" y="3979924"/>
-            <a:ext cx="1881706" cy="822828"/>
+            <a:off x="3678457" y="3987526"/>
+            <a:ext cx="1931553" cy="841831"/>
           </a:xfrm>
           <a:prstGeom prst="rect">
             <a:avLst/>
@@ -26340,7 +26340,7 @@
               </a:spcBef>
               <a:buFontTx/>
               <a:buNone/>
-              <a:defRPr sz="1800"/>
+              <a:defRPr sz="2000"/>
             </a:lvl1pPr>
           </a:lstStyle>
           <a:p>
@@ -26357,7 +26357,7 @@
           <p:cNvPr id="11" name="kpi_value_3">
             <a:extLst>
               <a:ext uri="{FF2B5EF4-FFF2-40B4-BE49-F238E27FC236}">
-                <a16:creationId xmlns:a16="http://schemas.microsoft.com/office/drawing/2014/main" id="{4E0C862B-3923-F4E8-4CF4-6963451660AB}"/>
+                <a16:creationId xmlns:a16="http://schemas.microsoft.com/office/drawing/2014/main" id="{B81F69FB-3103-D97A-27FF-89C821A3BC49}"/>
               </a:ext>
             </a:extLst>
           </p:cNvPr>
@@ -26370,8 +26370,8 @@
         </p:nvSpPr>
         <p:spPr>
           <a:xfrm>
-            <a:off x="6183244" y="2498834"/>
-            <a:ext cx="1881706" cy="1481091"/>
+            <a:off x="6158322" y="2472229"/>
+            <a:ext cx="1931553" cy="1515296"/>
           </a:xfrm>
           <a:prstGeom prst="rect">
             <a:avLst/>
@@ -26412,7 +26412,7 @@
           <p:cNvPr id="12" name="kpi_label_3">
             <a:extLst>
               <a:ext uri="{FF2B5EF4-FFF2-40B4-BE49-F238E27FC236}">
-                <a16:creationId xmlns:a16="http://schemas.microsoft.com/office/drawing/2014/main" id="{EB1A13BC-A733-23C3-2114-405E8EDD0302}"/>
+                <a16:creationId xmlns:a16="http://schemas.microsoft.com/office/drawing/2014/main" id="{736E17AC-3A88-F19F-8A9C-D6FC8BC5CDF3}"/>
               </a:ext>
             </a:extLst>
           </p:cNvPr>
@@ -26425,8 +26425,8 @@
         </p:nvSpPr>
         <p:spPr>
           <a:xfrm>
-            <a:off x="6183244" y="3979924"/>
-            <a:ext cx="1881706" cy="822828"/>
+            <a:off x="6158322" y="3987526"/>
+            <a:ext cx="1931553" cy="841831"/>
           </a:xfrm>
           <a:prstGeom prst="rect">
             <a:avLst/>
@@ -26443,7 +26443,7 @@
               </a:spcBef>
               <a:buFontTx/>
               <a:buNone/>
-              <a:defRPr sz="1800"/>
+              <a:defRPr sz="2000"/>
             </a:lvl1pPr>
           </a:lstStyle>
           <a:p>
@@ -26460,7 +26460,7 @@
           <p:cNvPr id="13" name="kpi_value_4">
             <a:extLst>
               <a:ext uri="{FF2B5EF4-FFF2-40B4-BE49-F238E27FC236}">
-                <a16:creationId xmlns:a16="http://schemas.microsoft.com/office/drawing/2014/main" id="{4957B4C9-32B8-A40A-762E-5BD071C9BFDE}"/>
+                <a16:creationId xmlns:a16="http://schemas.microsoft.com/office/drawing/2014/main" id="{3220B3DA-17AE-0302-D524-63B5A3A36974}"/>
               </a:ext>
             </a:extLst>
           </p:cNvPr>
@@ -26473,8 +26473,8 @@
         </p:nvSpPr>
         <p:spPr>
           <a:xfrm>
-            <a:off x="8663108" y="2498834"/>
-            <a:ext cx="1881706" cy="1481091"/>
+            <a:off x="8638186" y="2472229"/>
+            <a:ext cx="1931553" cy="1515296"/>
           </a:xfrm>
           <a:prstGeom prst="rect">
             <a:avLst/>
@@ -26515,7 +26515,7 @@
           <p:cNvPr id="14" name="kpi_label_4">
             <a:extLst>
               <a:ext uri="{FF2B5EF4-FFF2-40B4-BE49-F238E27FC236}">
-                <a16:creationId xmlns:a16="http://schemas.microsoft.com/office/drawing/2014/main" id="{9244AAE4-3C6D-FE02-F921-9536178F0F5D}"/>
+                <a16:creationId xmlns:a16="http://schemas.microsoft.com/office/drawing/2014/main" id="{9E0EA777-6DF0-2822-8019-83234D122B33}"/>
               </a:ext>
             </a:extLst>
           </p:cNvPr>
@@ -26528,8 +26528,8 @@
         </p:nvSpPr>
         <p:spPr>
           <a:xfrm>
-            <a:off x="8663108" y="3979924"/>
-            <a:ext cx="1881706" cy="822828"/>
+            <a:off x="8638186" y="3987526"/>
+            <a:ext cx="1931553" cy="841831"/>
           </a:xfrm>
           <a:prstGeom prst="rect">
             <a:avLst/>
@@ -26546,7 +26546,7 @@
               </a:spcBef>
               <a:buFontTx/>
               <a:buNone/>
-              <a:defRPr sz="1800"/>
+              <a:defRPr sz="2000"/>
             </a:lvl1pPr>
           </a:lstStyle>
           <a:p>
@@ -26563,7 +26563,7 @@
           <p:cNvPr id="15" name="source">
             <a:extLst>
               <a:ext uri="{FF2B5EF4-FFF2-40B4-BE49-F238E27FC236}">
-                <a16:creationId xmlns:a16="http://schemas.microsoft.com/office/drawing/2014/main" id="{86BD2CC4-8443-DB81-E128-D9ED19414D70}"/>
+                <a16:creationId xmlns:a16="http://schemas.microsoft.com/office/drawing/2014/main" id="{CDAAA6F6-7888-E824-EFE2-4D53AEE05D7A}"/>
               </a:ext>
             </a:extLst>
           </p:cNvPr>
@@ -26620,7 +26620,7 @@
     </p:spTree>
     <p:extLst>
       <p:ext uri="{BB962C8B-B14F-4D97-AF65-F5344CB8AC3E}">
-        <p14:creationId xmlns:p14="http://schemas.microsoft.com/office/powerpoint/2010/main" val="832423987"/>
+        <p14:creationId xmlns:p14="http://schemas.microsoft.com/office/powerpoint/2010/main" val="60029591"/>
       </p:ext>
     </p:extLst>
   </p:cSld>
@@ -26689,7 +26689,7 @@
           <a:bodyPr/>
           <a:lstStyle/>
           <a:p>
-            <a:fld id="{1146AB1F-C91F-4F0F-9868-5252CDCD6051}" type="datetimeFigureOut">
+            <a:fld id="{A9C3E1C2-504C-4CFF-A37A-AE4693906186}" type="datetimeFigureOut">
               <a:rPr lang="en-US" smtClean="0"/>
               <a:t>10/3/2026</a:t>
             </a:fld>
@@ -26731,7 +26731,7 @@
           <a:bodyPr/>
           <a:lstStyle/>
           <a:p>
-            <a:fld id="{FE1B144C-6E1C-47C6-9306-1DC2A92756EB}" type="slidenum">
+            <a:fld id="{0CAC26E6-90F8-49CB-BE00-E3E555820112}" type="slidenum">
               <a:rPr lang="en-US" smtClean="0"/>
               <a:t>‹#›</a:t>
             </a:fld>
@@ -26744,7 +26744,7 @@
           <p:cNvPr id="6" name="body">
             <a:extLst>
               <a:ext uri="{FF2B5EF4-FFF2-40B4-BE49-F238E27FC236}">
-                <a16:creationId xmlns:a16="http://schemas.microsoft.com/office/drawing/2014/main" id="{D596B94A-E0F4-4B5E-CE0E-7D30E6BC7B7E}"/>
+                <a16:creationId xmlns:a16="http://schemas.microsoft.com/office/drawing/2014/main" id="{A3161CDF-284E-9DE0-8177-8CDBF39D069A}"/>
               </a:ext>
             </a:extLst>
           </p:cNvPr>
@@ -26784,7 +26784,7 @@
           <p:cNvPr id="7" name="quote">
             <a:extLst>
               <a:ext uri="{FF2B5EF4-FFF2-40B4-BE49-F238E27FC236}">
-                <a16:creationId xmlns:a16="http://schemas.microsoft.com/office/drawing/2014/main" id="{8EB0534F-2738-2D7E-9617-43D05EDFC52A}"/>
+                <a16:creationId xmlns:a16="http://schemas.microsoft.com/office/drawing/2014/main" id="{FA26FAD4-6275-308E-FC4F-CBB87EF121F4}"/>
               </a:ext>
             </a:extLst>
           </p:cNvPr>
@@ -26797,8 +26797,8 @@
         </p:nvSpPr>
         <p:spPr>
           <a:xfrm>
-            <a:off x="7055559" y="2498833"/>
-            <a:ext cx="3489257" cy="2447582"/>
+            <a:off x="7030635" y="2472230"/>
+            <a:ext cx="3539104" cy="2687019"/>
           </a:xfrm>
           <a:prstGeom prst="rect">
             <a:avLst/>
@@ -26815,7 +26815,7 @@
               </a:spcBef>
               <a:buFontTx/>
               <a:buNone/>
-              <a:defRPr sz="2400" i="1">
+              <a:defRPr sz="2000" i="1">
                 <a:latin typeface="+mj-lt"/>
               </a:defRPr>
             </a:lvl1pPr>
@@ -26834,7 +26834,7 @@
           <p:cNvPr id="8" name="attribution">
             <a:extLst>
               <a:ext uri="{FF2B5EF4-FFF2-40B4-BE49-F238E27FC236}">
-                <a16:creationId xmlns:a16="http://schemas.microsoft.com/office/drawing/2014/main" id="{814FF015-53C2-0406-9A01-082B412C1FB5}"/>
+                <a16:creationId xmlns:a16="http://schemas.microsoft.com/office/drawing/2014/main" id="{442DC453-741B-FA78-8EE4-43D58EA5B87F}"/>
               </a:ext>
             </a:extLst>
           </p:cNvPr>
@@ -26847,8 +26847,8 @@
         </p:nvSpPr>
         <p:spPr>
           <a:xfrm>
-            <a:off x="7055559" y="5372081"/>
-            <a:ext cx="3489257" cy="292646"/>
+            <a:off x="7030635" y="5159249"/>
+            <a:ext cx="3539104" cy="532083"/>
           </a:xfrm>
           <a:prstGeom prst="rect">
             <a:avLst/>
@@ -26865,7 +26865,7 @@
               </a:spcBef>
               <a:buFontTx/>
               <a:buNone/>
-              <a:defRPr sz="1400"/>
+              <a:defRPr sz="2000"/>
             </a:lvl1pPr>
           </a:lstStyle>
           <a:p>
@@ -26882,7 +26882,7 @@
           <p:cNvPr id="9" name="source">
             <a:extLst>
               <a:ext uri="{FF2B5EF4-FFF2-40B4-BE49-F238E27FC236}">
-                <a16:creationId xmlns:a16="http://schemas.microsoft.com/office/drawing/2014/main" id="{B8B3454D-7D7C-3D49-A09E-0210E3DE3AC0}"/>
+                <a16:creationId xmlns:a16="http://schemas.microsoft.com/office/drawing/2014/main" id="{2B0CA538-37F3-B65F-47E7-0B539F1241FD}"/>
               </a:ext>
             </a:extLst>
           </p:cNvPr>
@@ -26939,7 +26939,7 @@
     </p:spTree>
     <p:extLst>
       <p:ext uri="{BB962C8B-B14F-4D97-AF65-F5344CB8AC3E}">
-        <p14:creationId xmlns:p14="http://schemas.microsoft.com/office/powerpoint/2010/main" val="3745479749"/>
+        <p14:creationId xmlns:p14="http://schemas.microsoft.com/office/powerpoint/2010/main" val="3568698221"/>
       </p:ext>
     </p:extLst>
   </p:cSld>
@@ -27008,7 +27008,7 @@
           <a:bodyPr/>
           <a:lstStyle/>
           <a:p>
-            <a:fld id="{1146AB1F-C91F-4F0F-9868-5252CDCD6051}" type="datetimeFigureOut">
+            <a:fld id="{A9C3E1C2-504C-4CFF-A37A-AE4693906186}" type="datetimeFigureOut">
               <a:rPr lang="en-US" smtClean="0"/>
               <a:t>10/3/2026</a:t>
             </a:fld>
@@ -27050,7 +27050,7 @@
           <a:bodyPr/>
           <a:lstStyle/>
           <a:p>
-            <a:fld id="{FE1B144C-6E1C-47C6-9306-1DC2A92756EB}" type="slidenum">
+            <a:fld id="{0CAC26E6-90F8-49CB-BE00-E3E555820112}" type="slidenum">
               <a:rPr lang="en-US" smtClean="0"/>
               <a:t>‹#›</a:t>
             </a:fld>
@@ -27063,7 +27063,7 @@
           <p:cNvPr id="6" name="item_1_title">
             <a:extLst>
               <a:ext uri="{FF2B5EF4-FFF2-40B4-BE49-F238E27FC236}">
-                <a16:creationId xmlns:a16="http://schemas.microsoft.com/office/drawing/2014/main" id="{2C369F31-C896-656F-064C-12D4451F5E57}"/>
+                <a16:creationId xmlns:a16="http://schemas.microsoft.com/office/drawing/2014/main" id="{7F2B39E4-0167-BD78-96EB-D45AE918CA90}"/>
               </a:ext>
             </a:extLst>
           </p:cNvPr>
@@ -27076,8 +27076,8 @@
         </p:nvSpPr>
         <p:spPr>
           <a:xfrm>
-            <a:off x="1223514" y="2498834"/>
-            <a:ext cx="2708328" cy="931145"/>
+            <a:off x="1198591" y="2472230"/>
+            <a:ext cx="2758175" cy="946795"/>
           </a:xfrm>
         </p:spPr>
         <p:txBody>
@@ -27091,7 +27091,7 @@
               </a:spcBef>
               <a:buFontTx/>
               <a:buNone/>
-              <a:defRPr sz="2200" b="1">
+              <a:defRPr sz="2000" b="1">
                 <a:solidFill>
                   <a:schemeClr val="accent1">
                     <a:lumMod val="70000"/>
@@ -27115,7 +27115,7 @@
           <p:cNvPr id="7" name="item_1">
             <a:extLst>
               <a:ext uri="{FF2B5EF4-FFF2-40B4-BE49-F238E27FC236}">
-                <a16:creationId xmlns:a16="http://schemas.microsoft.com/office/drawing/2014/main" id="{1EF157D2-B793-A901-EBE3-F76AAF30616A}"/>
+                <a16:creationId xmlns:a16="http://schemas.microsoft.com/office/drawing/2014/main" id="{E8E944F0-52B7-22C3-F330-D8048F9DB6E6}"/>
               </a:ext>
             </a:extLst>
           </p:cNvPr>
@@ -27128,8 +27128,8 @@
         </p:nvSpPr>
         <p:spPr>
           <a:xfrm>
-            <a:off x="1223514" y="3429978"/>
-            <a:ext cx="2708328" cy="2234748"/>
+            <a:off x="1198592" y="3419025"/>
+            <a:ext cx="2758175" cy="2272307"/>
           </a:xfrm>
           <a:prstGeom prst="rect">
             <a:avLst/>
@@ -27163,7 +27163,7 @@
           <p:cNvPr id="8" name="item_2_title">
             <a:extLst>
               <a:ext uri="{FF2B5EF4-FFF2-40B4-BE49-F238E27FC236}">
-                <a16:creationId xmlns:a16="http://schemas.microsoft.com/office/drawing/2014/main" id="{95250509-A8C3-BAB4-1A81-3500A7C8831B}"/>
+                <a16:creationId xmlns:a16="http://schemas.microsoft.com/office/drawing/2014/main" id="{C410CC8A-8118-9B73-43D2-BA38BC9C1DCA}"/>
               </a:ext>
             </a:extLst>
           </p:cNvPr>
@@ -27176,8 +27176,8 @@
         </p:nvSpPr>
         <p:spPr>
           <a:xfrm>
-            <a:off x="4530001" y="2498834"/>
-            <a:ext cx="2708328" cy="931145"/>
+            <a:off x="4505078" y="2472230"/>
+            <a:ext cx="2758175" cy="946795"/>
           </a:xfrm>
           <a:prstGeom prst="rect">
             <a:avLst/>
@@ -27194,7 +27194,7 @@
               </a:spcBef>
               <a:buFontTx/>
               <a:buNone/>
-              <a:defRPr sz="2200" b="1">
+              <a:defRPr sz="2000" b="1">
                 <a:solidFill>
                   <a:schemeClr val="accent1">
                     <a:lumMod val="70000"/>
@@ -27218,7 +27218,7 @@
           <p:cNvPr id="9" name="item_2">
             <a:extLst>
               <a:ext uri="{FF2B5EF4-FFF2-40B4-BE49-F238E27FC236}">
-                <a16:creationId xmlns:a16="http://schemas.microsoft.com/office/drawing/2014/main" id="{6B978975-9E88-8D26-687B-FCF9374394E8}"/>
+                <a16:creationId xmlns:a16="http://schemas.microsoft.com/office/drawing/2014/main" id="{1592E9B2-27F8-D7BA-101C-C3F055E2176D}"/>
               </a:ext>
             </a:extLst>
           </p:cNvPr>
@@ -27231,8 +27231,8 @@
         </p:nvSpPr>
         <p:spPr>
           <a:xfrm>
-            <a:off x="4530001" y="3429978"/>
-            <a:ext cx="2708328" cy="2234748"/>
+            <a:off x="4505078" y="3419025"/>
+            <a:ext cx="2758175" cy="2272307"/>
           </a:xfrm>
           <a:prstGeom prst="rect">
             <a:avLst/>
@@ -27266,7 +27266,7 @@
           <p:cNvPr id="10" name="item_3_title">
             <a:extLst>
               <a:ext uri="{FF2B5EF4-FFF2-40B4-BE49-F238E27FC236}">
-                <a16:creationId xmlns:a16="http://schemas.microsoft.com/office/drawing/2014/main" id="{1C8A93AE-AC0B-CB50-C6C9-2E1D0E3FB714}"/>
+                <a16:creationId xmlns:a16="http://schemas.microsoft.com/office/drawing/2014/main" id="{24D50426-C271-84DD-AB8A-0EA12E92600F}"/>
               </a:ext>
             </a:extLst>
           </p:cNvPr>
@@ -27279,8 +27279,8 @@
         </p:nvSpPr>
         <p:spPr>
           <a:xfrm>
-            <a:off x="7836487" y="2498834"/>
-            <a:ext cx="2708328" cy="931145"/>
+            <a:off x="7811565" y="2472230"/>
+            <a:ext cx="2758175" cy="946795"/>
           </a:xfrm>
           <a:prstGeom prst="rect">
             <a:avLst/>
@@ -27297,7 +27297,7 @@
               </a:spcBef>
               <a:buFontTx/>
               <a:buNone/>
-              <a:defRPr sz="2200" b="1">
+              <a:defRPr sz="2000" b="1">
                 <a:solidFill>
                   <a:schemeClr val="accent1">
                     <a:lumMod val="70000"/>
@@ -27321,7 +27321,7 @@
           <p:cNvPr id="11" name="item_3">
             <a:extLst>
               <a:ext uri="{FF2B5EF4-FFF2-40B4-BE49-F238E27FC236}">
-                <a16:creationId xmlns:a16="http://schemas.microsoft.com/office/drawing/2014/main" id="{F3E67D24-9046-DE2A-EA5B-6C7C3E8473B7}"/>
+                <a16:creationId xmlns:a16="http://schemas.microsoft.com/office/drawing/2014/main" id="{F26EE38E-9BB6-E7FB-CCED-ADACB26EE554}"/>
               </a:ext>
             </a:extLst>
           </p:cNvPr>
@@ -27334,8 +27334,8 @@
         </p:nvSpPr>
         <p:spPr>
           <a:xfrm>
-            <a:off x="7836487" y="3429978"/>
-            <a:ext cx="2708328" cy="2234748"/>
+            <a:off x="7811565" y="3419025"/>
+            <a:ext cx="2758175" cy="2272307"/>
           </a:xfrm>
           <a:prstGeom prst="rect">
             <a:avLst/>
@@ -27369,7 +27369,7 @@
           <p:cNvPr id="12" name="source">
             <a:extLst>
               <a:ext uri="{FF2B5EF4-FFF2-40B4-BE49-F238E27FC236}">
-                <a16:creationId xmlns:a16="http://schemas.microsoft.com/office/drawing/2014/main" id="{DF4F81E6-3971-FB3D-1A5C-5D037858B399}"/>
+                <a16:creationId xmlns:a16="http://schemas.microsoft.com/office/drawing/2014/main" id="{6B886F40-A4D8-7195-58DD-ED61C581DE64}"/>
               </a:ext>
             </a:extLst>
           </p:cNvPr>
@@ -27426,7 +27426,7 @@
     </p:spTree>
     <p:extLst>
       <p:ext uri="{BB962C8B-B14F-4D97-AF65-F5344CB8AC3E}">
-        <p14:creationId xmlns:p14="http://schemas.microsoft.com/office/powerpoint/2010/main" val="89612888"/>
+        <p14:creationId xmlns:p14="http://schemas.microsoft.com/office/powerpoint/2010/main" val="3628908142"/>
       </p:ext>
     </p:extLst>
   </p:cSld>
@@ -27495,7 +27495,7 @@
           <a:bodyPr/>
           <a:lstStyle/>
           <a:p>
-            <a:fld id="{1146AB1F-C91F-4F0F-9868-5252CDCD6051}" type="datetimeFigureOut">
+            <a:fld id="{A9C3E1C2-504C-4CFF-A37A-AE4693906186}" type="datetimeFigureOut">
               <a:rPr lang="en-US" smtClean="0"/>
               <a:t>10/3/2026</a:t>
             </a:fld>
@@ -27537,7 +27537,7 @@
           <a:bodyPr/>
           <a:lstStyle/>
           <a:p>
-            <a:fld id="{FE1B144C-6E1C-47C6-9306-1DC2A92756EB}" type="slidenum">
+            <a:fld id="{0CAC26E6-90F8-49CB-BE00-E3E555820112}" type="slidenum">
               <a:rPr lang="en-US" smtClean="0"/>
               <a:t>‹#›</a:t>
             </a:fld>
@@ -27550,7 +27550,7 @@
           <p:cNvPr id="6" name="item_1_title">
             <a:extLst>
               <a:ext uri="{FF2B5EF4-FFF2-40B4-BE49-F238E27FC236}">
-                <a16:creationId xmlns:a16="http://schemas.microsoft.com/office/drawing/2014/main" id="{CF884F2E-681E-374F-80CC-3A11BDB2CE49}"/>
+                <a16:creationId xmlns:a16="http://schemas.microsoft.com/office/drawing/2014/main" id="{EA967486-D2DE-EA3F-7F02-3C092F023D99}"/>
               </a:ext>
             </a:extLst>
           </p:cNvPr>
@@ -27563,8 +27563,8 @@
         </p:nvSpPr>
         <p:spPr>
           <a:xfrm>
-            <a:off x="1223514" y="2498834"/>
-            <a:ext cx="4361571" cy="931145"/>
+            <a:off x="1198591" y="2472230"/>
+            <a:ext cx="4411418" cy="946795"/>
           </a:xfrm>
         </p:spPr>
         <p:txBody>
@@ -27578,7 +27578,7 @@
               </a:spcBef>
               <a:buFontTx/>
               <a:buNone/>
-              <a:defRPr sz="2200" b="1">
+              <a:defRPr sz="2000" b="1">
                 <a:solidFill>
                   <a:schemeClr val="accent1">
                     <a:lumMod val="70000"/>
@@ -27602,7 +27602,7 @@
           <p:cNvPr id="7" name="item_1">
             <a:extLst>
               <a:ext uri="{FF2B5EF4-FFF2-40B4-BE49-F238E27FC236}">
-                <a16:creationId xmlns:a16="http://schemas.microsoft.com/office/drawing/2014/main" id="{EDE99EAE-635B-7D4E-654F-584AC8881061}"/>
+                <a16:creationId xmlns:a16="http://schemas.microsoft.com/office/drawing/2014/main" id="{24E09AC2-0BA1-0BEB-B712-63A0B99FFE3C}"/>
               </a:ext>
             </a:extLst>
           </p:cNvPr>
@@ -27615,8 +27615,8 @@
         </p:nvSpPr>
         <p:spPr>
           <a:xfrm>
-            <a:off x="1223515" y="3429978"/>
-            <a:ext cx="4361571" cy="2234748"/>
+            <a:off x="1198591" y="3419025"/>
+            <a:ext cx="4411418" cy="2272307"/>
           </a:xfrm>
           <a:prstGeom prst="rect">
             <a:avLst/>
@@ -27650,7 +27650,7 @@
           <p:cNvPr id="8" name="item_2_title">
             <a:extLst>
               <a:ext uri="{FF2B5EF4-FFF2-40B4-BE49-F238E27FC236}">
-                <a16:creationId xmlns:a16="http://schemas.microsoft.com/office/drawing/2014/main" id="{4D61066E-CF55-153B-29FD-B21F261644D4}"/>
+                <a16:creationId xmlns:a16="http://schemas.microsoft.com/office/drawing/2014/main" id="{2F5382B3-6BBB-99B5-C642-AB436E3C95E0}"/>
               </a:ext>
             </a:extLst>
           </p:cNvPr>
@@ -27663,8 +27663,8 @@
         </p:nvSpPr>
         <p:spPr>
           <a:xfrm>
-            <a:off x="6183245" y="2498834"/>
-            <a:ext cx="4361571" cy="931145"/>
+            <a:off x="6158321" y="2472230"/>
+            <a:ext cx="4411418" cy="946795"/>
           </a:xfrm>
           <a:prstGeom prst="rect">
             <a:avLst/>
@@ -27681,7 +27681,7 @@
               </a:spcBef>
               <a:buFontTx/>
               <a:buNone/>
-              <a:defRPr sz="2200" b="1">
+              <a:defRPr sz="2000" b="1">
                 <a:solidFill>
                   <a:schemeClr val="accent1">
                     <a:lumMod val="70000"/>
@@ -27705,7 +27705,7 @@
           <p:cNvPr id="9" name="item_2">
             <a:extLst>
               <a:ext uri="{FF2B5EF4-FFF2-40B4-BE49-F238E27FC236}">
-                <a16:creationId xmlns:a16="http://schemas.microsoft.com/office/drawing/2014/main" id="{756A9D89-59B1-6BF5-09C3-1EF33F1E9832}"/>
+                <a16:creationId xmlns:a16="http://schemas.microsoft.com/office/drawing/2014/main" id="{C6E3229B-2218-66DD-0470-891BEC67802C}"/>
               </a:ext>
             </a:extLst>
           </p:cNvPr>
@@ -27718,8 +27718,8 @@
         </p:nvSpPr>
         <p:spPr>
           <a:xfrm>
-            <a:off x="6183245" y="3429978"/>
-            <a:ext cx="4361571" cy="2234748"/>
+            <a:off x="6158321" y="3419025"/>
+            <a:ext cx="4411418" cy="2272307"/>
           </a:xfrm>
           <a:prstGeom prst="rect">
             <a:avLst/>
@@ -27753,7 +27753,7 @@
           <p:cNvPr id="10" name="source">
             <a:extLst>
               <a:ext uri="{FF2B5EF4-FFF2-40B4-BE49-F238E27FC236}">
-                <a16:creationId xmlns:a16="http://schemas.microsoft.com/office/drawing/2014/main" id="{34B3CE63-8A39-54C9-8651-910BF9F20AAE}"/>
+                <a16:creationId xmlns:a16="http://schemas.microsoft.com/office/drawing/2014/main" id="{B407F38E-24B9-2F5C-7525-E61A18330C68}"/>
               </a:ext>
             </a:extLst>
           </p:cNvPr>
@@ -27810,7 +27810,7 @@
     </p:spTree>
     <p:extLst>
       <p:ext uri="{BB962C8B-B14F-4D97-AF65-F5344CB8AC3E}">
-        <p14:creationId xmlns:p14="http://schemas.microsoft.com/office/powerpoint/2010/main" val="3166029605"/>
+        <p14:creationId xmlns:p14="http://schemas.microsoft.com/office/powerpoint/2010/main" val="122354393"/>
       </p:ext>
     </p:extLst>
   </p:cSld>
@@ -27879,7 +27879,7 @@
           <a:bodyPr/>
           <a:lstStyle/>
           <a:p>
-            <a:fld id="{1146AB1F-C91F-4F0F-9868-5252CDCD6051}" type="datetimeFigureOut">
+            <a:fld id="{A9C3E1C2-504C-4CFF-A37A-AE4693906186}" type="datetimeFigureOut">
               <a:rPr lang="en-US" smtClean="0"/>
               <a:t>10/3/2026</a:t>
             </a:fld>
@@ -27921,7 +27921,7 @@
           <a:bodyPr/>
           <a:lstStyle/>
           <a:p>
-            <a:fld id="{FE1B144C-6E1C-47C6-9306-1DC2A92756EB}" type="slidenum">
+            <a:fld id="{0CAC26E6-90F8-49CB-BE00-E3E555820112}" type="slidenum">
               <a:rPr lang="en-US" smtClean="0"/>
               <a:t>‹#›</a:t>
             </a:fld>
@@ -27934,7 +27934,7 @@
           <p:cNvPr id="6" name="chart">
             <a:extLst>
               <a:ext uri="{FF2B5EF4-FFF2-40B4-BE49-F238E27FC236}">
-                <a16:creationId xmlns:a16="http://schemas.microsoft.com/office/drawing/2014/main" id="{BCFA2A26-6ABA-916D-E262-ED1F5D9014A5}"/>
+                <a16:creationId xmlns:a16="http://schemas.microsoft.com/office/drawing/2014/main" id="{B589FAEF-3D94-548F-1894-DD147EC56174}"/>
               </a:ext>
             </a:extLst>
           </p:cNvPr>
@@ -27964,7 +27964,7 @@
           <p:cNvPr id="7" name="body">
             <a:extLst>
               <a:ext uri="{FF2B5EF4-FFF2-40B4-BE49-F238E27FC236}">
-                <a16:creationId xmlns:a16="http://schemas.microsoft.com/office/drawing/2014/main" id="{B16B6968-6DE3-CF61-BCE4-0D09E3049CB8}"/>
+                <a16:creationId xmlns:a16="http://schemas.microsoft.com/office/drawing/2014/main" id="{DCBD0B5E-41B8-29C6-28DE-864F95D9B9E2}"/>
               </a:ext>
             </a:extLst>
           </p:cNvPr>
@@ -28007,7 +28007,7 @@
           <p:cNvPr id="8" name="source">
             <a:extLst>
               <a:ext uri="{FF2B5EF4-FFF2-40B4-BE49-F238E27FC236}">
-                <a16:creationId xmlns:a16="http://schemas.microsoft.com/office/drawing/2014/main" id="{61A24986-C41E-2BAA-0E97-F65865408A8E}"/>
+                <a16:creationId xmlns:a16="http://schemas.microsoft.com/office/drawing/2014/main" id="{D510B5A1-4509-D427-F8DD-22115AC3FF83}"/>
               </a:ext>
             </a:extLst>
           </p:cNvPr>
@@ -28064,7 +28064,7 @@
     </p:spTree>
     <p:extLst>
       <p:ext uri="{BB962C8B-B14F-4D97-AF65-F5344CB8AC3E}">
-        <p14:creationId xmlns:p14="http://schemas.microsoft.com/office/powerpoint/2010/main" val="1423494118"/>
+        <p14:creationId xmlns:p14="http://schemas.microsoft.com/office/powerpoint/2010/main" val="3902809599"/>
       </p:ext>
     </p:extLst>
   </p:cSld>
@@ -28133,7 +28133,7 @@
           <a:bodyPr/>
           <a:lstStyle/>
           <a:p>
-            <a:fld id="{1146AB1F-C91F-4F0F-9868-5252CDCD6051}" type="datetimeFigureOut">
+            <a:fld id="{A9C3E1C2-504C-4CFF-A37A-AE4693906186}" type="datetimeFigureOut">
               <a:rPr lang="en-US" smtClean="0"/>
               <a:t>10/3/2026</a:t>
             </a:fld>
@@ -28175,7 +28175,7 @@
           <a:bodyPr/>
           <a:lstStyle/>
           <a:p>
-            <a:fld id="{FE1B144C-6E1C-47C6-9306-1DC2A92756EB}" type="slidenum">
+            <a:fld id="{0CAC26E6-90F8-49CB-BE00-E3E555820112}" type="slidenum">
               <a:rPr lang="en-US" smtClean="0"/>
               <a:t>‹#›</a:t>
             </a:fld>
@@ -28188,7 +28188,7 @@
           <p:cNvPr id="6" name="item_1_title">
             <a:extLst>
               <a:ext uri="{FF2B5EF4-FFF2-40B4-BE49-F238E27FC236}">
-                <a16:creationId xmlns:a16="http://schemas.microsoft.com/office/drawing/2014/main" id="{C1CBBE26-8C53-4474-7F75-C41EB6C53592}"/>
+                <a16:creationId xmlns:a16="http://schemas.microsoft.com/office/drawing/2014/main" id="{A39D603F-5600-AC1F-D5A1-B32923C5944C}"/>
               </a:ext>
             </a:extLst>
           </p:cNvPr>
@@ -28201,8 +28201,8 @@
         </p:nvSpPr>
         <p:spPr>
           <a:xfrm>
-            <a:off x="1223514" y="2498833"/>
-            <a:ext cx="4361571" cy="371676"/>
+            <a:off x="1198591" y="2472230"/>
+            <a:ext cx="4411418" cy="387325"/>
           </a:xfrm>
         </p:spPr>
         <p:txBody>
@@ -28216,7 +28216,7 @@
               </a:spcBef>
               <a:buFontTx/>
               <a:buNone/>
-              <a:defRPr sz="2200" b="1">
+              <a:defRPr sz="2000" b="1">
                 <a:solidFill>
                   <a:schemeClr val="accent1">
                     <a:lumMod val="70000"/>
@@ -28240,7 +28240,7 @@
           <p:cNvPr id="7" name="item_1">
             <a:extLst>
               <a:ext uri="{FF2B5EF4-FFF2-40B4-BE49-F238E27FC236}">
-                <a16:creationId xmlns:a16="http://schemas.microsoft.com/office/drawing/2014/main" id="{159A807E-3D8B-51FF-9802-622557D3BCF0}"/>
+                <a16:creationId xmlns:a16="http://schemas.microsoft.com/office/drawing/2014/main" id="{3DEEC1E0-4EDC-A609-9FAB-B75D736A0E08}"/>
               </a:ext>
             </a:extLst>
           </p:cNvPr>
@@ -28253,8 +28253,8 @@
         </p:nvSpPr>
         <p:spPr>
           <a:xfrm>
-            <a:off x="1223515" y="2870510"/>
-            <a:ext cx="4361571" cy="892021"/>
+            <a:off x="1198591" y="2859554"/>
+            <a:ext cx="4411418" cy="929580"/>
           </a:xfrm>
           <a:prstGeom prst="rect">
             <a:avLst/>
@@ -28288,7 +28288,7 @@
           <p:cNvPr id="8" name="item_2_title">
             <a:extLst>
               <a:ext uri="{FF2B5EF4-FFF2-40B4-BE49-F238E27FC236}">
-                <a16:creationId xmlns:a16="http://schemas.microsoft.com/office/drawing/2014/main" id="{5249F9B1-1D16-8187-97C3-3448B29D0B3E}"/>
+                <a16:creationId xmlns:a16="http://schemas.microsoft.com/office/drawing/2014/main" id="{2AEB3C06-E9E5-D939-B55A-9C43F0DD9D35}"/>
               </a:ext>
             </a:extLst>
           </p:cNvPr>
@@ -28301,8 +28301,8 @@
         </p:nvSpPr>
         <p:spPr>
           <a:xfrm>
-            <a:off x="6183245" y="2498833"/>
-            <a:ext cx="4361571" cy="371676"/>
+            <a:off x="6158321" y="2472230"/>
+            <a:ext cx="4411418" cy="387325"/>
           </a:xfrm>
           <a:prstGeom prst="rect">
             <a:avLst/>
@@ -28319,7 +28319,7 @@
               </a:spcBef>
               <a:buFontTx/>
               <a:buNone/>
-              <a:defRPr sz="2200" b="1">
+              <a:defRPr sz="2000" b="1">
                 <a:solidFill>
                   <a:schemeClr val="accent1">
                     <a:lumMod val="70000"/>
@@ -28343,7 +28343,7 @@
           <p:cNvPr id="9" name="item_2">
             <a:extLst>
               <a:ext uri="{FF2B5EF4-FFF2-40B4-BE49-F238E27FC236}">
-                <a16:creationId xmlns:a16="http://schemas.microsoft.com/office/drawing/2014/main" id="{EBCCF44E-10C3-8083-A56F-2FACCBA79520}"/>
+                <a16:creationId xmlns:a16="http://schemas.microsoft.com/office/drawing/2014/main" id="{966F00B5-B3DE-F6DE-9C89-B8CBD341918C}"/>
               </a:ext>
             </a:extLst>
           </p:cNvPr>
@@ -28356,8 +28356,8 @@
         </p:nvSpPr>
         <p:spPr>
           <a:xfrm>
-            <a:off x="6183245" y="2870510"/>
-            <a:ext cx="4361571" cy="892021"/>
+            <a:off x="6158321" y="2859554"/>
+            <a:ext cx="4411418" cy="929580"/>
           </a:xfrm>
           <a:prstGeom prst="rect">
             <a:avLst/>
@@ -28391,7 +28391,7 @@
           <p:cNvPr id="10" name="item_3_title">
             <a:extLst>
               <a:ext uri="{FF2B5EF4-FFF2-40B4-BE49-F238E27FC236}">
-                <a16:creationId xmlns:a16="http://schemas.microsoft.com/office/drawing/2014/main" id="{A7F52ADF-E352-A11C-86CF-FD6152E09635}"/>
+                <a16:creationId xmlns:a16="http://schemas.microsoft.com/office/drawing/2014/main" id="{9CDDFEF1-711C-ACC5-05E3-1496F30BBCD2}"/>
               </a:ext>
             </a:extLst>
           </p:cNvPr>
@@ -28404,8 +28404,8 @@
         </p:nvSpPr>
         <p:spPr>
           <a:xfrm>
-            <a:off x="1223515" y="4401030"/>
-            <a:ext cx="4361571" cy="371676"/>
+            <a:off x="1198591" y="4374427"/>
+            <a:ext cx="4411418" cy="387325"/>
           </a:xfrm>
           <a:prstGeom prst="rect">
             <a:avLst/>
@@ -28422,7 +28422,7 @@
               </a:spcBef>
               <a:buFontTx/>
               <a:buNone/>
-              <a:defRPr sz="2200" b="1">
+              <a:defRPr sz="2000" b="1">
                 <a:solidFill>
                   <a:schemeClr val="accent1">
                     <a:lumMod val="70000"/>
@@ -28446,7 +28446,7 @@
           <p:cNvPr id="11" name="item_3">
             <a:extLst>
               <a:ext uri="{FF2B5EF4-FFF2-40B4-BE49-F238E27FC236}">
-                <a16:creationId xmlns:a16="http://schemas.microsoft.com/office/drawing/2014/main" id="{84FC5ADF-0906-75F3-464F-2E15450A54F2}"/>
+                <a16:creationId xmlns:a16="http://schemas.microsoft.com/office/drawing/2014/main" id="{5CBEB0A7-072A-2F0C-530D-FA4ECEEA5DDA}"/>
               </a:ext>
             </a:extLst>
           </p:cNvPr>
@@ -28459,8 +28459,8 @@
         </p:nvSpPr>
         <p:spPr>
           <a:xfrm>
-            <a:off x="1223515" y="4772706"/>
-            <a:ext cx="4361571" cy="892021"/>
+            <a:off x="1198591" y="4761750"/>
+            <a:ext cx="4411418" cy="929580"/>
           </a:xfrm>
           <a:prstGeom prst="rect">
             <a:avLst/>
@@ -28494,7 +28494,7 @@
           <p:cNvPr id="12" name="item_4_title">
             <a:extLst>
               <a:ext uri="{FF2B5EF4-FFF2-40B4-BE49-F238E27FC236}">
-                <a16:creationId xmlns:a16="http://schemas.microsoft.com/office/drawing/2014/main" id="{053B1930-B2ED-DA68-86C3-7C3C62E51916}"/>
+                <a16:creationId xmlns:a16="http://schemas.microsoft.com/office/drawing/2014/main" id="{78B45E7B-C521-103C-1C34-90563BD9FD2F}"/>
               </a:ext>
             </a:extLst>
           </p:cNvPr>
@@ -28507,8 +28507,8 @@
         </p:nvSpPr>
         <p:spPr>
           <a:xfrm>
-            <a:off x="6183245" y="4401030"/>
-            <a:ext cx="4361571" cy="371676"/>
+            <a:off x="6158321" y="4374427"/>
+            <a:ext cx="4411418" cy="387325"/>
           </a:xfrm>
           <a:prstGeom prst="rect">
             <a:avLst/>
@@ -28525,7 +28525,7 @@
               </a:spcBef>
               <a:buFontTx/>
               <a:buNone/>
-              <a:defRPr sz="2200" b="1">
+              <a:defRPr sz="2000" b="1">
                 <a:solidFill>
                   <a:schemeClr val="accent1">
                     <a:lumMod val="70000"/>
@@ -28549,7 +28549,7 @@
           <p:cNvPr id="13" name="item_4">
             <a:extLst>
               <a:ext uri="{FF2B5EF4-FFF2-40B4-BE49-F238E27FC236}">
-                <a16:creationId xmlns:a16="http://schemas.microsoft.com/office/drawing/2014/main" id="{EA9502E6-E92A-6DF3-B4E2-D98EF5B20687}"/>
+                <a16:creationId xmlns:a16="http://schemas.microsoft.com/office/drawing/2014/main" id="{19809185-6579-E53C-A134-A7D4025F96B0}"/>
               </a:ext>
             </a:extLst>
           </p:cNvPr>
@@ -28562,8 +28562,8 @@
         </p:nvSpPr>
         <p:spPr>
           <a:xfrm>
-            <a:off x="6183245" y="4772706"/>
-            <a:ext cx="4361571" cy="892021"/>
+            <a:off x="6158321" y="4761750"/>
+            <a:ext cx="4411418" cy="929580"/>
           </a:xfrm>
           <a:prstGeom prst="rect">
             <a:avLst/>
@@ -28597,7 +28597,7 @@
           <p:cNvPr id="14" name="source">
             <a:extLst>
               <a:ext uri="{FF2B5EF4-FFF2-40B4-BE49-F238E27FC236}">
-                <a16:creationId xmlns:a16="http://schemas.microsoft.com/office/drawing/2014/main" id="{4D846682-E43F-C48B-2303-31FB3AA69739}"/>
+                <a16:creationId xmlns:a16="http://schemas.microsoft.com/office/drawing/2014/main" id="{B47F4497-6B06-3321-A021-57E87057CC5A}"/>
               </a:ext>
             </a:extLst>
           </p:cNvPr>
@@ -28654,7 +28654,7 @@
     </p:spTree>
     <p:extLst>
       <p:ext uri="{BB962C8B-B14F-4D97-AF65-F5344CB8AC3E}">
-        <p14:creationId xmlns:p14="http://schemas.microsoft.com/office/powerpoint/2010/main" val="152646816"/>
+        <p14:creationId xmlns:p14="http://schemas.microsoft.com/office/powerpoint/2010/main" val="3096334817"/>
       </p:ext>
     </p:extLst>
   </p:cSld>
@@ -28816,7 +28816,7 @@
             </a:lvl1pPr>
           </a:lstStyle>
           <a:p>
-            <a:fld id="{1146AB1F-C91F-4F0F-9868-5252CDCD6051}" type="datetimeFigureOut">
+            <a:fld id="{A9C3E1C2-504C-4CFF-A37A-AE4693906186}" type="datetimeFigureOut">
               <a:rPr lang="en-US" smtClean="0"/>
               <a:t>10/3/2026</a:t>
             </a:fld>
@@ -28898,7 +28898,7 @@
             </a:lvl1pPr>
           </a:lstStyle>
           <a:p>
-            <a:fld id="{FE1B144C-6E1C-47C6-9306-1DC2A92756EB}" type="slidenum">
+            <a:fld id="{0CAC26E6-90F8-49CB-BE00-E3E555820112}" type="slidenum">
               <a:rPr lang="en-US" smtClean="0"/>
               <a:t>‹#›</a:t>
             </a:fld>
@@ -28944,7 +28944,7 @@
     </p:spTree>
     <p:extLst>
       <p:ext uri="{BB962C8B-B14F-4D97-AF65-F5344CB8AC3E}">
-        <p14:creationId xmlns:p14="http://schemas.microsoft.com/office/powerpoint/2010/main" val="3154984826"/>
+        <p14:creationId xmlns:p14="http://schemas.microsoft.com/office/powerpoint/2010/main" val="1143444002"/>
       </p:ext>
     </p:extLst>
   </p:cSld>
